--- a/ppt/SumalathaKambhampati_X25156420_public-transit-fleet-monitoring.pptx
+++ b/ppt/SumalathaKambhampati_X25156420_public-transit-fleet-monitoring.pptx
@@ -1163,7 +1163,7 @@
           <a:bodyPr wrap="square" rtlCol="0" anchor="t"/>
           <a:lstStyle/>
           <a:p>
-            <a:pPr algn="l" indent="0" marL="0">
+            <a:pPr indent="0" marL="0">
               <a:buNone/>
             </a:pPr>
             <a:r>
@@ -1314,7 +1314,7 @@
               <a:buNone/>
             </a:pPr>
             <a:r>
-              <a:rPr lang="en-US" sz="1400" b="1" dirty="0">
+              <a:rPr lang="en-US" sz="1350" b="1" dirty="0">
                 <a:solidFill>
                   <a:srgbClr val="FF6A1F"/>
                 </a:solidFill>
@@ -1324,7 +1324,7 @@
               </a:rPr>
               <a:t>Engine &gt; 105 °C</a:t>
             </a:r>
-            <a:endParaRPr lang="en-US" sz="1400" dirty="0"/>
+            <a:endParaRPr lang="en-US" sz="1350" dirty="0"/>
           </a:p>
         </p:txBody>
       </p:sp>
@@ -1380,7 +1380,7 @@
               <a:buNone/>
             </a:pPr>
             <a:r>
-              <a:rPr lang="en-US" sz="1400" b="1" dirty="0">
+              <a:rPr lang="en-US" sz="1350" b="1" dirty="0">
                 <a:solidFill>
                   <a:srgbClr val="FF6A1F"/>
                 </a:solidFill>
@@ -1390,7 +1390,7 @@
               </a:rPr>
               <a:t>Brake wear &gt; 80%</a:t>
             </a:r>
-            <a:endParaRPr lang="en-US" sz="1400" dirty="0"/>
+            <a:endParaRPr lang="en-US" sz="1350" dirty="0"/>
           </a:p>
         </p:txBody>
       </p:sp>
@@ -1446,7 +1446,7 @@
               <a:buNone/>
             </a:pPr>
             <a:r>
-              <a:rPr lang="en-US" sz="1400" b="1" dirty="0">
+              <a:rPr lang="en-US" sz="1350" b="1" dirty="0">
                 <a:solidFill>
                   <a:srgbClr val="FF6A1F"/>
                 </a:solidFill>
@@ -1456,7 +1456,7 @@
               </a:rPr>
               <a:t>Overcrowd peak &gt; 75</a:t>
             </a:r>
-            <a:endParaRPr lang="en-US" sz="1400" dirty="0"/>
+            <a:endParaRPr lang="en-US" sz="1350" dirty="0"/>
           </a:p>
         </p:txBody>
       </p:sp>
@@ -1578,12 +1578,12 @@
         </p:nvSpPr>
         <p:spPr>
           <a:xfrm>
-            <a:off x="640080" y="2468880"/>
-            <a:ext cx="1572768" cy="1371600"/>
+            <a:off x="640080" y="1554480"/>
+            <a:ext cx="3200400" cy="3383280"/>
           </a:xfrm>
           <a:prstGeom prst="roundRect">
             <a:avLst>
-              <a:gd name="adj" fmla="val 6667"/>
+              <a:gd name="adj" fmla="val 2857"/>
             </a:avLst>
           </a:prstGeom>
           <a:solidFill>
@@ -1599,146 +1599,63 @@
       </p:sp>
       <p:sp>
         <p:nvSpPr>
-          <p:cNvPr id="4" name="Shape 2"/>
-          <p:cNvSpPr/>
-          <p:nvPr/>
-        </p:nvSpPr>
-        <p:spPr>
-          <a:xfrm>
-            <a:off x="1325880" y="2670048"/>
-            <a:ext cx="201168" cy="201168"/>
-          </a:xfrm>
-          <a:prstGeom prst="ellipse">
-            <a:avLst/>
-          </a:prstGeom>
-          <a:solidFill>
-            <a:srgbClr val="5E80B8"/>
-          </a:solidFill>
-          <a:ln/>
-        </p:spPr>
-      </p:sp>
-      <p:sp>
-        <p:nvSpPr>
-          <p:cNvPr id="5" name="Text 3"/>
-          <p:cNvSpPr/>
-          <p:nvPr/>
-        </p:nvSpPr>
-        <p:spPr>
-          <a:xfrm>
-            <a:off x="594360" y="2926080"/>
-            <a:ext cx="1664208" cy="411480"/>
-          </a:xfrm>
-          <a:prstGeom prst="rect">
-            <a:avLst/>
-          </a:prstGeom>
-          <a:noFill/>
-          <a:ln/>
-        </p:spPr>
-        <p:txBody>
-          <a:bodyPr wrap="square" lIns="0" tIns="0" rIns="0" bIns="0" rtlCol="0" anchor="ctr"/>
+          <p:cNvPr id="4" name="Text 2"/>
+          <p:cNvSpPr/>
+          <p:nvPr/>
+        </p:nvSpPr>
+        <p:spPr>
+          <a:xfrm>
+            <a:off x="640080" y="1691640"/>
+            <a:ext cx="3200400" cy="365760"/>
+          </a:xfrm>
+          <a:prstGeom prst="rect">
+            <a:avLst/>
+          </a:prstGeom>
+          <a:noFill/>
+          <a:ln/>
+        </p:spPr>
+        <p:txBody>
+          <a:bodyPr wrap="square" rtlCol="0" anchor="ctr"/>
           <a:lstStyle/>
           <a:p>
             <a:pPr algn="ctr" indent="0" marL="0">
               <a:buNone/>
             </a:pPr>
             <a:r>
-              <a:rPr lang="en-US" sz="1450" b="1" dirty="0">
-                <a:solidFill>
-                  <a:srgbClr val="152238"/>
+              <a:rPr lang="en-US" sz="1200" b="1" spc="300" kern="0" dirty="0">
+                <a:solidFill>
+                  <a:srgbClr val="5E80B8"/>
                 </a:solidFill>
                 <a:latin typeface="Calibri" pitchFamily="34" charset="0"/>
                 <a:ea typeface="Calibri" pitchFamily="34" charset="-122"/>
                 <a:cs typeface="Calibri" pitchFamily="34" charset="-120"/>
               </a:rPr>
-              <a:t>Bus sensors</a:t>
-            </a:r>
-            <a:endParaRPr lang="en-US" sz="1450" dirty="0"/>
-          </a:p>
-        </p:txBody>
-      </p:sp>
-      <p:sp>
-        <p:nvSpPr>
-          <p:cNvPr id="6" name="Text 4"/>
-          <p:cNvSpPr/>
-          <p:nvPr/>
-        </p:nvSpPr>
-        <p:spPr>
-          <a:xfrm>
-            <a:off x="621792" y="3310128"/>
-            <a:ext cx="1609344" cy="457200"/>
-          </a:xfrm>
-          <a:prstGeom prst="rect">
-            <a:avLst/>
-          </a:prstGeom>
-          <a:noFill/>
-          <a:ln/>
-        </p:spPr>
-        <p:txBody>
-          <a:bodyPr wrap="square" lIns="0" tIns="0" rIns="0" bIns="0" rtlCol="0" anchor="t"/>
-          <a:lstStyle/>
-          <a:p>
-            <a:pPr algn="ctr" indent="0" marL="0">
-              <a:buNone/>
-            </a:pPr>
-            <a:r>
-              <a:rPr lang="en-US" sz="1050" dirty="0">
-                <a:solidFill>
-                  <a:srgbClr val="5C6A80"/>
-                </a:solidFill>
-                <a:latin typeface="Calibri" pitchFamily="34" charset="0"/>
-                <a:ea typeface="Calibri" pitchFamily="34" charset="-122"/>
-                <a:cs typeface="Calibri" pitchFamily="34" charset="-120"/>
-              </a:rPr>
-              <a:t>10 · 2 depots</a:t>
-            </a:r>
-            <a:endParaRPr lang="en-US" sz="1050" dirty="0"/>
-          </a:p>
-        </p:txBody>
-      </p:sp>
-      <p:sp>
-        <p:nvSpPr>
-          <p:cNvPr id="7" name="Shape 5"/>
-          <p:cNvSpPr/>
-          <p:nvPr/>
-        </p:nvSpPr>
-        <p:spPr>
-          <a:xfrm>
-            <a:off x="2231136" y="3154680"/>
-            <a:ext cx="258409" cy="0"/>
-          </a:xfrm>
-          <a:prstGeom prst="line">
-            <a:avLst/>
-          </a:prstGeom>
-          <a:noFill/>
-          <a:ln w="25400">
-            <a:solidFill>
-              <a:srgbClr val="5E80B8"/>
-            </a:solidFill>
-            <a:prstDash val="solid"/>
-            <a:tailEnd type="triangle"/>
-          </a:ln>
-        </p:spPr>
-      </p:sp>
-      <p:sp>
-        <p:nvSpPr>
-          <p:cNvPr id="8" name="Shape 6"/>
-          <p:cNvSpPr/>
-          <p:nvPr/>
-        </p:nvSpPr>
-        <p:spPr>
-          <a:xfrm>
-            <a:off x="2507833" y="2468880"/>
-            <a:ext cx="1572768" cy="1371600"/>
+              <a:t>EDGE</a:t>
+            </a:r>
+            <a:endParaRPr lang="en-US" sz="1200" dirty="0"/>
+          </a:p>
+        </p:txBody>
+      </p:sp>
+      <p:sp>
+        <p:nvSpPr>
+          <p:cNvPr id="5" name="Shape 3"/>
+          <p:cNvSpPr/>
+          <p:nvPr/>
+        </p:nvSpPr>
+        <p:spPr>
+          <a:xfrm>
+            <a:off x="914400" y="2286000"/>
+            <a:ext cx="2651760" cy="1005840"/>
           </a:xfrm>
           <a:prstGeom prst="roundRect">
             <a:avLst>
-              <a:gd name="adj" fmla="val 6667"/>
+              <a:gd name="adj" fmla="val 7273"/>
             </a:avLst>
           </a:prstGeom>
           <a:solidFill>
-            <a:srgbClr val="EEF2F8"/>
+            <a:srgbClr val="FFFFFF"/>
           </a:solidFill>
-          <a:ln w="19050">
+          <a:ln w="15240">
             <a:solidFill>
               <a:srgbClr val="5E80B8"/>
             </a:solidFill>
@@ -1748,34 +1665,14 @@
       </p:sp>
       <p:sp>
         <p:nvSpPr>
-          <p:cNvPr id="9" name="Shape 7"/>
-          <p:cNvSpPr/>
-          <p:nvPr/>
-        </p:nvSpPr>
-        <p:spPr>
-          <a:xfrm>
-            <a:off x="3193633" y="2670048"/>
-            <a:ext cx="201168" cy="201168"/>
-          </a:xfrm>
-          <a:prstGeom prst="ellipse">
-            <a:avLst/>
-          </a:prstGeom>
-          <a:solidFill>
-            <a:srgbClr val="5E80B8"/>
-          </a:solidFill>
-          <a:ln/>
-        </p:spPr>
-      </p:sp>
-      <p:sp>
-        <p:nvSpPr>
-          <p:cNvPr id="10" name="Text 8"/>
-          <p:cNvSpPr/>
-          <p:nvPr/>
-        </p:nvSpPr>
-        <p:spPr>
-          <a:xfrm>
-            <a:off x="2462113" y="2926080"/>
-            <a:ext cx="1664208" cy="411480"/>
+          <p:cNvPr id="6" name="Text 4"/>
+          <p:cNvSpPr/>
+          <p:nvPr/>
+        </p:nvSpPr>
+        <p:spPr>
+          <a:xfrm>
+            <a:off x="914400" y="2432304"/>
+            <a:ext cx="2651760" cy="365760"/>
           </a:xfrm>
           <a:prstGeom prst="rect">
             <a:avLst/>
@@ -1791,7 +1688,7 @@
               <a:buNone/>
             </a:pPr>
             <a:r>
-              <a:rPr lang="en-US" sz="1450" b="1" dirty="0">
+              <a:rPr lang="en-US" sz="1400" b="1" dirty="0">
                 <a:solidFill>
                   <a:srgbClr val="152238"/>
                 </a:solidFill>
@@ -1799,38 +1696,38 @@
                 <a:ea typeface="Calibri" pitchFamily="34" charset="-122"/>
                 <a:cs typeface="Calibri" pitchFamily="34" charset="-120"/>
               </a:rPr>
-              <a:t>Fog node</a:t>
-            </a:r>
-            <a:endParaRPr lang="en-US" sz="1450" dirty="0"/>
-          </a:p>
-        </p:txBody>
-      </p:sp>
-      <p:sp>
-        <p:nvSpPr>
-          <p:cNvPr id="11" name="Text 9"/>
-          <p:cNvSpPr/>
-          <p:nvPr/>
-        </p:nvSpPr>
-        <p:spPr>
-          <a:xfrm>
-            <a:off x="2489545" y="3310128"/>
-            <a:ext cx="1609344" cy="457200"/>
-          </a:xfrm>
-          <a:prstGeom prst="rect">
-            <a:avLst/>
-          </a:prstGeom>
-          <a:noFill/>
-          <a:ln/>
-        </p:spPr>
-        <p:txBody>
-          <a:bodyPr wrap="square" lIns="0" tIns="0" rIns="0" bIns="0" rtlCol="0" anchor="t"/>
+              <a:t>Bus sensors</a:t>
+            </a:r>
+            <a:endParaRPr lang="en-US" sz="1400" dirty="0"/>
+          </a:p>
+        </p:txBody>
+      </p:sp>
+      <p:sp>
+        <p:nvSpPr>
+          <p:cNvPr id="7" name="Text 5"/>
+          <p:cNvSpPr/>
+          <p:nvPr/>
+        </p:nvSpPr>
+        <p:spPr>
+          <a:xfrm>
+            <a:off x="914400" y="2816352"/>
+            <a:ext cx="2651760" cy="365760"/>
+          </a:xfrm>
+          <a:prstGeom prst="rect">
+            <a:avLst/>
+          </a:prstGeom>
+          <a:noFill/>
+          <a:ln/>
+        </p:spPr>
+        <p:txBody>
+          <a:bodyPr wrap="square" lIns="0" tIns="0" rIns="0" bIns="0" rtlCol="0" anchor="ctr"/>
           <a:lstStyle/>
           <a:p>
             <a:pPr algn="ctr" indent="0" marL="0">
               <a:buNone/>
             </a:pPr>
             <a:r>
-              <a:rPr lang="en-US" sz="1050" dirty="0">
+              <a:rPr lang="en-US" sz="1000" dirty="0">
                 <a:solidFill>
                   <a:srgbClr val="5C6A80"/>
                 </a:solidFill>
@@ -1838,50 +1735,155 @@
                 <a:ea typeface="Calibri" pitchFamily="34" charset="-122"/>
                 <a:cs typeface="Calibri" pitchFamily="34" charset="-120"/>
               </a:rPr>
-              <a:t>buffer · drain · alarm</a:t>
-            </a:r>
-            <a:endParaRPr lang="en-US" sz="1050" dirty="0"/>
-          </a:p>
-        </p:txBody>
-      </p:sp>
-      <p:sp>
-        <p:nvSpPr>
-          <p:cNvPr id="12" name="Shape 10"/>
-          <p:cNvSpPr/>
-          <p:nvPr/>
-        </p:nvSpPr>
-        <p:spPr>
-          <a:xfrm>
-            <a:off x="4098889" y="3154680"/>
-            <a:ext cx="258409" cy="0"/>
-          </a:xfrm>
-          <a:prstGeom prst="line">
-            <a:avLst/>
-          </a:prstGeom>
-          <a:noFill/>
-          <a:ln w="25400">
+              <a:t>10 · 2 depots</a:t>
+            </a:r>
+            <a:endParaRPr lang="en-US" sz="1000" dirty="0"/>
+          </a:p>
+        </p:txBody>
+      </p:sp>
+      <p:sp>
+        <p:nvSpPr>
+          <p:cNvPr id="8" name="Shape 6"/>
+          <p:cNvSpPr/>
+          <p:nvPr/>
+        </p:nvSpPr>
+        <p:spPr>
+          <a:xfrm>
+            <a:off x="914400" y="3520440"/>
+            <a:ext cx="2651760" cy="1005840"/>
+          </a:xfrm>
+          <a:prstGeom prst="roundRect">
+            <a:avLst>
+              <a:gd name="adj" fmla="val 7273"/>
+            </a:avLst>
+          </a:prstGeom>
+          <a:solidFill>
+            <a:srgbClr val="FFFFFF"/>
+          </a:solidFill>
+          <a:ln w="15240">
             <a:solidFill>
               <a:srgbClr val="5E80B8"/>
             </a:solidFill>
             <a:prstDash val="solid"/>
+          </a:ln>
+        </p:spPr>
+      </p:sp>
+      <p:sp>
+        <p:nvSpPr>
+          <p:cNvPr id="9" name="Text 7"/>
+          <p:cNvSpPr/>
+          <p:nvPr/>
+        </p:nvSpPr>
+        <p:spPr>
+          <a:xfrm>
+            <a:off x="914400" y="3666744"/>
+            <a:ext cx="2651760" cy="365760"/>
+          </a:xfrm>
+          <a:prstGeom prst="rect">
+            <a:avLst/>
+          </a:prstGeom>
+          <a:noFill/>
+          <a:ln/>
+        </p:spPr>
+        <p:txBody>
+          <a:bodyPr wrap="square" lIns="0" tIns="0" rIns="0" bIns="0" rtlCol="0" anchor="ctr"/>
+          <a:lstStyle/>
+          <a:p>
+            <a:pPr algn="ctr" indent="0" marL="0">
+              <a:buNone/>
+            </a:pPr>
+            <a:r>
+              <a:rPr lang="en-US" sz="1400" b="1" dirty="0">
+                <a:solidFill>
+                  <a:srgbClr val="152238"/>
+                </a:solidFill>
+                <a:latin typeface="Calibri" pitchFamily="34" charset="0"/>
+                <a:ea typeface="Calibri" pitchFamily="34" charset="-122"/>
+                <a:cs typeface="Calibri" pitchFamily="34" charset="-120"/>
+              </a:rPr>
+              <a:t>Fog node</a:t>
+            </a:r>
+            <a:endParaRPr lang="en-US" sz="1400" dirty="0"/>
+          </a:p>
+        </p:txBody>
+      </p:sp>
+      <p:sp>
+        <p:nvSpPr>
+          <p:cNvPr id="10" name="Text 8"/>
+          <p:cNvSpPr/>
+          <p:nvPr/>
+        </p:nvSpPr>
+        <p:spPr>
+          <a:xfrm>
+            <a:off x="914400" y="4050792"/>
+            <a:ext cx="2651760" cy="365760"/>
+          </a:xfrm>
+          <a:prstGeom prst="rect">
+            <a:avLst/>
+          </a:prstGeom>
+          <a:noFill/>
+          <a:ln/>
+        </p:spPr>
+        <p:txBody>
+          <a:bodyPr wrap="square" lIns="0" tIns="0" rIns="0" bIns="0" rtlCol="0" anchor="ctr"/>
+          <a:lstStyle/>
+          <a:p>
+            <a:pPr algn="ctr" indent="0" marL="0">
+              <a:buNone/>
+            </a:pPr>
+            <a:r>
+              <a:rPr lang="en-US" sz="1000" dirty="0">
+                <a:solidFill>
+                  <a:srgbClr val="5C6A80"/>
+                </a:solidFill>
+                <a:latin typeface="Calibri" pitchFamily="34" charset="0"/>
+                <a:ea typeface="Calibri" pitchFamily="34" charset="-122"/>
+                <a:cs typeface="Calibri" pitchFamily="34" charset="-120"/>
+              </a:rPr>
+              <a:t>buffer · drain · alarm</a:t>
+            </a:r>
+            <a:endParaRPr lang="en-US" sz="1000" dirty="0"/>
+          </a:p>
+        </p:txBody>
+      </p:sp>
+      <p:sp>
+        <p:nvSpPr>
+          <p:cNvPr id="11" name="Shape 9"/>
+          <p:cNvSpPr/>
+          <p:nvPr/>
+        </p:nvSpPr>
+        <p:spPr>
+          <a:xfrm>
+            <a:off x="3886200" y="3246120"/>
+            <a:ext cx="502920" cy="0"/>
+          </a:xfrm>
+          <a:prstGeom prst="line">
+            <a:avLst/>
+          </a:prstGeom>
+          <a:noFill/>
+          <a:ln w="31750">
+            <a:solidFill>
+              <a:srgbClr val="1E3A6E"/>
+            </a:solidFill>
+            <a:prstDash val="solid"/>
             <a:tailEnd type="triangle"/>
           </a:ln>
         </p:spPr>
       </p:sp>
       <p:sp>
         <p:nvSpPr>
-          <p:cNvPr id="13" name="Shape 11"/>
-          <p:cNvSpPr/>
-          <p:nvPr/>
-        </p:nvSpPr>
-        <p:spPr>
-          <a:xfrm>
-            <a:off x="4375587" y="2468880"/>
-            <a:ext cx="1572768" cy="1371600"/>
+          <p:cNvPr id="12" name="Shape 10"/>
+          <p:cNvSpPr/>
+          <p:nvPr/>
+        </p:nvSpPr>
+        <p:spPr>
+          <a:xfrm>
+            <a:off x="4572000" y="1554480"/>
+            <a:ext cx="6949440" cy="3383280"/>
           </a:xfrm>
           <a:prstGeom prst="roundRect">
             <a:avLst>
-              <a:gd name="adj" fmla="val 6667"/>
+              <a:gd name="adj" fmla="val 2703"/>
             </a:avLst>
           </a:prstGeom>
           <a:solidFill>
@@ -1897,99 +1899,145 @@
       </p:sp>
       <p:sp>
         <p:nvSpPr>
-          <p:cNvPr id="14" name="Shape 12"/>
-          <p:cNvSpPr/>
-          <p:nvPr/>
-        </p:nvSpPr>
-        <p:spPr>
-          <a:xfrm>
-            <a:off x="5061387" y="2670048"/>
-            <a:ext cx="201168" cy="201168"/>
-          </a:xfrm>
-          <a:prstGeom prst="ellipse">
-            <a:avLst/>
-          </a:prstGeom>
-          <a:solidFill>
-            <a:srgbClr val="1E3A6E"/>
-          </a:solidFill>
-          <a:ln/>
-        </p:spPr>
-      </p:sp>
-      <p:sp>
-        <p:nvSpPr>
-          <p:cNvPr id="15" name="Text 13"/>
-          <p:cNvSpPr/>
-          <p:nvPr/>
-        </p:nvSpPr>
-        <p:spPr>
-          <a:xfrm>
-            <a:off x="4329867" y="2926080"/>
-            <a:ext cx="1664208" cy="411480"/>
-          </a:xfrm>
-          <a:prstGeom prst="rect">
-            <a:avLst/>
-          </a:prstGeom>
-          <a:noFill/>
-          <a:ln/>
-        </p:spPr>
-        <p:txBody>
-          <a:bodyPr wrap="square" lIns="0" tIns="0" rIns="0" bIns="0" rtlCol="0" anchor="ctr"/>
+          <p:cNvPr id="13" name="Text 11"/>
+          <p:cNvSpPr/>
+          <p:nvPr/>
+        </p:nvSpPr>
+        <p:spPr>
+          <a:xfrm>
+            <a:off x="4572000" y="1691640"/>
+            <a:ext cx="6949440" cy="365760"/>
+          </a:xfrm>
+          <a:prstGeom prst="rect">
+            <a:avLst/>
+          </a:prstGeom>
+          <a:noFill/>
+          <a:ln/>
+        </p:spPr>
+        <p:txBody>
+          <a:bodyPr wrap="square" rtlCol="0" anchor="ctr"/>
           <a:lstStyle/>
           <a:p>
             <a:pPr algn="ctr" indent="0" marL="0">
               <a:buNone/>
             </a:pPr>
             <a:r>
-              <a:rPr lang="en-US" sz="1450" b="1" dirty="0">
-                <a:solidFill>
-                  <a:srgbClr val="152238"/>
+              <a:rPr lang="en-US" sz="1200" b="1" spc="200" kern="0" dirty="0">
+                <a:solidFill>
+                  <a:srgbClr val="1E3A6E"/>
                 </a:solidFill>
                 <a:latin typeface="Calibri" pitchFamily="34" charset="0"/>
                 <a:ea typeface="Calibri" pitchFamily="34" charset="-122"/>
                 <a:cs typeface="Calibri" pitchFamily="34" charset="-120"/>
               </a:rPr>
-              <a:t>Amazon SQS</a:t>
-            </a:r>
-            <a:endParaRPr lang="en-US" sz="1450" dirty="0"/>
-          </a:p>
-        </p:txBody>
-      </p:sp>
-      <p:sp>
-        <p:nvSpPr>
-          <p:cNvPr id="16" name="Text 14"/>
-          <p:cNvSpPr/>
-          <p:nvPr/>
-        </p:nvSpPr>
-        <p:spPr>
-          <a:xfrm>
-            <a:off x="4357299" y="3310128"/>
-            <a:ext cx="1609344" cy="457200"/>
-          </a:xfrm>
-          <a:prstGeom prst="rect">
-            <a:avLst/>
-          </a:prstGeom>
-          <a:noFill/>
-          <a:ln/>
-        </p:spPr>
-        <p:txBody>
-          <a:bodyPr wrap="square" lIns="0" tIns="0" rIns="0" bIns="0" rtlCol="0" anchor="t"/>
+              <a:t>CLOUD (serverless)</a:t>
+            </a:r>
+            <a:endParaRPr lang="en-US" sz="1200" dirty="0"/>
+          </a:p>
+        </p:txBody>
+      </p:sp>
+      <p:sp>
+        <p:nvSpPr>
+          <p:cNvPr id="14" name="Shape 12"/>
+          <p:cNvSpPr/>
+          <p:nvPr/>
+        </p:nvSpPr>
+        <p:spPr>
+          <a:xfrm>
+            <a:off x="4846320" y="2651760"/>
+            <a:ext cx="1463040" cy="1371600"/>
+          </a:xfrm>
+          <a:prstGeom prst="roundRect">
+            <a:avLst>
+              <a:gd name="adj" fmla="val 5333"/>
+            </a:avLst>
+          </a:prstGeom>
+          <a:solidFill>
+            <a:srgbClr val="FFFFFF"/>
+          </a:solidFill>
+          <a:ln w="15240">
+            <a:solidFill>
+              <a:srgbClr val="1E3A6E"/>
+            </a:solidFill>
+            <a:prstDash val="solid"/>
+          </a:ln>
+        </p:spPr>
+      </p:sp>
+      <p:sp>
+        <p:nvSpPr>
+          <p:cNvPr id="15" name="Text 13"/>
+          <p:cNvSpPr/>
+          <p:nvPr/>
+        </p:nvSpPr>
+        <p:spPr>
+          <a:xfrm>
+            <a:off x="4800600" y="2907792"/>
+            <a:ext cx="1554480" cy="457200"/>
+          </a:xfrm>
+          <a:prstGeom prst="rect">
+            <a:avLst/>
+          </a:prstGeom>
+          <a:noFill/>
+          <a:ln/>
+        </p:spPr>
+        <p:txBody>
+          <a:bodyPr wrap="square" lIns="0" tIns="0" rIns="0" bIns="0" rtlCol="0" anchor="ctr"/>
           <a:lstStyle/>
           <a:p>
             <a:pPr algn="ctr" indent="0" marL="0">
               <a:buNone/>
             </a:pPr>
             <a:r>
-              <a:rPr lang="en-US" sz="1050" dirty="0">
-                <a:solidFill>
-                  <a:srgbClr val="5C6A80"/>
+              <a:rPr lang="en-US" sz="1250" b="1" dirty="0">
+                <a:solidFill>
+                  <a:srgbClr val="152238"/>
                 </a:solidFill>
                 <a:latin typeface="Calibri" pitchFamily="34" charset="0"/>
                 <a:ea typeface="Calibri" pitchFamily="34" charset="-122"/>
                 <a:cs typeface="Calibri" pitchFamily="34" charset="-120"/>
               </a:rPr>
+              <a:t>Amazon SQS</a:t>
+            </a:r>
+            <a:endParaRPr lang="en-US" sz="1250" dirty="0"/>
+          </a:p>
+        </p:txBody>
+      </p:sp>
+      <p:sp>
+        <p:nvSpPr>
+          <p:cNvPr id="16" name="Text 14"/>
+          <p:cNvSpPr/>
+          <p:nvPr/>
+        </p:nvSpPr>
+        <p:spPr>
+          <a:xfrm>
+            <a:off x="4828032" y="3401568"/>
+            <a:ext cx="1499616" cy="457200"/>
+          </a:xfrm>
+          <a:prstGeom prst="rect">
+            <a:avLst/>
+          </a:prstGeom>
+          <a:noFill/>
+          <a:ln/>
+        </p:spPr>
+        <p:txBody>
+          <a:bodyPr wrap="square" lIns="0" tIns="0" rIns="0" bIns="0" rtlCol="0" anchor="ctr"/>
+          <a:lstStyle/>
+          <a:p>
+            <a:pPr algn="ctr" indent="0" marL="0">
+              <a:buNone/>
+            </a:pPr>
+            <a:r>
+              <a:rPr lang="en-US" sz="900" dirty="0">
+                <a:solidFill>
+                  <a:srgbClr val="5C6A80"/>
+                </a:solidFill>
+                <a:latin typeface="Calibri" pitchFamily="34" charset="0"/>
+                <a:ea typeface="Calibri" pitchFamily="34" charset="-122"/>
+                <a:cs typeface="Calibri" pitchFamily="34" charset="-120"/>
+              </a:rPr>
               <a:t>aggregate queue</a:t>
             </a:r>
-            <a:endParaRPr lang="en-US" sz="1050" dirty="0"/>
+            <a:endParaRPr lang="en-US" sz="900" dirty="0"/>
           </a:p>
         </p:txBody>
       </p:sp>
@@ -2001,14 +2049,14 @@
         </p:nvSpPr>
         <p:spPr>
           <a:xfrm>
-            <a:off x="5966643" y="3154680"/>
-            <a:ext cx="258409" cy="0"/>
+            <a:off x="6318504" y="3337560"/>
+            <a:ext cx="164592" cy="0"/>
           </a:xfrm>
           <a:prstGeom prst="line">
             <a:avLst/>
           </a:prstGeom>
           <a:noFill/>
-          <a:ln w="25400">
+          <a:ln w="20320">
             <a:solidFill>
               <a:srgbClr val="5E80B8"/>
             </a:solidFill>
@@ -2025,18 +2073,18 @@
         </p:nvSpPr>
         <p:spPr>
           <a:xfrm>
-            <a:off x="6243340" y="2468880"/>
-            <a:ext cx="1572768" cy="1371600"/>
+            <a:off x="6492240" y="2651760"/>
+            <a:ext cx="1463040" cy="1371600"/>
           </a:xfrm>
           <a:prstGeom prst="roundRect">
             <a:avLst>
-              <a:gd name="adj" fmla="val 6667"/>
+              <a:gd name="adj" fmla="val 5333"/>
             </a:avLst>
           </a:prstGeom>
           <a:solidFill>
-            <a:srgbClr val="EEF2F8"/>
+            <a:srgbClr val="FFFFFF"/>
           </a:solidFill>
-          <a:ln w="19050">
+          <a:ln w="15240">
             <a:solidFill>
               <a:srgbClr val="1E3A6E"/>
             </a:solidFill>
@@ -2046,34 +2094,14 @@
       </p:sp>
       <p:sp>
         <p:nvSpPr>
-          <p:cNvPr id="19" name="Shape 17"/>
-          <p:cNvSpPr/>
-          <p:nvPr/>
-        </p:nvSpPr>
-        <p:spPr>
-          <a:xfrm>
-            <a:off x="6929140" y="2670048"/>
-            <a:ext cx="201168" cy="201168"/>
-          </a:xfrm>
-          <a:prstGeom prst="ellipse">
-            <a:avLst/>
-          </a:prstGeom>
-          <a:solidFill>
-            <a:srgbClr val="1E3A6E"/>
-          </a:solidFill>
-          <a:ln/>
-        </p:spPr>
-      </p:sp>
-      <p:sp>
-        <p:nvSpPr>
-          <p:cNvPr id="20" name="Text 18"/>
-          <p:cNvSpPr/>
-          <p:nvPr/>
-        </p:nvSpPr>
-        <p:spPr>
-          <a:xfrm>
-            <a:off x="6197620" y="2926080"/>
-            <a:ext cx="1664208" cy="411480"/>
+          <p:cNvPr id="19" name="Text 17"/>
+          <p:cNvSpPr/>
+          <p:nvPr/>
+        </p:nvSpPr>
+        <p:spPr>
+          <a:xfrm>
+            <a:off x="6446520" y="2907792"/>
+            <a:ext cx="1554480" cy="457200"/>
           </a:xfrm>
           <a:prstGeom prst="rect">
             <a:avLst/>
@@ -2089,7 +2117,7 @@
               <a:buNone/>
             </a:pPr>
             <a:r>
-              <a:rPr lang="en-US" sz="1450" b="1" dirty="0">
+              <a:rPr lang="en-US" sz="1250" b="1" dirty="0">
                 <a:solidFill>
                   <a:srgbClr val="152238"/>
                 </a:solidFill>
@@ -2099,36 +2127,36 @@
               </a:rPr>
               <a:t>AWS Lambda</a:t>
             </a:r>
-            <a:endParaRPr lang="en-US" sz="1450" dirty="0"/>
-          </a:p>
-        </p:txBody>
-      </p:sp>
-      <p:sp>
-        <p:nvSpPr>
-          <p:cNvPr id="21" name="Text 19"/>
-          <p:cNvSpPr/>
-          <p:nvPr/>
-        </p:nvSpPr>
-        <p:spPr>
-          <a:xfrm>
-            <a:off x="6225052" y="3310128"/>
-            <a:ext cx="1609344" cy="457200"/>
-          </a:xfrm>
-          <a:prstGeom prst="rect">
-            <a:avLst/>
-          </a:prstGeom>
-          <a:noFill/>
-          <a:ln/>
-        </p:spPr>
-        <p:txBody>
-          <a:bodyPr wrap="square" lIns="0" tIns="0" rIns="0" bIns="0" rtlCol="0" anchor="t"/>
+            <a:endParaRPr lang="en-US" sz="1250" dirty="0"/>
+          </a:p>
+        </p:txBody>
+      </p:sp>
+      <p:sp>
+        <p:nvSpPr>
+          <p:cNvPr id="20" name="Text 18"/>
+          <p:cNvSpPr/>
+          <p:nvPr/>
+        </p:nvSpPr>
+        <p:spPr>
+          <a:xfrm>
+            <a:off x="6473952" y="3401568"/>
+            <a:ext cx="1499616" cy="457200"/>
+          </a:xfrm>
+          <a:prstGeom prst="rect">
+            <a:avLst/>
+          </a:prstGeom>
+          <a:noFill/>
+          <a:ln/>
+        </p:spPr>
+        <p:txBody>
+          <a:bodyPr wrap="square" lIns="0" tIns="0" rIns="0" bIns="0" rtlCol="0" anchor="ctr"/>
           <a:lstStyle/>
           <a:p>
             <a:pPr algn="ctr" indent="0" marL="0">
               <a:buNone/>
             </a:pPr>
             <a:r>
-              <a:rPr lang="en-US" sz="1050" dirty="0">
+              <a:rPr lang="en-US" sz="900" dirty="0">
                 <a:solidFill>
                   <a:srgbClr val="5C6A80"/>
                 </a:solidFill>
@@ -2138,26 +2166,26 @@
               </a:rPr>
               <a:t>java17 ingest</a:t>
             </a:r>
-            <a:endParaRPr lang="en-US" sz="1050" dirty="0"/>
-          </a:p>
-        </p:txBody>
-      </p:sp>
-      <p:sp>
-        <p:nvSpPr>
-          <p:cNvPr id="22" name="Shape 20"/>
-          <p:cNvSpPr/>
-          <p:nvPr/>
-        </p:nvSpPr>
-        <p:spPr>
-          <a:xfrm>
-            <a:off x="7834396" y="3154680"/>
-            <a:ext cx="258409" cy="0"/>
+            <a:endParaRPr lang="en-US" sz="900" dirty="0"/>
+          </a:p>
+        </p:txBody>
+      </p:sp>
+      <p:sp>
+        <p:nvSpPr>
+          <p:cNvPr id="21" name="Shape 19"/>
+          <p:cNvSpPr/>
+          <p:nvPr/>
+        </p:nvSpPr>
+        <p:spPr>
+          <a:xfrm>
+            <a:off x="7964424" y="3337560"/>
+            <a:ext cx="164592" cy="0"/>
           </a:xfrm>
           <a:prstGeom prst="line">
             <a:avLst/>
           </a:prstGeom>
           <a:noFill/>
-          <a:ln w="25400">
+          <a:ln w="20320">
             <a:solidFill>
               <a:srgbClr val="5E80B8"/>
             </a:solidFill>
@@ -2168,24 +2196,24 @@
       </p:sp>
       <p:sp>
         <p:nvSpPr>
-          <p:cNvPr id="23" name="Shape 21"/>
-          <p:cNvSpPr/>
-          <p:nvPr/>
-        </p:nvSpPr>
-        <p:spPr>
-          <a:xfrm>
-            <a:off x="8111094" y="2468880"/>
-            <a:ext cx="1572768" cy="1371600"/>
+          <p:cNvPr id="22" name="Shape 20"/>
+          <p:cNvSpPr/>
+          <p:nvPr/>
+        </p:nvSpPr>
+        <p:spPr>
+          <a:xfrm>
+            <a:off x="8138160" y="2651760"/>
+            <a:ext cx="1463040" cy="1371600"/>
           </a:xfrm>
           <a:prstGeom prst="roundRect">
             <a:avLst>
-              <a:gd name="adj" fmla="val 6667"/>
+              <a:gd name="adj" fmla="val 5333"/>
             </a:avLst>
           </a:prstGeom>
           <a:solidFill>
-            <a:srgbClr val="EEF2F8"/>
+            <a:srgbClr val="FFFFFF"/>
           </a:solidFill>
-          <a:ln w="19050">
+          <a:ln w="15240">
             <a:solidFill>
               <a:srgbClr val="1E3A6E"/>
             </a:solidFill>
@@ -2195,34 +2223,14 @@
       </p:sp>
       <p:sp>
         <p:nvSpPr>
-          <p:cNvPr id="24" name="Shape 22"/>
-          <p:cNvSpPr/>
-          <p:nvPr/>
-        </p:nvSpPr>
-        <p:spPr>
-          <a:xfrm>
-            <a:off x="8796894" y="2670048"/>
-            <a:ext cx="201168" cy="201168"/>
-          </a:xfrm>
-          <a:prstGeom prst="ellipse">
-            <a:avLst/>
-          </a:prstGeom>
-          <a:solidFill>
-            <a:srgbClr val="1E3A6E"/>
-          </a:solidFill>
-          <a:ln/>
-        </p:spPr>
-      </p:sp>
-      <p:sp>
-        <p:nvSpPr>
-          <p:cNvPr id="25" name="Text 23"/>
-          <p:cNvSpPr/>
-          <p:nvPr/>
-        </p:nvSpPr>
-        <p:spPr>
-          <a:xfrm>
-            <a:off x="8065374" y="2926080"/>
-            <a:ext cx="1664208" cy="411480"/>
+          <p:cNvPr id="23" name="Text 21"/>
+          <p:cNvSpPr/>
+          <p:nvPr/>
+        </p:nvSpPr>
+        <p:spPr>
+          <a:xfrm>
+            <a:off x="8092440" y="2907792"/>
+            <a:ext cx="1554480" cy="457200"/>
           </a:xfrm>
           <a:prstGeom prst="rect">
             <a:avLst/>
@@ -2238,7 +2246,7 @@
               <a:buNone/>
             </a:pPr>
             <a:r>
-              <a:rPr lang="en-US" sz="1450" b="1" dirty="0">
+              <a:rPr lang="en-US" sz="1250" b="1" dirty="0">
                 <a:solidFill>
                   <a:srgbClr val="152238"/>
                 </a:solidFill>
@@ -2248,36 +2256,36 @@
               </a:rPr>
               <a:t>DynamoDB</a:t>
             </a:r>
-            <a:endParaRPr lang="en-US" sz="1450" dirty="0"/>
-          </a:p>
-        </p:txBody>
-      </p:sp>
-      <p:sp>
-        <p:nvSpPr>
-          <p:cNvPr id="26" name="Text 24"/>
-          <p:cNvSpPr/>
-          <p:nvPr/>
-        </p:nvSpPr>
-        <p:spPr>
-          <a:xfrm>
-            <a:off x="8092806" y="3310128"/>
-            <a:ext cx="1609344" cy="457200"/>
-          </a:xfrm>
-          <a:prstGeom prst="rect">
-            <a:avLst/>
-          </a:prstGeom>
-          <a:noFill/>
-          <a:ln/>
-        </p:spPr>
-        <p:txBody>
-          <a:bodyPr wrap="square" lIns="0" tIns="0" rIns="0" bIns="0" rtlCol="0" anchor="t"/>
+            <a:endParaRPr lang="en-US" sz="1250" dirty="0"/>
+          </a:p>
+        </p:txBody>
+      </p:sp>
+      <p:sp>
+        <p:nvSpPr>
+          <p:cNvPr id="24" name="Text 22"/>
+          <p:cNvSpPr/>
+          <p:nvPr/>
+        </p:nvSpPr>
+        <p:spPr>
+          <a:xfrm>
+            <a:off x="8119872" y="3401568"/>
+            <a:ext cx="1499616" cy="457200"/>
+          </a:xfrm>
+          <a:prstGeom prst="rect">
+            <a:avLst/>
+          </a:prstGeom>
+          <a:noFill/>
+          <a:ln/>
+        </p:spPr>
+        <p:txBody>
+          <a:bodyPr wrap="square" lIns="0" tIns="0" rIns="0" bIns="0" rtlCol="0" anchor="ctr"/>
           <a:lstStyle/>
           <a:p>
             <a:pPr algn="ctr" indent="0" marL="0">
               <a:buNone/>
             </a:pPr>
             <a:r>
-              <a:rPr lang="en-US" sz="1050" dirty="0">
+              <a:rPr lang="en-US" sz="900" dirty="0">
                 <a:solidFill>
                   <a:srgbClr val="5C6A80"/>
                 </a:solidFill>
@@ -2287,26 +2295,26 @@
               </a:rPr>
               <a:t>window store</a:t>
             </a:r>
-            <a:endParaRPr lang="en-US" sz="1050" dirty="0"/>
-          </a:p>
-        </p:txBody>
-      </p:sp>
-      <p:sp>
-        <p:nvSpPr>
-          <p:cNvPr id="27" name="Shape 25"/>
-          <p:cNvSpPr/>
-          <p:nvPr/>
-        </p:nvSpPr>
-        <p:spPr>
-          <a:xfrm>
-            <a:off x="9702150" y="3154680"/>
-            <a:ext cx="258409" cy="0"/>
+            <a:endParaRPr lang="en-US" sz="900" dirty="0"/>
+          </a:p>
+        </p:txBody>
+      </p:sp>
+      <p:sp>
+        <p:nvSpPr>
+          <p:cNvPr id="25" name="Shape 23"/>
+          <p:cNvSpPr/>
+          <p:nvPr/>
+        </p:nvSpPr>
+        <p:spPr>
+          <a:xfrm>
+            <a:off x="9610344" y="3337560"/>
+            <a:ext cx="164592" cy="0"/>
           </a:xfrm>
           <a:prstGeom prst="line">
             <a:avLst/>
           </a:prstGeom>
           <a:noFill/>
-          <a:ln w="25400">
+          <a:ln w="20320">
             <a:solidFill>
               <a:srgbClr val="5E80B8"/>
             </a:solidFill>
@@ -2317,24 +2325,24 @@
       </p:sp>
       <p:sp>
         <p:nvSpPr>
-          <p:cNvPr id="28" name="Shape 26"/>
-          <p:cNvSpPr/>
-          <p:nvPr/>
-        </p:nvSpPr>
-        <p:spPr>
-          <a:xfrm>
-            <a:off x="9978847" y="2468880"/>
-            <a:ext cx="1572768" cy="1371600"/>
+          <p:cNvPr id="26" name="Shape 24"/>
+          <p:cNvSpPr/>
+          <p:nvPr/>
+        </p:nvSpPr>
+        <p:spPr>
+          <a:xfrm>
+            <a:off x="9784080" y="2651760"/>
+            <a:ext cx="1463040" cy="1371600"/>
           </a:xfrm>
           <a:prstGeom prst="roundRect">
             <a:avLst>
-              <a:gd name="adj" fmla="val 6667"/>
+              <a:gd name="adj" fmla="val 5333"/>
             </a:avLst>
           </a:prstGeom>
           <a:solidFill>
-            <a:srgbClr val="EEF2F8"/>
+            <a:srgbClr val="FFFFFF"/>
           </a:solidFill>
-          <a:ln w="19050">
+          <a:ln w="15240">
             <a:solidFill>
               <a:srgbClr val="2E5AA0"/>
             </a:solidFill>
@@ -2344,34 +2352,14 @@
       </p:sp>
       <p:sp>
         <p:nvSpPr>
-          <p:cNvPr id="29" name="Shape 27"/>
-          <p:cNvSpPr/>
-          <p:nvPr/>
-        </p:nvSpPr>
-        <p:spPr>
-          <a:xfrm>
-            <a:off x="10664647" y="2670048"/>
-            <a:ext cx="201168" cy="201168"/>
-          </a:xfrm>
-          <a:prstGeom prst="ellipse">
-            <a:avLst/>
-          </a:prstGeom>
-          <a:solidFill>
-            <a:srgbClr val="2E5AA0"/>
-          </a:solidFill>
-          <a:ln/>
-        </p:spPr>
-      </p:sp>
-      <p:sp>
-        <p:nvSpPr>
-          <p:cNvPr id="30" name="Text 28"/>
-          <p:cNvSpPr/>
-          <p:nvPr/>
-        </p:nvSpPr>
-        <p:spPr>
-          <a:xfrm>
-            <a:off x="9933127" y="2926080"/>
-            <a:ext cx="1664208" cy="411480"/>
+          <p:cNvPr id="27" name="Text 25"/>
+          <p:cNvSpPr/>
+          <p:nvPr/>
+        </p:nvSpPr>
+        <p:spPr>
+          <a:xfrm>
+            <a:off x="9738360" y="2907792"/>
+            <a:ext cx="1554480" cy="457200"/>
           </a:xfrm>
           <a:prstGeom prst="rect">
             <a:avLst/>
@@ -2387,7 +2375,7 @@
               <a:buNone/>
             </a:pPr>
             <a:r>
-              <a:rPr lang="en-US" sz="1450" b="1" dirty="0">
+              <a:rPr lang="en-US" sz="1250" b="1" dirty="0">
                 <a:solidFill>
                   <a:srgbClr val="152238"/>
                 </a:solidFill>
@@ -2397,36 +2385,36 @@
               </a:rPr>
               <a:t>API GW + S3</a:t>
             </a:r>
-            <a:endParaRPr lang="en-US" sz="1450" dirty="0"/>
-          </a:p>
-        </p:txBody>
-      </p:sp>
-      <p:sp>
-        <p:nvSpPr>
-          <p:cNvPr id="31" name="Text 29"/>
-          <p:cNvSpPr/>
-          <p:nvPr/>
-        </p:nvSpPr>
-        <p:spPr>
-          <a:xfrm>
-            <a:off x="9960559" y="3310128"/>
-            <a:ext cx="1609344" cy="457200"/>
-          </a:xfrm>
-          <a:prstGeom prst="rect">
-            <a:avLst/>
-          </a:prstGeom>
-          <a:noFill/>
-          <a:ln/>
-        </p:spPr>
-        <p:txBody>
-          <a:bodyPr wrap="square" lIns="0" tIns="0" rIns="0" bIns="0" rtlCol="0" anchor="t"/>
+            <a:endParaRPr lang="en-US" sz="1250" dirty="0"/>
+          </a:p>
+        </p:txBody>
+      </p:sp>
+      <p:sp>
+        <p:nvSpPr>
+          <p:cNvPr id="28" name="Text 26"/>
+          <p:cNvSpPr/>
+          <p:nvPr/>
+        </p:nvSpPr>
+        <p:spPr>
+          <a:xfrm>
+            <a:off x="9765792" y="3401568"/>
+            <a:ext cx="1499616" cy="457200"/>
+          </a:xfrm>
+          <a:prstGeom prst="rect">
+            <a:avLst/>
+          </a:prstGeom>
+          <a:noFill/>
+          <a:ln/>
+        </p:spPr>
+        <p:txBody>
+          <a:bodyPr wrap="square" lIns="0" tIns="0" rIns="0" bIns="0" rtlCol="0" anchor="ctr"/>
           <a:lstStyle/>
           <a:p>
             <a:pPr algn="ctr" indent="0" marL="0">
               <a:buNone/>
             </a:pPr>
             <a:r>
-              <a:rPr lang="en-US" sz="1050" dirty="0">
+              <a:rPr lang="en-US" sz="900" dirty="0">
                 <a:solidFill>
                   <a:srgbClr val="5C6A80"/>
                 </a:solidFill>
@@ -2436,98 +2424,20 @@
               </a:rPr>
               <a:t>fleet dashboard</a:t>
             </a:r>
-            <a:endParaRPr lang="en-US" sz="1050" dirty="0"/>
-          </a:p>
-        </p:txBody>
-      </p:sp>
-      <p:sp>
-        <p:nvSpPr>
-          <p:cNvPr id="32" name="Text 30"/>
-          <p:cNvSpPr/>
-          <p:nvPr/>
-        </p:nvSpPr>
-        <p:spPr>
-          <a:xfrm>
-            <a:off x="640080" y="3977640"/>
-            <a:ext cx="3440521" cy="274320"/>
-          </a:xfrm>
-          <a:prstGeom prst="rect">
-            <a:avLst/>
-          </a:prstGeom>
-          <a:noFill/>
-          <a:ln/>
-        </p:spPr>
-        <p:txBody>
-          <a:bodyPr wrap="square" rtlCol="0" anchor="ctr"/>
-          <a:lstStyle/>
-          <a:p>
-            <a:pPr algn="ctr" indent="0" marL="0">
-              <a:buNone/>
-            </a:pPr>
-            <a:r>
-              <a:rPr lang="en-US" sz="1100" b="1" spc="200" kern="0" dirty="0">
-                <a:solidFill>
-                  <a:srgbClr val="5E80B8"/>
-                </a:solidFill>
-                <a:latin typeface="Calibri" pitchFamily="34" charset="0"/>
-                <a:ea typeface="Calibri" pitchFamily="34" charset="-122"/>
-                <a:cs typeface="Calibri" pitchFamily="34" charset="-120"/>
-              </a:rPr>
-              <a:t>EDGE</a:t>
-            </a:r>
-            <a:endParaRPr lang="en-US" sz="1100" dirty="0"/>
-          </a:p>
-        </p:txBody>
-      </p:sp>
-      <p:sp>
-        <p:nvSpPr>
-          <p:cNvPr id="33" name="Text 31"/>
-          <p:cNvSpPr/>
-          <p:nvPr/>
-        </p:nvSpPr>
-        <p:spPr>
-          <a:xfrm>
-            <a:off x="4375587" y="3977640"/>
-            <a:ext cx="7176028" cy="274320"/>
-          </a:xfrm>
-          <a:prstGeom prst="rect">
-            <a:avLst/>
-          </a:prstGeom>
-          <a:noFill/>
-          <a:ln/>
-        </p:spPr>
-        <p:txBody>
-          <a:bodyPr wrap="square" rtlCol="0" anchor="ctr"/>
-          <a:lstStyle/>
-          <a:p>
-            <a:pPr algn="ctr" indent="0" marL="0">
-              <a:buNone/>
-            </a:pPr>
-            <a:r>
-              <a:rPr lang="en-US" sz="1100" b="1" spc="200" kern="0" dirty="0">
-                <a:solidFill>
-                  <a:srgbClr val="1E3A6E"/>
-                </a:solidFill>
-                <a:latin typeface="Calibri" pitchFamily="34" charset="0"/>
-                <a:ea typeface="Calibri" pitchFamily="34" charset="-122"/>
-                <a:cs typeface="Calibri" pitchFamily="34" charset="-120"/>
-              </a:rPr>
-              <a:t>CLOUD</a:t>
-            </a:r>
-            <a:endParaRPr lang="en-US" sz="1100" dirty="0"/>
-          </a:p>
-        </p:txBody>
-      </p:sp>
-      <p:sp>
-        <p:nvSpPr>
-          <p:cNvPr id="34" name="Text 32"/>
-          <p:cNvSpPr/>
-          <p:nvPr/>
-        </p:nvSpPr>
-        <p:spPr>
-          <a:xfrm>
-            <a:off x="640080" y="5212080"/>
-            <a:ext cx="10972800" cy="640080"/>
+            <a:endParaRPr lang="en-US" sz="900" dirty="0"/>
+          </a:p>
+        </p:txBody>
+      </p:sp>
+      <p:sp>
+        <p:nvSpPr>
+          <p:cNvPr id="29" name="Text 27"/>
+          <p:cNvSpPr/>
+          <p:nvPr/>
+        </p:nvSpPr>
+        <p:spPr>
+          <a:xfrm>
+            <a:off x="640080" y="5257800"/>
+            <a:ext cx="10972800" cy="731520"/>
           </a:xfrm>
           <a:prstGeom prst="rect">
             <a:avLst/>
@@ -2669,34 +2579,14 @@
       </p:sp>
       <p:sp>
         <p:nvSpPr>
-          <p:cNvPr id="4" name="Shape 2"/>
-          <p:cNvSpPr/>
-          <p:nvPr/>
-        </p:nvSpPr>
-        <p:spPr>
-          <a:xfrm>
-            <a:off x="731520" y="1965960"/>
-            <a:ext cx="685800" cy="685800"/>
-          </a:xfrm>
-          <a:prstGeom prst="ellipse">
-            <a:avLst/>
-          </a:prstGeom>
-          <a:solidFill>
-            <a:srgbClr val="1E3A6E"/>
-          </a:solidFill>
-          <a:ln/>
-        </p:spPr>
-      </p:sp>
-      <p:sp>
-        <p:nvSpPr>
-          <p:cNvPr id="5" name="Text 3"/>
-          <p:cNvSpPr/>
-          <p:nvPr/>
-        </p:nvSpPr>
-        <p:spPr>
-          <a:xfrm>
-            <a:off x="731520" y="1965960"/>
-            <a:ext cx="685800" cy="685800"/>
+          <p:cNvPr id="4" name="Text 2"/>
+          <p:cNvSpPr/>
+          <p:nvPr/>
+        </p:nvSpPr>
+        <p:spPr>
+          <a:xfrm>
+            <a:off x="640080" y="1737360"/>
+            <a:ext cx="1097280" cy="1097280"/>
           </a:xfrm>
           <a:prstGeom prst="rect">
             <a:avLst/>
@@ -2708,13 +2598,13 @@
           <a:bodyPr wrap="square" lIns="0" tIns="0" rIns="0" bIns="0" rtlCol="0" anchor="ctr"/>
           <a:lstStyle/>
           <a:p>
-            <a:pPr algn="ctr" indent="0" marL="0">
-              <a:buNone/>
-            </a:pPr>
-            <a:r>
-              <a:rPr lang="en-US" sz="2600" b="1" dirty="0">
-                <a:solidFill>
-                  <a:srgbClr val="FFFFFF"/>
+            <a:pPr indent="0" marL="0">
+              <a:buNone/>
+            </a:pPr>
+            <a:r>
+              <a:rPr lang="en-US" sz="5400" b="1" dirty="0">
+                <a:solidFill>
+                  <a:srgbClr val="EEF2F8"/>
                 </a:solidFill>
                 <a:latin typeface="Cambria" pitchFamily="34" charset="0"/>
                 <a:ea typeface="Cambria" pitchFamily="34" charset="-122"/>
@@ -2722,9 +2612,32 @@
               </a:rPr>
               <a:t>1</a:t>
             </a:r>
-            <a:endParaRPr lang="en-US" sz="2600" dirty="0"/>
-          </a:p>
-        </p:txBody>
+            <a:endParaRPr lang="en-US" sz="5400" dirty="0"/>
+          </a:p>
+        </p:txBody>
+      </p:sp>
+      <p:sp>
+        <p:nvSpPr>
+          <p:cNvPr id="5" name="Shape 3"/>
+          <p:cNvSpPr/>
+          <p:nvPr/>
+        </p:nvSpPr>
+        <p:spPr>
+          <a:xfrm>
+            <a:off x="1828800" y="1920240"/>
+            <a:ext cx="0" cy="1051560"/>
+          </a:xfrm>
+          <a:prstGeom prst="line">
+            <a:avLst/>
+          </a:prstGeom>
+          <a:noFill/>
+          <a:ln w="25400">
+            <a:solidFill>
+              <a:srgbClr val="2E5AA0"/>
+            </a:solidFill>
+            <a:prstDash val="solid"/>
+          </a:ln>
+        </p:spPr>
       </p:sp>
       <p:sp>
         <p:nvSpPr>
@@ -2734,8 +2647,8 @@
         </p:nvSpPr>
         <p:spPr>
           <a:xfrm>
-            <a:off x="1691640" y="1920240"/>
-            <a:ext cx="9875520" cy="411480"/>
+            <a:off x="2057400" y="1874520"/>
+            <a:ext cx="9509760" cy="411480"/>
           </a:xfrm>
           <a:prstGeom prst="rect">
             <a:avLst/>
@@ -2759,7 +2672,7 @@
                 <a:ea typeface="Calibri" pitchFamily="34" charset="-122"/>
                 <a:cs typeface="Calibri" pitchFamily="34" charset="-120"/>
               </a:rPr>
-              <a:t>Pipeline health, all green</a:t>
+              <a:t>A roster of meter cards per depot</a:t>
             </a:r>
             <a:endParaRPr lang="en-US" sz="1800" dirty="0"/>
           </a:p>
@@ -2773,8 +2686,8 @@
         </p:nvSpPr>
         <p:spPr>
           <a:xfrm>
-            <a:off x="1691640" y="2340864"/>
-            <a:ext cx="9875520" cy="640080"/>
+            <a:off x="2057400" y="2313432"/>
+            <a:ext cx="9509760" cy="822960"/>
           </a:xfrm>
           <a:prstGeom prst="rect">
             <a:avLst/>
@@ -2798,7 +2711,7 @@
                 <a:ea typeface="Calibri" pitchFamily="34" charset="-122"/>
                 <a:cs typeface="Calibri" pitchFamily="34" charset="-120"/>
               </a:rPr>
-              <a:t>Gateway, queue, Lambda and pipeline all green on the live deployment.</a:t>
+              <a:t>Engine temperature, brake-pad wear, passenger count, fuel level and GPS speed live for every bus, with native meter bars.</a:t>
             </a:r>
             <a:endParaRPr lang="en-US" sz="1350" dirty="0"/>
           </a:p>
@@ -2806,34 +2719,14 @@
       </p:sp>
       <p:sp>
         <p:nvSpPr>
-          <p:cNvPr id="8" name="Shape 6"/>
-          <p:cNvSpPr/>
-          <p:nvPr/>
-        </p:nvSpPr>
-        <p:spPr>
-          <a:xfrm>
-            <a:off x="731520" y="3383280"/>
-            <a:ext cx="685800" cy="685800"/>
-          </a:xfrm>
-          <a:prstGeom prst="ellipse">
-            <a:avLst/>
-          </a:prstGeom>
-          <a:solidFill>
-            <a:srgbClr val="1E3A6E"/>
-          </a:solidFill>
-          <a:ln/>
-        </p:spPr>
-      </p:sp>
-      <p:sp>
-        <p:nvSpPr>
-          <p:cNvPr id="9" name="Text 7"/>
-          <p:cNvSpPr/>
-          <p:nvPr/>
-        </p:nvSpPr>
-        <p:spPr>
-          <a:xfrm>
-            <a:off x="731520" y="3383280"/>
-            <a:ext cx="685800" cy="685800"/>
+          <p:cNvPr id="8" name="Text 6"/>
+          <p:cNvSpPr/>
+          <p:nvPr/>
+        </p:nvSpPr>
+        <p:spPr>
+          <a:xfrm>
+            <a:off x="640080" y="3200400"/>
+            <a:ext cx="1097280" cy="1097280"/>
           </a:xfrm>
           <a:prstGeom prst="rect">
             <a:avLst/>
@@ -2845,13 +2738,13 @@
           <a:bodyPr wrap="square" lIns="0" tIns="0" rIns="0" bIns="0" rtlCol="0" anchor="ctr"/>
           <a:lstStyle/>
           <a:p>
-            <a:pPr algn="ctr" indent="0" marL="0">
-              <a:buNone/>
-            </a:pPr>
-            <a:r>
-              <a:rPr lang="en-US" sz="2600" b="1" dirty="0">
-                <a:solidFill>
-                  <a:srgbClr val="FFFFFF"/>
+            <a:pPr indent="0" marL="0">
+              <a:buNone/>
+            </a:pPr>
+            <a:r>
+              <a:rPr lang="en-US" sz="5400" b="1" dirty="0">
+                <a:solidFill>
+                  <a:srgbClr val="EEF2F8"/>
                 </a:solidFill>
                 <a:latin typeface="Cambria" pitchFamily="34" charset="0"/>
                 <a:ea typeface="Cambria" pitchFamily="34" charset="-122"/>
@@ -2859,9 +2752,32 @@
               </a:rPr>
               <a:t>2</a:t>
             </a:r>
-            <a:endParaRPr lang="en-US" sz="2600" dirty="0"/>
-          </a:p>
-        </p:txBody>
+            <a:endParaRPr lang="en-US" sz="5400" dirty="0"/>
+          </a:p>
+        </p:txBody>
+      </p:sp>
+      <p:sp>
+        <p:nvSpPr>
+          <p:cNvPr id="9" name="Shape 7"/>
+          <p:cNvSpPr/>
+          <p:nvPr/>
+        </p:nvSpPr>
+        <p:spPr>
+          <a:xfrm>
+            <a:off x="1828800" y="3383280"/>
+            <a:ext cx="0" cy="1051560"/>
+          </a:xfrm>
+          <a:prstGeom prst="line">
+            <a:avLst/>
+          </a:prstGeom>
+          <a:noFill/>
+          <a:ln w="25400">
+            <a:solidFill>
+              <a:srgbClr val="2E5AA0"/>
+            </a:solidFill>
+            <a:prstDash val="solid"/>
+          </a:ln>
+        </p:spPr>
       </p:sp>
       <p:sp>
         <p:nvSpPr>
@@ -2871,8 +2787,8 @@
         </p:nvSpPr>
         <p:spPr>
           <a:xfrm>
-            <a:off x="1691640" y="3337560"/>
-            <a:ext cx="9875520" cy="411480"/>
+            <a:off x="2057400" y="3337560"/>
+            <a:ext cx="9509760" cy="411480"/>
           </a:xfrm>
           <a:prstGeom prst="rect">
             <a:avLst/>
@@ -2896,7 +2812,7 @@
                 <a:ea typeface="Calibri" pitchFamily="34" charset="-122"/>
                 <a:cs typeface="Calibri" pitchFamily="34" charset="-120"/>
               </a:rPr>
-              <a:t>Both depots, live</a:t>
+              <a:t>An engine-overheat alarm on depot-a</a:t>
             </a:r>
             <a:endParaRPr lang="en-US" sz="1800" dirty="0"/>
           </a:p>
@@ -2910,8 +2826,8 @@
         </p:nvSpPr>
         <p:spPr>
           <a:xfrm>
-            <a:off x="1691640" y="3758184"/>
-            <a:ext cx="9875520" cy="640080"/>
+            <a:off x="2057400" y="3776472"/>
+            <a:ext cx="9509760" cy="822960"/>
           </a:xfrm>
           <a:prstGeom prst="rect">
             <a:avLst/>
@@ -2935,7 +2851,7 @@
                 <a:ea typeface="Calibri" pitchFamily="34" charset="-122"/>
                 <a:cs typeface="Calibri" pitchFamily="34" charset="-120"/>
               </a:rPr>
-              <a:t>A roster of native-meter cards per depot; depot-a raises an engine-overheat alarm while depot-b stays clear.</a:t>
+              <a:t>Depot-a is firing an engine-overheat alarm right now while depot-b stays clear, each raised on its own window.</a:t>
             </a:r>
             <a:endParaRPr lang="en-US" sz="1350" dirty="0"/>
           </a:p>
@@ -2943,34 +2859,14 @@
       </p:sp>
       <p:sp>
         <p:nvSpPr>
-          <p:cNvPr id="12" name="Shape 10"/>
-          <p:cNvSpPr/>
-          <p:nvPr/>
-        </p:nvSpPr>
-        <p:spPr>
-          <a:xfrm>
-            <a:off x="731520" y="4800600"/>
-            <a:ext cx="685800" cy="685800"/>
-          </a:xfrm>
-          <a:prstGeom prst="ellipse">
-            <a:avLst/>
-          </a:prstGeom>
-          <a:solidFill>
-            <a:srgbClr val="1E3A6E"/>
-          </a:solidFill>
-          <a:ln/>
-        </p:spPr>
-      </p:sp>
-      <p:sp>
-        <p:nvSpPr>
-          <p:cNvPr id="13" name="Text 11"/>
-          <p:cNvSpPr/>
-          <p:nvPr/>
-        </p:nvSpPr>
-        <p:spPr>
-          <a:xfrm>
-            <a:off x="731520" y="4800600"/>
-            <a:ext cx="685800" cy="685800"/>
+          <p:cNvPr id="12" name="Text 10"/>
+          <p:cNvSpPr/>
+          <p:nvPr/>
+        </p:nvSpPr>
+        <p:spPr>
+          <a:xfrm>
+            <a:off x="640080" y="4663440"/>
+            <a:ext cx="1097280" cy="1097280"/>
           </a:xfrm>
           <a:prstGeom prst="rect">
             <a:avLst/>
@@ -2982,13 +2878,13 @@
           <a:bodyPr wrap="square" lIns="0" tIns="0" rIns="0" bIns="0" rtlCol="0" anchor="ctr"/>
           <a:lstStyle/>
           <a:p>
-            <a:pPr algn="ctr" indent="0" marL="0">
-              <a:buNone/>
-            </a:pPr>
-            <a:r>
-              <a:rPr lang="en-US" sz="2600" b="1" dirty="0">
-                <a:solidFill>
-                  <a:srgbClr val="FFFFFF"/>
+            <a:pPr indent="0" marL="0">
+              <a:buNone/>
+            </a:pPr>
+            <a:r>
+              <a:rPr lang="en-US" sz="5400" b="1" dirty="0">
+                <a:solidFill>
+                  <a:srgbClr val="EEF2F8"/>
                 </a:solidFill>
                 <a:latin typeface="Cambria" pitchFamily="34" charset="0"/>
                 <a:ea typeface="Cambria" pitchFamily="34" charset="-122"/>
@@ -2996,9 +2892,32 @@
               </a:rPr>
               <a:t>3</a:t>
             </a:r>
-            <a:endParaRPr lang="en-US" sz="2600" dirty="0"/>
-          </a:p>
-        </p:txBody>
+            <a:endParaRPr lang="en-US" sz="5400" dirty="0"/>
+          </a:p>
+        </p:txBody>
+      </p:sp>
+      <p:sp>
+        <p:nvSpPr>
+          <p:cNvPr id="13" name="Shape 11"/>
+          <p:cNvSpPr/>
+          <p:nvPr/>
+        </p:nvSpPr>
+        <p:spPr>
+          <a:xfrm>
+            <a:off x="1828800" y="4846320"/>
+            <a:ext cx="0" cy="1051560"/>
+          </a:xfrm>
+          <a:prstGeom prst="line">
+            <a:avLst/>
+          </a:prstGeom>
+          <a:noFill/>
+          <a:ln w="25400">
+            <a:solidFill>
+              <a:srgbClr val="2E5AA0"/>
+            </a:solidFill>
+            <a:prstDash val="solid"/>
+          </a:ln>
+        </p:spPr>
       </p:sp>
       <p:sp>
         <p:nvSpPr>
@@ -3008,8 +2927,8 @@
         </p:nvSpPr>
         <p:spPr>
           <a:xfrm>
-            <a:off x="1691640" y="4754880"/>
-            <a:ext cx="9875520" cy="411480"/>
+            <a:off x="2057400" y="4800600"/>
+            <a:ext cx="9509760" cy="411480"/>
           </a:xfrm>
           <a:prstGeom prst="rect">
             <a:avLst/>
@@ -3033,7 +2952,7 @@
                 <a:ea typeface="Calibri" pitchFamily="34" charset="-122"/>
                 <a:cs typeface="Calibri" pitchFamily="34" charset="-120"/>
               </a:rPr>
-              <a:t>Tested and scales</a:t>
+              <a:t>Per-depot trend charts</a:t>
             </a:r>
             <a:endParaRPr lang="en-US" sz="1800" dirty="0"/>
           </a:p>
@@ -3047,8 +2966,8 @@
         </p:nvSpPr>
         <p:spPr>
           <a:xfrm>
-            <a:off x="1691640" y="5175504"/>
-            <a:ext cx="9875520" cy="640080"/>
+            <a:off x="2057400" y="5239512"/>
+            <a:ext cx="9509760" cy="822960"/>
           </a:xfrm>
           <a:prstGeom prst="rect">
             <a:avLst/>
@@ -3072,7 +2991,7 @@
                 <a:ea typeface="Calibri" pitchFamily="34" charset="-122"/>
                 <a:cs typeface="Calibri" pitchFamily="34" charset="-120"/>
               </a:rPr>
-              <a:t>139 automated tests pass across sensor, fog, processor and dashboard; a 2,000-message burst from 32 senders absorbed and drained.</a:t>
+              <a:t>Depot-a in orange and depot-b in green, so a climbing engine temperature is visible on the trend before it alarms.</a:t>
             </a:r>
             <a:endParaRPr lang="en-US" sz="1350" dirty="0"/>
           </a:p>
@@ -3086,7 +3005,7 @@
         </p:nvSpPr>
         <p:spPr>
           <a:xfrm>
-            <a:off x="640080" y="6263640"/>
+            <a:off x="640080" y="6309360"/>
             <a:ext cx="10972800" cy="365760"/>
           </a:xfrm>
           <a:prstGeom prst="rect">
@@ -3157,24 +3076,24 @@
         </p:nvSpPr>
         <p:spPr>
           <a:xfrm>
-            <a:off x="640080" y="640080"/>
-            <a:ext cx="10972800" cy="640080"/>
-          </a:xfrm>
-          <a:prstGeom prst="rect">
-            <a:avLst/>
-          </a:prstGeom>
-          <a:noFill/>
-          <a:ln/>
-        </p:spPr>
-        <p:txBody>
-          <a:bodyPr wrap="square" rtlCol="0" anchor="ctr"/>
+            <a:off x="640080" y="594360"/>
+            <a:ext cx="10972800" cy="822960"/>
+          </a:xfrm>
+          <a:prstGeom prst="rect">
+            <a:avLst/>
+          </a:prstGeom>
+          <a:noFill/>
+          <a:ln/>
+        </p:spPr>
+        <p:txBody>
+          <a:bodyPr wrap="square" rtlCol="0" anchor="t"/>
           <a:lstStyle/>
           <a:p>
             <a:pPr indent="0" marL="0">
               <a:buNone/>
             </a:pPr>
             <a:r>
-              <a:rPr lang="en-US" sz="3000" b="1" dirty="0">
+              <a:rPr lang="en-US" sz="2800" b="1" dirty="0">
                 <a:solidFill>
                   <a:srgbClr val="FFFFFF"/>
                 </a:solidFill>
@@ -3184,30 +3103,65 @@
               </a:rPr>
               <a:t>Hardest Part — buffer first, group later</a:t>
             </a:r>
-            <a:endParaRPr lang="en-US" sz="3000" dirty="0"/>
-          </a:p>
-        </p:txBody>
-      </p:sp>
-      <p:sp>
-        <p:nvSpPr>
-          <p:cNvPr id="3" name="Shape 1"/>
-          <p:cNvSpPr/>
-          <p:nvPr/>
-        </p:nvSpPr>
-        <p:spPr>
-          <a:xfrm>
-            <a:off x="731520" y="1920240"/>
-            <a:ext cx="10698480" cy="1965960"/>
-          </a:xfrm>
-          <a:prstGeom prst="roundRect">
-            <a:avLst>
-              <a:gd name="adj" fmla="val 4651"/>
-            </a:avLst>
-          </a:prstGeom>
-          <a:solidFill>
-            <a:srgbClr val="1E3152"/>
-          </a:solidFill>
-          <a:ln w="15875">
+            <a:endParaRPr lang="en-US" sz="2800" dirty="0"/>
+          </a:p>
+        </p:txBody>
+      </p:sp>
+      <p:sp>
+        <p:nvSpPr>
+          <p:cNvPr id="3" name="Text 1"/>
+          <p:cNvSpPr/>
+          <p:nvPr/>
+        </p:nvSpPr>
+        <p:spPr>
+          <a:xfrm>
+            <a:off x="731520" y="1965960"/>
+            <a:ext cx="2377440" cy="548640"/>
+          </a:xfrm>
+          <a:prstGeom prst="rect">
+            <a:avLst/>
+          </a:prstGeom>
+          <a:noFill/>
+          <a:ln/>
+        </p:spPr>
+        <p:txBody>
+          <a:bodyPr wrap="square" lIns="0" tIns="0" rIns="0" bIns="0" rtlCol="0" anchor="ctr"/>
+          <a:lstStyle/>
+          <a:p>
+            <a:pPr indent="0" marL="0">
+              <a:buNone/>
+            </a:pPr>
+            <a:r>
+              <a:rPr lang="en-US" sz="2200" b="1" dirty="0">
+                <a:solidFill>
+                  <a:srgbClr val="FF6A1F"/>
+                </a:solidFill>
+                <a:latin typeface="Cambria" pitchFamily="34" charset="0"/>
+                <a:ea typeface="Cambria" pitchFamily="34" charset="-122"/>
+                <a:cs typeface="Cambria" pitchFamily="34" charset="-120"/>
+              </a:rPr>
+              <a:t>Problem</a:t>
+            </a:r>
+            <a:endParaRPr lang="en-US" sz="2200" dirty="0"/>
+          </a:p>
+        </p:txBody>
+      </p:sp>
+      <p:sp>
+        <p:nvSpPr>
+          <p:cNvPr id="4" name="Shape 2"/>
+          <p:cNvSpPr/>
+          <p:nvPr/>
+        </p:nvSpPr>
+        <p:spPr>
+          <a:xfrm>
+            <a:off x="3200400" y="1920240"/>
+            <a:ext cx="0" cy="1737360"/>
+          </a:xfrm>
+          <a:prstGeom prst="line">
+            <a:avLst/>
+          </a:prstGeom>
+          <a:noFill/>
+          <a:ln w="25400">
             <a:solidFill>
               <a:srgbClr val="FF6A1F"/>
             </a:solidFill>
@@ -3217,14 +3171,14 @@
       </p:sp>
       <p:sp>
         <p:nvSpPr>
-          <p:cNvPr id="4" name="Text 2"/>
-          <p:cNvSpPr/>
-          <p:nvPr/>
-        </p:nvSpPr>
-        <p:spPr>
-          <a:xfrm>
-            <a:off x="1005840" y="2103120"/>
-            <a:ext cx="3657600" cy="457200"/>
+          <p:cNvPr id="5" name="Text 3"/>
+          <p:cNvSpPr/>
+          <p:nvPr/>
+        </p:nvSpPr>
+        <p:spPr>
+          <a:xfrm>
+            <a:off x="3474720" y="1920240"/>
+            <a:ext cx="7955280" cy="1874520"/>
           </a:xfrm>
           <a:prstGeom prst="rect">
             <a:avLst/>
@@ -3237,85 +3191,81 @@
           <a:lstStyle/>
           <a:p>
             <a:pPr indent="0" marL="0">
-              <a:buNone/>
-            </a:pPr>
-            <a:r>
-              <a:rPr lang="en-US" sz="1900" b="1" dirty="0">
-                <a:solidFill>
-                  <a:srgbClr val="FF6A1F"/>
+              <a:lnSpc>
+                <a:spcPct val="110000"/>
+              </a:lnSpc>
+              <a:buNone/>
+            </a:pPr>
+            <a:r>
+              <a:rPr lang="en-US" sz="1450" dirty="0">
+                <a:solidFill>
+                  <a:srgbClr val="D2DEEE"/>
+                </a:solidFill>
+                <a:latin typeface="Calibri" pitchFamily="34" charset="0"/>
+                <a:ea typeface="Calibri" pitchFamily="34" charset="-122"/>
+                <a:cs typeface="Calibri" pitchFamily="34" charset="-120"/>
+              </a:rPr>
+              <a:t>Ten sensor streams post to one fog gateway on many worker threads at once, and every reading must survive being held until the window drain. A reading lost to a race does not crash anything — it just makes the fleet averages silently wrong. And locking every insert fixes the race only by making the senders queue behind each other.</a:t>
+            </a:r>
+            <a:endParaRPr lang="en-US" sz="1450" dirty="0"/>
+          </a:p>
+        </p:txBody>
+      </p:sp>
+      <p:sp>
+        <p:nvSpPr>
+          <p:cNvPr id="6" name="Text 4"/>
+          <p:cNvSpPr/>
+          <p:nvPr/>
+        </p:nvSpPr>
+        <p:spPr>
+          <a:xfrm>
+            <a:off x="731520" y="4114800"/>
+            <a:ext cx="2377440" cy="548640"/>
+          </a:xfrm>
+          <a:prstGeom prst="rect">
+            <a:avLst/>
+          </a:prstGeom>
+          <a:noFill/>
+          <a:ln/>
+        </p:spPr>
+        <p:txBody>
+          <a:bodyPr wrap="square" lIns="0" tIns="0" rIns="0" bIns="0" rtlCol="0" anchor="ctr"/>
+          <a:lstStyle/>
+          <a:p>
+            <a:pPr indent="0" marL="0">
+              <a:buNone/>
+            </a:pPr>
+            <a:r>
+              <a:rPr lang="en-US" sz="2200" b="1" dirty="0">
+                <a:solidFill>
+                  <a:srgbClr val="5E80B8"/>
                 </a:solidFill>
                 <a:latin typeface="Cambria" pitchFamily="34" charset="0"/>
                 <a:ea typeface="Cambria" pitchFamily="34" charset="-122"/>
                 <a:cs typeface="Cambria" pitchFamily="34" charset="-120"/>
               </a:rPr>
-              <a:t>Problem</a:t>
-            </a:r>
-            <a:endParaRPr lang="en-US" sz="1900" dirty="0"/>
-          </a:p>
-        </p:txBody>
-      </p:sp>
-      <p:sp>
-        <p:nvSpPr>
-          <p:cNvPr id="5" name="Text 3"/>
-          <p:cNvSpPr/>
-          <p:nvPr/>
-        </p:nvSpPr>
-        <p:spPr>
-          <a:xfrm>
-            <a:off x="1005840" y="2578608"/>
-            <a:ext cx="9966960" cy="1188720"/>
-          </a:xfrm>
-          <a:prstGeom prst="rect">
-            <a:avLst/>
-          </a:prstGeom>
-          <a:noFill/>
-          <a:ln/>
-        </p:spPr>
-        <p:txBody>
-          <a:bodyPr wrap="square" lIns="0" tIns="0" rIns="0" bIns="0" rtlCol="0" anchor="ctr"/>
-          <a:lstStyle/>
-          <a:p>
-            <a:pPr indent="0" marL="0">
-              <a:lnSpc>
-                <a:spcPct val="105000"/>
-              </a:lnSpc>
-              <a:buNone/>
-            </a:pPr>
-            <a:r>
-              <a:rPr lang="en-US" sz="1300" dirty="0">
-                <a:solidFill>
-                  <a:srgbClr val="D2DEEE"/>
-                </a:solidFill>
-                <a:latin typeface="Calibri" pitchFamily="34" charset="0"/>
-                <a:ea typeface="Calibri" pitchFamily="34" charset="-122"/>
-                <a:cs typeface="Calibri" pitchFamily="34" charset="-120"/>
-              </a:rPr>
-              <a:t>Ten sensor streams post to one fog gateway on many worker threads at once, and every reading must survive being held until the window drain. A reading lost to a race does not crash anything — it just makes the fleet averages silently wrong. And locking every insert fixes the race only by making the senders queue behind each other.</a:t>
-            </a:r>
-            <a:endParaRPr lang="en-US" sz="1300" dirty="0"/>
-          </a:p>
-        </p:txBody>
-      </p:sp>
-      <p:sp>
-        <p:nvSpPr>
-          <p:cNvPr id="6" name="Shape 4"/>
-          <p:cNvSpPr/>
-          <p:nvPr/>
-        </p:nvSpPr>
-        <p:spPr>
-          <a:xfrm>
-            <a:off x="731520" y="4041648"/>
-            <a:ext cx="10698480" cy="1965960"/>
-          </a:xfrm>
-          <a:prstGeom prst="roundRect">
-            <a:avLst>
-              <a:gd name="adj" fmla="val 4651"/>
-            </a:avLst>
-          </a:prstGeom>
-          <a:solidFill>
-            <a:srgbClr val="1E3152"/>
-          </a:solidFill>
-          <a:ln w="15875">
+              <a:t>Solution</a:t>
+            </a:r>
+            <a:endParaRPr lang="en-US" sz="2200" dirty="0"/>
+          </a:p>
+        </p:txBody>
+      </p:sp>
+      <p:sp>
+        <p:nvSpPr>
+          <p:cNvPr id="7" name="Shape 5"/>
+          <p:cNvSpPr/>
+          <p:nvPr/>
+        </p:nvSpPr>
+        <p:spPr>
+          <a:xfrm>
+            <a:off x="3200400" y="4069080"/>
+            <a:ext cx="0" cy="1737360"/>
+          </a:xfrm>
+          <a:prstGeom prst="line">
+            <a:avLst/>
+          </a:prstGeom>
+          <a:noFill/>
+          <a:ln w="25400">
             <a:solidFill>
               <a:srgbClr val="5E80B8"/>
             </a:solidFill>
@@ -3325,53 +3275,14 @@
       </p:sp>
       <p:sp>
         <p:nvSpPr>
-          <p:cNvPr id="7" name="Text 5"/>
-          <p:cNvSpPr/>
-          <p:nvPr/>
-        </p:nvSpPr>
-        <p:spPr>
-          <a:xfrm>
-            <a:off x="1005840" y="4224528"/>
-            <a:ext cx="3657600" cy="457200"/>
-          </a:xfrm>
-          <a:prstGeom prst="rect">
-            <a:avLst/>
-          </a:prstGeom>
-          <a:noFill/>
-          <a:ln/>
-        </p:spPr>
-        <p:txBody>
-          <a:bodyPr wrap="square" lIns="0" tIns="0" rIns="0" bIns="0" rtlCol="0" anchor="ctr"/>
-          <a:lstStyle/>
-          <a:p>
-            <a:pPr indent="0" marL="0">
-              <a:buNone/>
-            </a:pPr>
-            <a:r>
-              <a:rPr lang="en-US" sz="1900" b="1" dirty="0">
-                <a:solidFill>
-                  <a:srgbClr val="5E80B8"/>
-                </a:solidFill>
-                <a:latin typeface="Cambria" pitchFamily="34" charset="0"/>
-                <a:ea typeface="Cambria" pitchFamily="34" charset="-122"/>
-                <a:cs typeface="Cambria" pitchFamily="34" charset="-120"/>
-              </a:rPr>
-              <a:t>Solution</a:t>
-            </a:r>
-            <a:endParaRPr lang="en-US" sz="1900" dirty="0"/>
-          </a:p>
-        </p:txBody>
-      </p:sp>
-      <p:sp>
-        <p:nvSpPr>
           <p:cNvPr id="8" name="Text 6"/>
           <p:cNvSpPr/>
           <p:nvPr/>
         </p:nvSpPr>
         <p:spPr>
           <a:xfrm>
-            <a:off x="1005840" y="4700016"/>
-            <a:ext cx="9966960" cy="1188720"/>
+            <a:off x="3474720" y="4069080"/>
+            <a:ext cx="7955280" cy="1874520"/>
           </a:xfrm>
           <a:prstGeom prst="rect">
             <a:avLst/>
@@ -3385,12 +3296,12 @@
           <a:p>
             <a:pPr indent="0" marL="0">
               <a:lnSpc>
-                <a:spcPct val="105000"/>
+                <a:spcPct val="110000"/>
               </a:lnSpc>
               <a:buNone/>
             </a:pPr>
             <a:r>
-              <a:rPr lang="en-US" sz="1300" dirty="0">
+              <a:rPr lang="en-US" sz="1450" dirty="0">
                 <a:solidFill>
                   <a:srgbClr val="D2DEEE"/>
                 </a:solidFill>
@@ -3400,7 +3311,7 @@
               </a:rPr>
               <a:t>Buffer first, group later: each arriving reading is a single lock-free enqueue onto a concurrent queue, nothing more, and all grouping by depot and signal is deferred to one thread that drains the whole queue once per window. Ingest stays contention-free. A stress test fires 32 threads writing 200 readings each, and after the drain all 6,400 are accounted for, zero lost.</a:t>
             </a:r>
-            <a:endParaRPr lang="en-US" sz="1300" dirty="0"/>
+            <a:endParaRPr lang="en-US" sz="1450" dirty="0"/>
           </a:p>
         </p:txBody>
       </p:sp>

--- a/ppt/SumalathaKambhampati_X25156420_public-transit-fleet-monitoring.pptx
+++ b/ppt/SumalathaKambhampati_X25156420_public-transit-fleet-monitoring.pptx
@@ -3050,7 +3050,7 @@
     <p:bg>
       <p:bgPr>
         <a:solidFill>
-          <a:srgbClr val="142235"/>
+          <a:srgbClr val="FFFFFF"/>
         </a:solidFill>
       </p:bgPr>
     </p:bg>
@@ -3076,7 +3076,7 @@
         </p:nvSpPr>
         <p:spPr>
           <a:xfrm>
-            <a:off x="640080" y="594360"/>
+            <a:off x="640080" y="502920"/>
             <a:ext cx="10972800" cy="822960"/>
           </a:xfrm>
           <a:prstGeom prst="rect">
@@ -3095,7 +3095,7 @@
             <a:r>
               <a:rPr lang="en-US" sz="2800" b="1" dirty="0">
                 <a:solidFill>
-                  <a:srgbClr val="FFFFFF"/>
+                  <a:srgbClr val="152238"/>
                 </a:solidFill>
                 <a:latin typeface="Cambria" pitchFamily="34" charset="0"/>
                 <a:ea typeface="Cambria" pitchFamily="34" charset="-122"/>
@@ -3132,7 +3132,7 @@
               <a:buNone/>
             </a:pPr>
             <a:r>
-              <a:rPr lang="en-US" sz="2200" b="1" dirty="0">
+              <a:rPr lang="en-US" sz="2300" b="1" dirty="0">
                 <a:solidFill>
                   <a:srgbClr val="FF6A1F"/>
                 </a:solidFill>
@@ -3142,7 +3142,7 @@
               </a:rPr>
               <a:t>Problem</a:t>
             </a:r>
-            <a:endParaRPr lang="en-US" sz="2200" dirty="0"/>
+            <a:endParaRPr lang="en-US" sz="2300" dirty="0"/>
           </a:p>
         </p:txBody>
       </p:sp>
@@ -3155,13 +3155,13 @@
         <p:spPr>
           <a:xfrm>
             <a:off x="3200400" y="1920240"/>
-            <a:ext cx="0" cy="1737360"/>
+            <a:ext cx="0" cy="1783080"/>
           </a:xfrm>
           <a:prstGeom prst="line">
             <a:avLst/>
           </a:prstGeom>
           <a:noFill/>
-          <a:ln w="25400">
+          <a:ln w="31750">
             <a:solidFill>
               <a:srgbClr val="FF6A1F"/>
             </a:solidFill>
@@ -3178,7 +3178,7 @@
         <p:spPr>
           <a:xfrm>
             <a:off x="3474720" y="1920240"/>
-            <a:ext cx="7955280" cy="1874520"/>
+            <a:ext cx="7955280" cy="1920240"/>
           </a:xfrm>
           <a:prstGeom prst="rect">
             <a:avLst/>
@@ -3192,14 +3192,14 @@
           <a:p>
             <a:pPr indent="0" marL="0">
               <a:lnSpc>
-                <a:spcPct val="110000"/>
+                <a:spcPct val="112000"/>
               </a:lnSpc>
               <a:buNone/>
             </a:pPr>
             <a:r>
               <a:rPr lang="en-US" sz="1450" dirty="0">
                 <a:solidFill>
-                  <a:srgbClr val="D2DEEE"/>
+                  <a:srgbClr val="152238"/>
                 </a:solidFill>
                 <a:latin typeface="Calibri" pitchFamily="34" charset="0"/>
                 <a:ea typeface="Calibri" pitchFamily="34" charset="-122"/>
@@ -3236,9 +3236,9 @@
               <a:buNone/>
             </a:pPr>
             <a:r>
-              <a:rPr lang="en-US" sz="2200" b="1" dirty="0">
-                <a:solidFill>
-                  <a:srgbClr val="5E80B8"/>
+              <a:rPr lang="en-US" sz="2300" b="1" dirty="0">
+                <a:solidFill>
+                  <a:srgbClr val="2E5AA0"/>
                 </a:solidFill>
                 <a:latin typeface="Cambria" pitchFamily="34" charset="0"/>
                 <a:ea typeface="Cambria" pitchFamily="34" charset="-122"/>
@@ -3246,7 +3246,7 @@
               </a:rPr>
               <a:t>Solution</a:t>
             </a:r>
-            <a:endParaRPr lang="en-US" sz="2200" dirty="0"/>
+            <a:endParaRPr lang="en-US" sz="2300" dirty="0"/>
           </a:p>
         </p:txBody>
       </p:sp>
@@ -3259,15 +3259,15 @@
         <p:spPr>
           <a:xfrm>
             <a:off x="3200400" y="4069080"/>
-            <a:ext cx="0" cy="1737360"/>
+            <a:ext cx="0" cy="1783080"/>
           </a:xfrm>
           <a:prstGeom prst="line">
             <a:avLst/>
           </a:prstGeom>
           <a:noFill/>
-          <a:ln w="25400">
+          <a:ln w="31750">
             <a:solidFill>
-              <a:srgbClr val="5E80B8"/>
+              <a:srgbClr val="2E5AA0"/>
             </a:solidFill>
             <a:prstDash val="solid"/>
           </a:ln>
@@ -3282,7 +3282,7 @@
         <p:spPr>
           <a:xfrm>
             <a:off x="3474720" y="4069080"/>
-            <a:ext cx="7955280" cy="1874520"/>
+            <a:ext cx="7955280" cy="1920240"/>
           </a:xfrm>
           <a:prstGeom prst="rect">
             <a:avLst/>
@@ -3296,14 +3296,14 @@
           <a:p>
             <a:pPr indent="0" marL="0">
               <a:lnSpc>
-                <a:spcPct val="110000"/>
+                <a:spcPct val="112000"/>
               </a:lnSpc>
               <a:buNone/>
             </a:pPr>
             <a:r>
               <a:rPr lang="en-US" sz="1450" dirty="0">
                 <a:solidFill>
-                  <a:srgbClr val="D2DEEE"/>
+                  <a:srgbClr val="152238"/>
                 </a:solidFill>
                 <a:latin typeface="Calibri" pitchFamily="34" charset="0"/>
                 <a:ea typeface="Calibri" pitchFamily="34" charset="-122"/>

--- a/ppt/SumalathaKambhampati_X25156420_public-transit-fleet-monitoring.pptx
+++ b/ppt/SumalathaKambhampati_X25156420_public-transit-fleet-monitoring.pptx
@@ -1150,8 +1150,8 @@
         </p:nvSpPr>
         <p:spPr>
           <a:xfrm>
-            <a:off x="640080" y="914400"/>
-            <a:ext cx="10972800" cy="1280160"/>
+            <a:off x="640080" y="777240"/>
+            <a:ext cx="11064240" cy="2103120"/>
           </a:xfrm>
           <a:prstGeom prst="rect">
             <a:avLst/>
@@ -1164,10 +1164,13 @@
           <a:lstStyle/>
           <a:p>
             <a:pPr indent="0" marL="0">
-              <a:buNone/>
-            </a:pPr>
-            <a:r>
-              <a:rPr lang="en-US" sz="3800" b="1" dirty="0">
+              <a:lnSpc>
+                <a:spcPct val="98000"/>
+              </a:lnSpc>
+              <a:buNone/>
+            </a:pPr>
+            <a:r>
+              <a:rPr lang="en-US" sz="5200" b="1" dirty="0">
                 <a:solidFill>
                   <a:srgbClr val="FFFFFF"/>
                 </a:solidFill>
@@ -1177,7 +1180,7 @@
               </a:rPr>
               <a:t>Public Transit Fleet Monitoring</a:t>
             </a:r>
-            <a:endParaRPr lang="en-US" sz="3800" dirty="0"/>
+            <a:endParaRPr lang="en-US" sz="5200" dirty="0"/>
           </a:p>
         </p:txBody>
       </p:sp>
@@ -1189,7 +1192,7 @@
         </p:nvSpPr>
         <p:spPr>
           <a:xfrm>
-            <a:off x="658368" y="2148840"/>
+            <a:off x="658368" y="2971800"/>
             <a:ext cx="10972800" cy="365760"/>
           </a:xfrm>
           <a:prstGeom prst="rect">
@@ -1228,8 +1231,8 @@
         </p:nvSpPr>
         <p:spPr>
           <a:xfrm>
-            <a:off x="658368" y="2697480"/>
-            <a:ext cx="10424160" cy="1371600"/>
+            <a:off x="658368" y="3611880"/>
+            <a:ext cx="10424160" cy="1280160"/>
           </a:xfrm>
           <a:prstGeom prst="rect">
             <a:avLst/>
@@ -1243,12 +1246,12 @@
           <a:p>
             <a:pPr indent="0" marL="0">
               <a:lnSpc>
-                <a:spcPct val="110000"/>
+                <a:spcPct val="108000"/>
               </a:lnSpc>
               <a:buNone/>
             </a:pPr>
             <a:r>
-              <a:rPr lang="en-US" sz="2000" dirty="0">
+              <a:rPr lang="en-US" sz="1900" dirty="0">
                 <a:solidFill>
                   <a:srgbClr val="D2DEEE"/>
                 </a:solidFill>
@@ -1258,7 +1261,7 @@
               </a:rPr>
               <a:t>A bus's condition changes minute by minute on the road, but a depot inspection only sees it once it is parked — an overheating engine is hours old by the evening walk-around.</a:t>
             </a:r>
-            <a:endParaRPr lang="en-US" sz="2000" dirty="0"/>
+            <a:endParaRPr lang="en-US" sz="1900" dirty="0"/>
           </a:p>
         </p:txBody>
       </p:sp>
@@ -1270,7 +1273,7 @@
         </p:nvSpPr>
         <p:spPr>
           <a:xfrm>
-            <a:off x="658368" y="4206240"/>
+            <a:off x="658368" y="5074920"/>
             <a:ext cx="2651760" cy="566928"/>
           </a:xfrm>
           <a:prstGeom prst="roundRect">
@@ -1297,7 +1300,7 @@
         </p:nvSpPr>
         <p:spPr>
           <a:xfrm>
-            <a:off x="658368" y="4206240"/>
+            <a:off x="658368" y="5074920"/>
             <a:ext cx="2651760" cy="566928"/>
           </a:xfrm>
           <a:prstGeom prst="rect">
@@ -1336,7 +1339,7 @@
         </p:nvSpPr>
         <p:spPr>
           <a:xfrm>
-            <a:off x="3538728" y="4206240"/>
+            <a:off x="3538728" y="5074920"/>
             <a:ext cx="2651760" cy="566928"/>
           </a:xfrm>
           <a:prstGeom prst="roundRect">
@@ -1363,7 +1366,7 @@
         </p:nvSpPr>
         <p:spPr>
           <a:xfrm>
-            <a:off x="3538728" y="4206240"/>
+            <a:off x="3538728" y="5074920"/>
             <a:ext cx="2651760" cy="566928"/>
           </a:xfrm>
           <a:prstGeom prst="rect">
@@ -1402,7 +1405,7 @@
         </p:nvSpPr>
         <p:spPr>
           <a:xfrm>
-            <a:off x="6419088" y="4206240"/>
+            <a:off x="6419088" y="5074920"/>
             <a:ext cx="2651760" cy="566928"/>
           </a:xfrm>
           <a:prstGeom prst="roundRect">
@@ -1429,7 +1432,7 @@
         </p:nvSpPr>
         <p:spPr>
           <a:xfrm>
-            <a:off x="6419088" y="4206240"/>
+            <a:off x="6419088" y="5074920"/>
             <a:ext cx="2651760" cy="566928"/>
           </a:xfrm>
           <a:prstGeom prst="rect">
@@ -1468,8 +1471,8 @@
         </p:nvSpPr>
         <p:spPr>
           <a:xfrm>
-            <a:off x="658368" y="6126480"/>
-            <a:ext cx="10972800" cy="365760"/>
+            <a:off x="658368" y="6355080"/>
+            <a:ext cx="10972800" cy="320040"/>
           </a:xfrm>
           <a:prstGeom prst="rect">
             <a:avLst/>
@@ -1485,7 +1488,7 @@
               <a:buNone/>
             </a:pPr>
             <a:r>
-              <a:rPr lang="en-US" sz="1300" dirty="0">
+              <a:rPr lang="en-US" sz="1250" dirty="0">
                 <a:solidFill>
                   <a:srgbClr val="5C6A80"/>
                 </a:solidFill>
@@ -1495,7 +1498,7 @@
               </a:rPr>
               <a:t>Fog &amp; Edge Computing (H9FECC)   ·   deployed live on AWS</a:t>
             </a:r>
-            <a:endParaRPr lang="en-US" sz="1300" dirty="0"/>
+            <a:endParaRPr lang="en-US" sz="1250" dirty="0"/>
           </a:p>
         </p:txBody>
       </p:sp>
@@ -3109,59 +3112,24 @@
       </p:sp>
       <p:sp>
         <p:nvSpPr>
-          <p:cNvPr id="3" name="Text 1"/>
-          <p:cNvSpPr/>
-          <p:nvPr/>
-        </p:nvSpPr>
-        <p:spPr>
-          <a:xfrm>
-            <a:off x="731520" y="1965960"/>
-            <a:ext cx="2377440" cy="548640"/>
-          </a:xfrm>
-          <a:prstGeom prst="rect">
-            <a:avLst/>
-          </a:prstGeom>
-          <a:noFill/>
-          <a:ln/>
-        </p:spPr>
-        <p:txBody>
-          <a:bodyPr wrap="square" lIns="0" tIns="0" rIns="0" bIns="0" rtlCol="0" anchor="ctr"/>
-          <a:lstStyle/>
-          <a:p>
-            <a:pPr indent="0" marL="0">
-              <a:buNone/>
-            </a:pPr>
-            <a:r>
-              <a:rPr lang="en-US" sz="2300" b="1" dirty="0">
-                <a:solidFill>
-                  <a:srgbClr val="FF6A1F"/>
-                </a:solidFill>
-                <a:latin typeface="Cambria" pitchFamily="34" charset="0"/>
-                <a:ea typeface="Cambria" pitchFamily="34" charset="-122"/>
-                <a:cs typeface="Cambria" pitchFamily="34" charset="-120"/>
-              </a:rPr>
-              <a:t>Problem</a:t>
-            </a:r>
-            <a:endParaRPr lang="en-US" sz="2300" dirty="0"/>
-          </a:p>
-        </p:txBody>
-      </p:sp>
-      <p:sp>
-        <p:nvSpPr>
-          <p:cNvPr id="4" name="Shape 2"/>
-          <p:cNvSpPr/>
-          <p:nvPr/>
-        </p:nvSpPr>
-        <p:spPr>
-          <a:xfrm>
-            <a:off x="3200400" y="1920240"/>
-            <a:ext cx="0" cy="1783080"/>
-          </a:xfrm>
-          <a:prstGeom prst="line">
-            <a:avLst/>
-          </a:prstGeom>
-          <a:noFill/>
-          <a:ln w="31750">
+          <p:cNvPr id="3" name="Shape 1"/>
+          <p:cNvSpPr/>
+          <p:nvPr/>
+        </p:nvSpPr>
+        <p:spPr>
+          <a:xfrm>
+            <a:off x="731520" y="1920240"/>
+            <a:ext cx="10698480" cy="1965960"/>
+          </a:xfrm>
+          <a:prstGeom prst="roundRect">
+            <a:avLst>
+              <a:gd name="adj" fmla="val 4651"/>
+            </a:avLst>
+          </a:prstGeom>
+          <a:solidFill>
+            <a:srgbClr val="EEF2F8"/>
+          </a:solidFill>
+          <a:ln w="19050">
             <a:solidFill>
               <a:srgbClr val="FF6A1F"/>
             </a:solidFill>
@@ -3171,14 +3139,53 @@
       </p:sp>
       <p:sp>
         <p:nvSpPr>
+          <p:cNvPr id="4" name="Text 2"/>
+          <p:cNvSpPr/>
+          <p:nvPr/>
+        </p:nvSpPr>
+        <p:spPr>
+          <a:xfrm>
+            <a:off x="1005840" y="2103120"/>
+            <a:ext cx="3657600" cy="457200"/>
+          </a:xfrm>
+          <a:prstGeom prst="rect">
+            <a:avLst/>
+          </a:prstGeom>
+          <a:noFill/>
+          <a:ln/>
+        </p:spPr>
+        <p:txBody>
+          <a:bodyPr wrap="square" lIns="0" tIns="0" rIns="0" bIns="0" rtlCol="0" anchor="ctr"/>
+          <a:lstStyle/>
+          <a:p>
+            <a:pPr indent="0" marL="0">
+              <a:buNone/>
+            </a:pPr>
+            <a:r>
+              <a:rPr lang="en-US" sz="1900" b="1" dirty="0">
+                <a:solidFill>
+                  <a:srgbClr val="FF6A1F"/>
+                </a:solidFill>
+                <a:latin typeface="Cambria" pitchFamily="34" charset="0"/>
+                <a:ea typeface="Cambria" pitchFamily="34" charset="-122"/>
+                <a:cs typeface="Cambria" pitchFamily="34" charset="-120"/>
+              </a:rPr>
+              <a:t>Problem</a:t>
+            </a:r>
+            <a:endParaRPr lang="en-US" sz="1900" dirty="0"/>
+          </a:p>
+        </p:txBody>
+      </p:sp>
+      <p:sp>
+        <p:nvSpPr>
           <p:cNvPr id="5" name="Text 3"/>
           <p:cNvSpPr/>
           <p:nvPr/>
         </p:nvSpPr>
         <p:spPr>
           <a:xfrm>
-            <a:off x="3474720" y="1920240"/>
-            <a:ext cx="7955280" cy="1920240"/>
+            <a:off x="1005840" y="2578608"/>
+            <a:ext cx="9966960" cy="1188720"/>
           </a:xfrm>
           <a:prstGeom prst="rect">
             <a:avLst/>
@@ -3192,12 +3199,12 @@
           <a:p>
             <a:pPr indent="0" marL="0">
               <a:lnSpc>
-                <a:spcPct val="112000"/>
+                <a:spcPct val="105000"/>
               </a:lnSpc>
               <a:buNone/>
             </a:pPr>
             <a:r>
-              <a:rPr lang="en-US" sz="1450" dirty="0">
+              <a:rPr lang="en-US" sz="1300" dirty="0">
                 <a:solidFill>
                   <a:srgbClr val="152238"/>
                 </a:solidFill>
@@ -3207,65 +3214,30 @@
               </a:rPr>
               <a:t>Ten sensor streams post to one fog gateway on many worker threads at once, and every reading must survive being held until the window drain. A reading lost to a race does not crash anything — it just makes the fleet averages silently wrong. And locking every insert fixes the race only by making the senders queue behind each other.</a:t>
             </a:r>
-            <a:endParaRPr lang="en-US" sz="1450" dirty="0"/>
-          </a:p>
-        </p:txBody>
-      </p:sp>
-      <p:sp>
-        <p:nvSpPr>
-          <p:cNvPr id="6" name="Text 4"/>
-          <p:cNvSpPr/>
-          <p:nvPr/>
-        </p:nvSpPr>
-        <p:spPr>
-          <a:xfrm>
-            <a:off x="731520" y="4114800"/>
-            <a:ext cx="2377440" cy="548640"/>
-          </a:xfrm>
-          <a:prstGeom prst="rect">
-            <a:avLst/>
-          </a:prstGeom>
-          <a:noFill/>
-          <a:ln/>
-        </p:spPr>
-        <p:txBody>
-          <a:bodyPr wrap="square" lIns="0" tIns="0" rIns="0" bIns="0" rtlCol="0" anchor="ctr"/>
-          <a:lstStyle/>
-          <a:p>
-            <a:pPr indent="0" marL="0">
-              <a:buNone/>
-            </a:pPr>
-            <a:r>
-              <a:rPr lang="en-US" sz="2300" b="1" dirty="0">
-                <a:solidFill>
-                  <a:srgbClr val="2E5AA0"/>
-                </a:solidFill>
-                <a:latin typeface="Cambria" pitchFamily="34" charset="0"/>
-                <a:ea typeface="Cambria" pitchFamily="34" charset="-122"/>
-                <a:cs typeface="Cambria" pitchFamily="34" charset="-120"/>
-              </a:rPr>
-              <a:t>Solution</a:t>
-            </a:r>
-            <a:endParaRPr lang="en-US" sz="2300" dirty="0"/>
-          </a:p>
-        </p:txBody>
-      </p:sp>
-      <p:sp>
-        <p:nvSpPr>
-          <p:cNvPr id="7" name="Shape 5"/>
-          <p:cNvSpPr/>
-          <p:nvPr/>
-        </p:nvSpPr>
-        <p:spPr>
-          <a:xfrm>
-            <a:off x="3200400" y="4069080"/>
-            <a:ext cx="0" cy="1783080"/>
-          </a:xfrm>
-          <a:prstGeom prst="line">
-            <a:avLst/>
-          </a:prstGeom>
-          <a:noFill/>
-          <a:ln w="31750">
+            <a:endParaRPr lang="en-US" sz="1300" dirty="0"/>
+          </a:p>
+        </p:txBody>
+      </p:sp>
+      <p:sp>
+        <p:nvSpPr>
+          <p:cNvPr id="6" name="Shape 4"/>
+          <p:cNvSpPr/>
+          <p:nvPr/>
+        </p:nvSpPr>
+        <p:spPr>
+          <a:xfrm>
+            <a:off x="731520" y="4041648"/>
+            <a:ext cx="10698480" cy="1965960"/>
+          </a:xfrm>
+          <a:prstGeom prst="roundRect">
+            <a:avLst>
+              <a:gd name="adj" fmla="val 4651"/>
+            </a:avLst>
+          </a:prstGeom>
+          <a:solidFill>
+            <a:srgbClr val="EEF2F8"/>
+          </a:solidFill>
+          <a:ln w="19050">
             <a:solidFill>
               <a:srgbClr val="2E5AA0"/>
             </a:solidFill>
@@ -3275,14 +3247,53 @@
       </p:sp>
       <p:sp>
         <p:nvSpPr>
+          <p:cNvPr id="7" name="Text 5"/>
+          <p:cNvSpPr/>
+          <p:nvPr/>
+        </p:nvSpPr>
+        <p:spPr>
+          <a:xfrm>
+            <a:off x="1005840" y="4224528"/>
+            <a:ext cx="3657600" cy="457200"/>
+          </a:xfrm>
+          <a:prstGeom prst="rect">
+            <a:avLst/>
+          </a:prstGeom>
+          <a:noFill/>
+          <a:ln/>
+        </p:spPr>
+        <p:txBody>
+          <a:bodyPr wrap="square" lIns="0" tIns="0" rIns="0" bIns="0" rtlCol="0" anchor="ctr"/>
+          <a:lstStyle/>
+          <a:p>
+            <a:pPr indent="0" marL="0">
+              <a:buNone/>
+            </a:pPr>
+            <a:r>
+              <a:rPr lang="en-US" sz="1900" b="1" dirty="0">
+                <a:solidFill>
+                  <a:srgbClr val="2E5AA0"/>
+                </a:solidFill>
+                <a:latin typeface="Cambria" pitchFamily="34" charset="0"/>
+                <a:ea typeface="Cambria" pitchFamily="34" charset="-122"/>
+                <a:cs typeface="Cambria" pitchFamily="34" charset="-120"/>
+              </a:rPr>
+              <a:t>Solution</a:t>
+            </a:r>
+            <a:endParaRPr lang="en-US" sz="1900" dirty="0"/>
+          </a:p>
+        </p:txBody>
+      </p:sp>
+      <p:sp>
+        <p:nvSpPr>
           <p:cNvPr id="8" name="Text 6"/>
           <p:cNvSpPr/>
           <p:nvPr/>
         </p:nvSpPr>
         <p:spPr>
           <a:xfrm>
-            <a:off x="3474720" y="4069080"/>
-            <a:ext cx="7955280" cy="1920240"/>
+            <a:off x="1005840" y="4700016"/>
+            <a:ext cx="9966960" cy="1188720"/>
           </a:xfrm>
           <a:prstGeom prst="rect">
             <a:avLst/>
@@ -3296,12 +3307,12 @@
           <a:p>
             <a:pPr indent="0" marL="0">
               <a:lnSpc>
-                <a:spcPct val="112000"/>
+                <a:spcPct val="105000"/>
               </a:lnSpc>
               <a:buNone/>
             </a:pPr>
             <a:r>
-              <a:rPr lang="en-US" sz="1450" dirty="0">
+              <a:rPr lang="en-US" sz="1300" dirty="0">
                 <a:solidFill>
                   <a:srgbClr val="152238"/>
                 </a:solidFill>
@@ -3311,7 +3322,7 @@
               </a:rPr>
               <a:t>Buffer first, group later: each arriving reading is a single lock-free enqueue onto a concurrent queue, nothing more, and all grouping by depot and signal is deferred to one thread that drains the whole queue once per window. Ingest stays contention-free. A stress test fires 32 threads writing 200 readings each, and after the drain all 6,400 are accounted for, zero lost.</a:t>
             </a:r>
-            <a:endParaRPr lang="en-US" sz="1450" dirty="0"/>
+            <a:endParaRPr lang="en-US" sz="1300" dirty="0"/>
           </a:p>
         </p:txBody>
       </p:sp>

--- a/ppt/SumalathaKambhampati_X25156420_public-transit-fleet-monitoring.pptx
+++ b/ppt/SumalathaKambhampati_X25156420_public-transit-fleet-monitoring.pptx
@@ -2582,59 +2582,24 @@
       </p:sp>
       <p:sp>
         <p:nvSpPr>
-          <p:cNvPr id="4" name="Text 2"/>
-          <p:cNvSpPr/>
-          <p:nvPr/>
-        </p:nvSpPr>
-        <p:spPr>
-          <a:xfrm>
-            <a:off x="640080" y="1737360"/>
-            <a:ext cx="1097280" cy="1097280"/>
-          </a:xfrm>
-          <a:prstGeom prst="rect">
-            <a:avLst/>
-          </a:prstGeom>
-          <a:noFill/>
-          <a:ln/>
-        </p:spPr>
-        <p:txBody>
-          <a:bodyPr wrap="square" lIns="0" tIns="0" rIns="0" bIns="0" rtlCol="0" anchor="ctr"/>
-          <a:lstStyle/>
-          <a:p>
-            <a:pPr indent="0" marL="0">
-              <a:buNone/>
-            </a:pPr>
-            <a:r>
-              <a:rPr lang="en-US" sz="5400" b="1" dirty="0">
-                <a:solidFill>
-                  <a:srgbClr val="EEF2F8"/>
-                </a:solidFill>
-                <a:latin typeface="Cambria" pitchFamily="34" charset="0"/>
-                <a:ea typeface="Cambria" pitchFamily="34" charset="-122"/>
-                <a:cs typeface="Cambria" pitchFamily="34" charset="-120"/>
-              </a:rPr>
-              <a:t>1</a:t>
-            </a:r>
-            <a:endParaRPr lang="en-US" sz="5400" dirty="0"/>
-          </a:p>
-        </p:txBody>
-      </p:sp>
-      <p:sp>
-        <p:nvSpPr>
-          <p:cNvPr id="5" name="Shape 3"/>
-          <p:cNvSpPr/>
-          <p:nvPr/>
-        </p:nvSpPr>
-        <p:spPr>
-          <a:xfrm>
-            <a:off x="1828800" y="1920240"/>
-            <a:ext cx="0" cy="1051560"/>
-          </a:xfrm>
-          <a:prstGeom prst="line">
-            <a:avLst/>
-          </a:prstGeom>
-          <a:noFill/>
-          <a:ln w="25400">
+          <p:cNvPr id="4" name="Shape 2"/>
+          <p:cNvSpPr/>
+          <p:nvPr/>
+        </p:nvSpPr>
+        <p:spPr>
+          <a:xfrm>
+            <a:off x="640080" y="1828800"/>
+            <a:ext cx="10881360" cy="1371600"/>
+          </a:xfrm>
+          <a:prstGeom prst="roundRect">
+            <a:avLst>
+              <a:gd name="adj" fmla="val 6667"/>
+            </a:avLst>
+          </a:prstGeom>
+          <a:solidFill>
+            <a:srgbClr val="EEF2F8"/>
+          </a:solidFill>
+          <a:ln w="15240">
             <a:solidFill>
               <a:srgbClr val="2E5AA0"/>
             </a:solidFill>
@@ -2644,14 +2609,34 @@
       </p:sp>
       <p:sp>
         <p:nvSpPr>
+          <p:cNvPr id="5" name="Shape 3"/>
+          <p:cNvSpPr/>
+          <p:nvPr/>
+        </p:nvSpPr>
+        <p:spPr>
+          <a:xfrm>
+            <a:off x="960120" y="2203704"/>
+            <a:ext cx="621792" cy="621792"/>
+          </a:xfrm>
+          <a:prstGeom prst="ellipse">
+            <a:avLst/>
+          </a:prstGeom>
+          <a:solidFill>
+            <a:srgbClr val="1E3A6E"/>
+          </a:solidFill>
+          <a:ln/>
+        </p:spPr>
+      </p:sp>
+      <p:sp>
+        <p:nvSpPr>
           <p:cNvPr id="6" name="Text 4"/>
           <p:cNvSpPr/>
           <p:nvPr/>
         </p:nvSpPr>
         <p:spPr>
           <a:xfrm>
-            <a:off x="2057400" y="1874520"/>
-            <a:ext cx="9509760" cy="411480"/>
+            <a:off x="960120" y="2203704"/>
+            <a:ext cx="621792" cy="621792"/>
           </a:xfrm>
           <a:prstGeom prst="rect">
             <a:avLst/>
@@ -2663,11 +2648,50 @@
           <a:bodyPr wrap="square" lIns="0" tIns="0" rIns="0" bIns="0" rtlCol="0" anchor="ctr"/>
           <a:lstStyle/>
           <a:p>
+            <a:pPr algn="ctr" indent="0" marL="0">
+              <a:buNone/>
+            </a:pPr>
+            <a:r>
+              <a:rPr lang="en-US" sz="2200" b="1" dirty="0">
+                <a:solidFill>
+                  <a:srgbClr val="FFFFFF"/>
+                </a:solidFill>
+                <a:latin typeface="Cambria" pitchFamily="34" charset="0"/>
+                <a:ea typeface="Cambria" pitchFamily="34" charset="-122"/>
+                <a:cs typeface="Cambria" pitchFamily="34" charset="-120"/>
+              </a:rPr>
+              <a:t>1</a:t>
+            </a:r>
+            <a:endParaRPr lang="en-US" sz="2200" dirty="0"/>
+          </a:p>
+        </p:txBody>
+      </p:sp>
+      <p:sp>
+        <p:nvSpPr>
+          <p:cNvPr id="7" name="Text 5"/>
+          <p:cNvSpPr/>
+          <p:nvPr/>
+        </p:nvSpPr>
+        <p:spPr>
+          <a:xfrm>
+            <a:off x="1828800" y="2029968"/>
+            <a:ext cx="9418320" cy="411480"/>
+          </a:xfrm>
+          <a:prstGeom prst="rect">
+            <a:avLst/>
+          </a:prstGeom>
+          <a:noFill/>
+          <a:ln/>
+        </p:spPr>
+        <p:txBody>
+          <a:bodyPr wrap="square" lIns="0" tIns="0" rIns="0" bIns="0" rtlCol="0" anchor="ctr"/>
+          <a:lstStyle/>
+          <a:p>
             <a:pPr indent="0" marL="0">
               <a:buNone/>
             </a:pPr>
             <a:r>
-              <a:rPr lang="en-US" sz="1800" b="1" dirty="0">
+              <a:rPr lang="en-US" sz="1700" b="1" dirty="0">
                 <a:solidFill>
                   <a:srgbClr val="152238"/>
                 </a:solidFill>
@@ -2677,20 +2701,20 @@
               </a:rPr>
               <a:t>A roster of meter cards per depot</a:t>
             </a:r>
-            <a:endParaRPr lang="en-US" sz="1800" dirty="0"/>
-          </a:p>
-        </p:txBody>
-      </p:sp>
-      <p:sp>
-        <p:nvSpPr>
-          <p:cNvPr id="7" name="Text 5"/>
-          <p:cNvSpPr/>
-          <p:nvPr/>
-        </p:nvSpPr>
-        <p:spPr>
-          <a:xfrm>
-            <a:off x="2057400" y="2313432"/>
-            <a:ext cx="9509760" cy="822960"/>
+            <a:endParaRPr lang="en-US" sz="1700" dirty="0"/>
+          </a:p>
+        </p:txBody>
+      </p:sp>
+      <p:sp>
+        <p:nvSpPr>
+          <p:cNvPr id="8" name="Text 6"/>
+          <p:cNvSpPr/>
+          <p:nvPr/>
+        </p:nvSpPr>
+        <p:spPr>
+          <a:xfrm>
+            <a:off x="1828800" y="2450592"/>
+            <a:ext cx="9418320" cy="594360"/>
           </a:xfrm>
           <a:prstGeom prst="rect">
             <a:avLst/>
@@ -2703,10 +2727,13 @@
           <a:lstStyle/>
           <a:p>
             <a:pPr indent="0" marL="0">
-              <a:buNone/>
-            </a:pPr>
-            <a:r>
-              <a:rPr lang="en-US" sz="1350" dirty="0">
+              <a:lnSpc>
+                <a:spcPct val="105000"/>
+              </a:lnSpc>
+              <a:buNone/>
+            </a:pPr>
+            <a:r>
+              <a:rPr lang="en-US" sz="1300" dirty="0">
                 <a:solidFill>
                   <a:srgbClr val="5C6A80"/>
                 </a:solidFill>
@@ -2716,46 +2743,7 @@
               </a:rPr>
               <a:t>Engine temperature, brake-pad wear, passenger count, fuel level and GPS speed live for every bus, with native meter bars.</a:t>
             </a:r>
-            <a:endParaRPr lang="en-US" sz="1350" dirty="0"/>
-          </a:p>
-        </p:txBody>
-      </p:sp>
-      <p:sp>
-        <p:nvSpPr>
-          <p:cNvPr id="8" name="Text 6"/>
-          <p:cNvSpPr/>
-          <p:nvPr/>
-        </p:nvSpPr>
-        <p:spPr>
-          <a:xfrm>
-            <a:off x="640080" y="3200400"/>
-            <a:ext cx="1097280" cy="1097280"/>
-          </a:xfrm>
-          <a:prstGeom prst="rect">
-            <a:avLst/>
-          </a:prstGeom>
-          <a:noFill/>
-          <a:ln/>
-        </p:spPr>
-        <p:txBody>
-          <a:bodyPr wrap="square" lIns="0" tIns="0" rIns="0" bIns="0" rtlCol="0" anchor="ctr"/>
-          <a:lstStyle/>
-          <a:p>
-            <a:pPr indent="0" marL="0">
-              <a:buNone/>
-            </a:pPr>
-            <a:r>
-              <a:rPr lang="en-US" sz="5400" b="1" dirty="0">
-                <a:solidFill>
-                  <a:srgbClr val="EEF2F8"/>
-                </a:solidFill>
-                <a:latin typeface="Cambria" pitchFamily="34" charset="0"/>
-                <a:ea typeface="Cambria" pitchFamily="34" charset="-122"/>
-                <a:cs typeface="Cambria" pitchFamily="34" charset="-120"/>
-              </a:rPr>
-              <a:t>2</a:t>
-            </a:r>
-            <a:endParaRPr lang="en-US" sz="5400" dirty="0"/>
+            <a:endParaRPr lang="en-US" sz="1300" dirty="0"/>
           </a:p>
         </p:txBody>
       </p:sp>
@@ -2767,14 +2755,18 @@
         </p:nvSpPr>
         <p:spPr>
           <a:xfrm>
-            <a:off x="1828800" y="3383280"/>
-            <a:ext cx="0" cy="1051560"/>
-          </a:xfrm>
-          <a:prstGeom prst="line">
-            <a:avLst/>
-          </a:prstGeom>
-          <a:noFill/>
-          <a:ln w="25400">
+            <a:off x="640080" y="3401568"/>
+            <a:ext cx="5303520" cy="2606040"/>
+          </a:xfrm>
+          <a:prstGeom prst="roundRect">
+            <a:avLst>
+              <a:gd name="adj" fmla="val 3509"/>
+            </a:avLst>
+          </a:prstGeom>
+          <a:solidFill>
+            <a:srgbClr val="EEF2F8"/>
+          </a:solidFill>
+          <a:ln w="15240">
             <a:solidFill>
               <a:srgbClr val="2E5AA0"/>
             </a:solidFill>
@@ -2784,14 +2776,34 @@
       </p:sp>
       <p:sp>
         <p:nvSpPr>
-          <p:cNvPr id="10" name="Text 8"/>
-          <p:cNvSpPr/>
-          <p:nvPr/>
-        </p:nvSpPr>
-        <p:spPr>
-          <a:xfrm>
-            <a:off x="2057400" y="3337560"/>
-            <a:ext cx="9509760" cy="411480"/>
+          <p:cNvPr id="10" name="Shape 8"/>
+          <p:cNvSpPr/>
+          <p:nvPr/>
+        </p:nvSpPr>
+        <p:spPr>
+          <a:xfrm>
+            <a:off x="914400" y="3675888"/>
+            <a:ext cx="603504" cy="603504"/>
+          </a:xfrm>
+          <a:prstGeom prst="ellipse">
+            <a:avLst/>
+          </a:prstGeom>
+          <a:solidFill>
+            <a:srgbClr val="1E3A6E"/>
+          </a:solidFill>
+          <a:ln/>
+        </p:spPr>
+      </p:sp>
+      <p:sp>
+        <p:nvSpPr>
+          <p:cNvPr id="11" name="Text 9"/>
+          <p:cNvSpPr/>
+          <p:nvPr/>
+        </p:nvSpPr>
+        <p:spPr>
+          <a:xfrm>
+            <a:off x="914400" y="3675888"/>
+            <a:ext cx="603504" cy="603504"/>
           </a:xfrm>
           <a:prstGeom prst="rect">
             <a:avLst/>
@@ -2803,11 +2815,50 @@
           <a:bodyPr wrap="square" lIns="0" tIns="0" rIns="0" bIns="0" rtlCol="0" anchor="ctr"/>
           <a:lstStyle/>
           <a:p>
+            <a:pPr algn="ctr" indent="0" marL="0">
+              <a:buNone/>
+            </a:pPr>
+            <a:r>
+              <a:rPr lang="en-US" sz="2200" b="1" dirty="0">
+                <a:solidFill>
+                  <a:srgbClr val="FFFFFF"/>
+                </a:solidFill>
+                <a:latin typeface="Cambria" pitchFamily="34" charset="0"/>
+                <a:ea typeface="Cambria" pitchFamily="34" charset="-122"/>
+                <a:cs typeface="Cambria" pitchFamily="34" charset="-120"/>
+              </a:rPr>
+              <a:t>2</a:t>
+            </a:r>
+            <a:endParaRPr lang="en-US" sz="2200" dirty="0"/>
+          </a:p>
+        </p:txBody>
+      </p:sp>
+      <p:sp>
+        <p:nvSpPr>
+          <p:cNvPr id="12" name="Text 10"/>
+          <p:cNvSpPr/>
+          <p:nvPr/>
+        </p:nvSpPr>
+        <p:spPr>
+          <a:xfrm>
+            <a:off x="914400" y="4425696"/>
+            <a:ext cx="4754880" cy="777240"/>
+          </a:xfrm>
+          <a:prstGeom prst="rect">
+            <a:avLst/>
+          </a:prstGeom>
+          <a:noFill/>
+          <a:ln/>
+        </p:spPr>
+        <p:txBody>
+          <a:bodyPr wrap="square" lIns="0" tIns="0" rIns="0" bIns="0" rtlCol="0" anchor="ctr"/>
+          <a:lstStyle/>
+          <a:p>
             <a:pPr indent="0" marL="0">
               <a:buNone/>
             </a:pPr>
             <a:r>
-              <a:rPr lang="en-US" sz="1800" b="1" dirty="0">
+              <a:rPr lang="en-US" sz="1600" b="1" dirty="0">
                 <a:solidFill>
                   <a:srgbClr val="152238"/>
                 </a:solidFill>
@@ -2817,20 +2868,20 @@
               </a:rPr>
               <a:t>An engine-overheat alarm on depot-a</a:t>
             </a:r>
-            <a:endParaRPr lang="en-US" sz="1800" dirty="0"/>
-          </a:p>
-        </p:txBody>
-      </p:sp>
-      <p:sp>
-        <p:nvSpPr>
-          <p:cNvPr id="11" name="Text 9"/>
-          <p:cNvSpPr/>
-          <p:nvPr/>
-        </p:nvSpPr>
-        <p:spPr>
-          <a:xfrm>
-            <a:off x="2057400" y="3776472"/>
-            <a:ext cx="9509760" cy="822960"/>
+            <a:endParaRPr lang="en-US" sz="1600" dirty="0"/>
+          </a:p>
+        </p:txBody>
+      </p:sp>
+      <p:sp>
+        <p:nvSpPr>
+          <p:cNvPr id="13" name="Text 11"/>
+          <p:cNvSpPr/>
+          <p:nvPr/>
+        </p:nvSpPr>
+        <p:spPr>
+          <a:xfrm>
+            <a:off x="914400" y="5184648"/>
+            <a:ext cx="4754880" cy="640080"/>
           </a:xfrm>
           <a:prstGeom prst="rect">
             <a:avLst/>
@@ -2843,10 +2894,13 @@
           <a:lstStyle/>
           <a:p>
             <a:pPr indent="0" marL="0">
-              <a:buNone/>
-            </a:pPr>
-            <a:r>
-              <a:rPr lang="en-US" sz="1350" dirty="0">
+              <a:lnSpc>
+                <a:spcPct val="106000"/>
+              </a:lnSpc>
+              <a:buNone/>
+            </a:pPr>
+            <a:r>
+              <a:rPr lang="en-US" sz="1250" dirty="0">
                 <a:solidFill>
                   <a:srgbClr val="5C6A80"/>
                 </a:solidFill>
@@ -2856,65 +2910,30 @@
               </a:rPr>
               <a:t>Depot-a is firing an engine-overheat alarm right now while depot-b stays clear, each raised on its own window.</a:t>
             </a:r>
-            <a:endParaRPr lang="en-US" sz="1350" dirty="0"/>
-          </a:p>
-        </p:txBody>
-      </p:sp>
-      <p:sp>
-        <p:nvSpPr>
-          <p:cNvPr id="12" name="Text 10"/>
-          <p:cNvSpPr/>
-          <p:nvPr/>
-        </p:nvSpPr>
-        <p:spPr>
-          <a:xfrm>
-            <a:off x="640080" y="4663440"/>
-            <a:ext cx="1097280" cy="1097280"/>
-          </a:xfrm>
-          <a:prstGeom prst="rect">
-            <a:avLst/>
-          </a:prstGeom>
-          <a:noFill/>
-          <a:ln/>
-        </p:spPr>
-        <p:txBody>
-          <a:bodyPr wrap="square" lIns="0" tIns="0" rIns="0" bIns="0" rtlCol="0" anchor="ctr"/>
-          <a:lstStyle/>
-          <a:p>
-            <a:pPr indent="0" marL="0">
-              <a:buNone/>
-            </a:pPr>
-            <a:r>
-              <a:rPr lang="en-US" sz="5400" b="1" dirty="0">
-                <a:solidFill>
-                  <a:srgbClr val="EEF2F8"/>
-                </a:solidFill>
-                <a:latin typeface="Cambria" pitchFamily="34" charset="0"/>
-                <a:ea typeface="Cambria" pitchFamily="34" charset="-122"/>
-                <a:cs typeface="Cambria" pitchFamily="34" charset="-120"/>
-              </a:rPr>
-              <a:t>3</a:t>
-            </a:r>
-            <a:endParaRPr lang="en-US" sz="5400" dirty="0"/>
-          </a:p>
-        </p:txBody>
-      </p:sp>
-      <p:sp>
-        <p:nvSpPr>
-          <p:cNvPr id="13" name="Shape 11"/>
-          <p:cNvSpPr/>
-          <p:nvPr/>
-        </p:nvSpPr>
-        <p:spPr>
-          <a:xfrm>
-            <a:off x="1828800" y="4846320"/>
-            <a:ext cx="0" cy="1051560"/>
-          </a:xfrm>
-          <a:prstGeom prst="line">
-            <a:avLst/>
-          </a:prstGeom>
-          <a:noFill/>
-          <a:ln w="25400">
+            <a:endParaRPr lang="en-US" sz="1250" dirty="0"/>
+          </a:p>
+        </p:txBody>
+      </p:sp>
+      <p:sp>
+        <p:nvSpPr>
+          <p:cNvPr id="14" name="Shape 12"/>
+          <p:cNvSpPr/>
+          <p:nvPr/>
+        </p:nvSpPr>
+        <p:spPr>
+          <a:xfrm>
+            <a:off x="6217920" y="3401568"/>
+            <a:ext cx="5303520" cy="2606040"/>
+          </a:xfrm>
+          <a:prstGeom prst="roundRect">
+            <a:avLst>
+              <a:gd name="adj" fmla="val 3509"/>
+            </a:avLst>
+          </a:prstGeom>
+          <a:solidFill>
+            <a:srgbClr val="EEF2F8"/>
+          </a:solidFill>
+          <a:ln w="15240">
             <a:solidFill>
               <a:srgbClr val="2E5AA0"/>
             </a:solidFill>
@@ -2924,14 +2943,34 @@
       </p:sp>
       <p:sp>
         <p:nvSpPr>
-          <p:cNvPr id="14" name="Text 12"/>
-          <p:cNvSpPr/>
-          <p:nvPr/>
-        </p:nvSpPr>
-        <p:spPr>
-          <a:xfrm>
-            <a:off x="2057400" y="4800600"/>
-            <a:ext cx="9509760" cy="411480"/>
+          <p:cNvPr id="15" name="Shape 13"/>
+          <p:cNvSpPr/>
+          <p:nvPr/>
+        </p:nvSpPr>
+        <p:spPr>
+          <a:xfrm>
+            <a:off x="6492240" y="3675888"/>
+            <a:ext cx="603504" cy="603504"/>
+          </a:xfrm>
+          <a:prstGeom prst="ellipse">
+            <a:avLst/>
+          </a:prstGeom>
+          <a:solidFill>
+            <a:srgbClr val="1E3A6E"/>
+          </a:solidFill>
+          <a:ln/>
+        </p:spPr>
+      </p:sp>
+      <p:sp>
+        <p:nvSpPr>
+          <p:cNvPr id="16" name="Text 14"/>
+          <p:cNvSpPr/>
+          <p:nvPr/>
+        </p:nvSpPr>
+        <p:spPr>
+          <a:xfrm>
+            <a:off x="6492240" y="3675888"/>
+            <a:ext cx="603504" cy="603504"/>
           </a:xfrm>
           <a:prstGeom prst="rect">
             <a:avLst/>
@@ -2943,11 +2982,50 @@
           <a:bodyPr wrap="square" lIns="0" tIns="0" rIns="0" bIns="0" rtlCol="0" anchor="ctr"/>
           <a:lstStyle/>
           <a:p>
+            <a:pPr algn="ctr" indent="0" marL="0">
+              <a:buNone/>
+            </a:pPr>
+            <a:r>
+              <a:rPr lang="en-US" sz="2200" b="1" dirty="0">
+                <a:solidFill>
+                  <a:srgbClr val="FFFFFF"/>
+                </a:solidFill>
+                <a:latin typeface="Cambria" pitchFamily="34" charset="0"/>
+                <a:ea typeface="Cambria" pitchFamily="34" charset="-122"/>
+                <a:cs typeface="Cambria" pitchFamily="34" charset="-120"/>
+              </a:rPr>
+              <a:t>3</a:t>
+            </a:r>
+            <a:endParaRPr lang="en-US" sz="2200" dirty="0"/>
+          </a:p>
+        </p:txBody>
+      </p:sp>
+      <p:sp>
+        <p:nvSpPr>
+          <p:cNvPr id="17" name="Text 15"/>
+          <p:cNvSpPr/>
+          <p:nvPr/>
+        </p:nvSpPr>
+        <p:spPr>
+          <a:xfrm>
+            <a:off x="6492240" y="4425696"/>
+            <a:ext cx="4754880" cy="777240"/>
+          </a:xfrm>
+          <a:prstGeom prst="rect">
+            <a:avLst/>
+          </a:prstGeom>
+          <a:noFill/>
+          <a:ln/>
+        </p:spPr>
+        <p:txBody>
+          <a:bodyPr wrap="square" lIns="0" tIns="0" rIns="0" bIns="0" rtlCol="0" anchor="ctr"/>
+          <a:lstStyle/>
+          <a:p>
             <a:pPr indent="0" marL="0">
               <a:buNone/>
             </a:pPr>
             <a:r>
-              <a:rPr lang="en-US" sz="1800" b="1" dirty="0">
+              <a:rPr lang="en-US" sz="1600" b="1" dirty="0">
                 <a:solidFill>
                   <a:srgbClr val="152238"/>
                 </a:solidFill>
@@ -2957,20 +3035,20 @@
               </a:rPr>
               <a:t>Per-depot trend charts</a:t>
             </a:r>
-            <a:endParaRPr lang="en-US" sz="1800" dirty="0"/>
-          </a:p>
-        </p:txBody>
-      </p:sp>
-      <p:sp>
-        <p:nvSpPr>
-          <p:cNvPr id="15" name="Text 13"/>
-          <p:cNvSpPr/>
-          <p:nvPr/>
-        </p:nvSpPr>
-        <p:spPr>
-          <a:xfrm>
-            <a:off x="2057400" y="5239512"/>
-            <a:ext cx="9509760" cy="822960"/>
+            <a:endParaRPr lang="en-US" sz="1600" dirty="0"/>
+          </a:p>
+        </p:txBody>
+      </p:sp>
+      <p:sp>
+        <p:nvSpPr>
+          <p:cNvPr id="18" name="Text 16"/>
+          <p:cNvSpPr/>
+          <p:nvPr/>
+        </p:nvSpPr>
+        <p:spPr>
+          <a:xfrm>
+            <a:off x="6492240" y="5184648"/>
+            <a:ext cx="4754880" cy="640080"/>
           </a:xfrm>
           <a:prstGeom prst="rect">
             <a:avLst/>
@@ -2983,10 +3061,13 @@
           <a:lstStyle/>
           <a:p>
             <a:pPr indent="0" marL="0">
-              <a:buNone/>
-            </a:pPr>
-            <a:r>
-              <a:rPr lang="en-US" sz="1350" dirty="0">
+              <a:lnSpc>
+                <a:spcPct val="106000"/>
+              </a:lnSpc>
+              <a:buNone/>
+            </a:pPr>
+            <a:r>
+              <a:rPr lang="en-US" sz="1250" dirty="0">
                 <a:solidFill>
                   <a:srgbClr val="5C6A80"/>
                 </a:solidFill>
@@ -2996,46 +3077,7 @@
               </a:rPr>
               <a:t>Depot-a in orange and depot-b in green, so a climbing engine temperature is visible on the trend before it alarms.</a:t>
             </a:r>
-            <a:endParaRPr lang="en-US" sz="1350" dirty="0"/>
-          </a:p>
-        </p:txBody>
-      </p:sp>
-      <p:sp>
-        <p:nvSpPr>
-          <p:cNvPr id="16" name="Text 14"/>
-          <p:cNvSpPr/>
-          <p:nvPr/>
-        </p:nvSpPr>
-        <p:spPr>
-          <a:xfrm>
-            <a:off x="640080" y="6309360"/>
-            <a:ext cx="10972800" cy="365760"/>
-          </a:xfrm>
-          <a:prstGeom prst="rect">
-            <a:avLst/>
-          </a:prstGeom>
-          <a:noFill/>
-          <a:ln/>
-        </p:spPr>
-        <p:txBody>
-          <a:bodyPr wrap="square" rtlCol="0" anchor="ctr"/>
-          <a:lstStyle/>
-          <a:p>
-            <a:pPr indent="0" marL="0">
-              <a:buNone/>
-            </a:pPr>
-            <a:r>
-              <a:rPr lang="en-US" sz="1300" i="1" dirty="0">
-                <a:solidFill>
-                  <a:srgbClr val="5E80B8"/>
-                </a:solidFill>
-                <a:latin typeface="Calibri" pitchFamily="34" charset="0"/>
-                <a:ea typeface="Calibri" pitchFamily="34" charset="-122"/>
-                <a:cs typeface="Calibri" pitchFamily="34" charset="-120"/>
-              </a:rPr>
-              <a:t>Switch to the live dashboard here — backup video ready.</a:t>
-            </a:r>
-            <a:endParaRPr lang="en-US" sz="1300" dirty="0"/>
+            <a:endParaRPr lang="en-US" sz="1250" dirty="0"/>
           </a:p>
         </p:txBody>
       </p:sp>

--- a/ppt/SumalathaKambhampati_X25156420_public-transit-fleet-monitoring.pptx
+++ b/ppt/SumalathaKambhampati_X25156420_public-transit-fleet-monitoring.pptx
@@ -1124,7 +1124,7 @@
     <p:bg>
       <p:bgPr>
         <a:solidFill>
-          <a:srgbClr val="142235"/>
+          <a:srgbClr val="FFFFFF"/>
         </a:solidFill>
       </p:bgPr>
     </p:bg>
@@ -1172,7 +1172,7 @@
             <a:r>
               <a:rPr lang="en-US" sz="5200" b="1" dirty="0">
                 <a:solidFill>
-                  <a:srgbClr val="FFFFFF"/>
+                  <a:srgbClr val="152238"/>
                 </a:solidFill>
                 <a:latin typeface="Cambria" pitchFamily="34" charset="0"/>
                 <a:ea typeface="Cambria" pitchFamily="34" charset="-122"/>
@@ -1211,7 +1211,7 @@
             <a:r>
               <a:rPr lang="en-US" sz="1600" dirty="0">
                 <a:solidFill>
-                  <a:srgbClr val="5E80B8"/>
+                  <a:srgbClr val="2E5AA0"/>
                 </a:solidFill>
                 <a:latin typeface="Calibri" pitchFamily="34" charset="0"/>
                 <a:ea typeface="Calibri" pitchFamily="34" charset="-122"/>
@@ -1253,7 +1253,7 @@
             <a:r>
               <a:rPr lang="en-US" sz="1900" dirty="0">
                 <a:solidFill>
-                  <a:srgbClr val="D2DEEE"/>
+                  <a:srgbClr val="152238"/>
                 </a:solidFill>
                 <a:latin typeface="Calibri" pitchFamily="34" charset="0"/>
                 <a:ea typeface="Calibri" pitchFamily="34" charset="-122"/>
@@ -1282,11 +1282,11 @@
             </a:avLst>
           </a:prstGeom>
           <a:solidFill>
-            <a:srgbClr val="1A2C48"/>
+            <a:srgbClr val="EEF2F8"/>
           </a:solidFill>
           <a:ln w="12700">
             <a:solidFill>
-              <a:srgbClr val="FF6A1F"/>
+              <a:srgbClr val="5E80B8"/>
             </a:solidFill>
             <a:prstDash val="solid"/>
           </a:ln>
@@ -1319,7 +1319,7 @@
             <a:r>
               <a:rPr lang="en-US" sz="1350" b="1" dirty="0">
                 <a:solidFill>
-                  <a:srgbClr val="FF6A1F"/>
+                  <a:srgbClr val="1E3A6E"/>
                 </a:solidFill>
                 <a:latin typeface="Calibri" pitchFamily="34" charset="0"/>
                 <a:ea typeface="Calibri" pitchFamily="34" charset="-122"/>
@@ -1348,11 +1348,11 @@
             </a:avLst>
           </a:prstGeom>
           <a:solidFill>
-            <a:srgbClr val="1A2C48"/>
+            <a:srgbClr val="EEF2F8"/>
           </a:solidFill>
           <a:ln w="12700">
             <a:solidFill>
-              <a:srgbClr val="FF6A1F"/>
+              <a:srgbClr val="5E80B8"/>
             </a:solidFill>
             <a:prstDash val="solid"/>
           </a:ln>
@@ -1385,7 +1385,7 @@
             <a:r>
               <a:rPr lang="en-US" sz="1350" b="1" dirty="0">
                 <a:solidFill>
-                  <a:srgbClr val="FF6A1F"/>
+                  <a:srgbClr val="1E3A6E"/>
                 </a:solidFill>
                 <a:latin typeface="Calibri" pitchFamily="34" charset="0"/>
                 <a:ea typeface="Calibri" pitchFamily="34" charset="-122"/>
@@ -1414,11 +1414,11 @@
             </a:avLst>
           </a:prstGeom>
           <a:solidFill>
-            <a:srgbClr val="1A2C48"/>
+            <a:srgbClr val="EEF2F8"/>
           </a:solidFill>
           <a:ln w="12700">
             <a:solidFill>
-              <a:srgbClr val="FF6A1F"/>
+              <a:srgbClr val="5E80B8"/>
             </a:solidFill>
             <a:prstDash val="solid"/>
           </a:ln>
@@ -1451,7 +1451,7 @@
             <a:r>
               <a:rPr lang="en-US" sz="1350" b="1" dirty="0">
                 <a:solidFill>
-                  <a:srgbClr val="FF6A1F"/>
+                  <a:srgbClr val="1E3A6E"/>
                 </a:solidFill>
                 <a:latin typeface="Calibri" pitchFamily="34" charset="0"/>
                 <a:ea typeface="Calibri" pitchFamily="34" charset="-122"/>
@@ -1487,17 +1487,6 @@
             <a:pPr indent="0" marL="0">
               <a:buNone/>
             </a:pPr>
-            <a:r>
-              <a:rPr lang="en-US" sz="1250" dirty="0">
-                <a:solidFill>
-                  <a:srgbClr val="5C6A80"/>
-                </a:solidFill>
-                <a:latin typeface="Calibri" pitchFamily="34" charset="0"/>
-                <a:ea typeface="Calibri" pitchFamily="34" charset="-122"/>
-                <a:cs typeface="Calibri" pitchFamily="34" charset="-120"/>
-              </a:rPr>
-              <a:t>Fog &amp; Edge Computing (H9FECC)   ·   deployed live on AWS</a:t>
-            </a:r>
             <a:endParaRPr lang="en-US" sz="1250" dirty="0"/>
           </a:p>
         </p:txBody>

--- a/ppt/SumalathaKambhampati_X25156420_public-transit-fleet-monitoring.pptx
+++ b/ppt/SumalathaKambhampati_X25156420_public-transit-fleet-monitoring.pptx
@@ -1124,7 +1124,7 @@
     <p:bg>
       <p:bgPr>
         <a:solidFill>
-          <a:srgbClr val="FFFFFF"/>
+          <a:srgbClr val="0A1930"/>
         </a:solidFill>
       </p:bgPr>
     </p:bg>
@@ -1144,14 +1144,474 @@
       </p:grpSpPr>
       <p:sp>
         <p:nvSpPr>
-          <p:cNvPr id="2" name="Text 0"/>
-          <p:cNvSpPr/>
-          <p:nvPr/>
-        </p:nvSpPr>
-        <p:spPr>
-          <a:xfrm>
-            <a:off x="640080" y="777240"/>
-            <a:ext cx="11064240" cy="2103120"/>
+          <p:cNvPr id="2" name="Shape 0"/>
+          <p:cNvSpPr/>
+          <p:nvPr/>
+        </p:nvSpPr>
+        <p:spPr>
+          <a:xfrm>
+            <a:off x="0" y="6199632"/>
+            <a:ext cx="12191695" cy="658368"/>
+          </a:xfrm>
+          <a:prstGeom prst="rect">
+            <a:avLst/>
+          </a:prstGeom>
+          <a:solidFill>
+            <a:srgbClr val="18273E"/>
+          </a:solidFill>
+          <a:ln/>
+        </p:spPr>
+      </p:sp>
+      <p:sp>
+        <p:nvSpPr>
+          <p:cNvPr id="3" name="Shape 1"/>
+          <p:cNvSpPr/>
+          <p:nvPr/>
+        </p:nvSpPr>
+        <p:spPr>
+          <a:xfrm>
+            <a:off x="457200" y="6400800"/>
+            <a:ext cx="256032" cy="256032"/>
+          </a:xfrm>
+          <a:prstGeom prst="rect">
+            <a:avLst/>
+          </a:prstGeom>
+          <a:solidFill>
+            <a:srgbClr val="FF5A1F"/>
+          </a:solidFill>
+          <a:ln/>
+        </p:spPr>
+      </p:sp>
+      <p:sp>
+        <p:nvSpPr>
+          <p:cNvPr id="4" name="Shape 2"/>
+          <p:cNvSpPr/>
+          <p:nvPr/>
+        </p:nvSpPr>
+        <p:spPr>
+          <a:xfrm>
+            <a:off x="987552" y="6400800"/>
+            <a:ext cx="256032" cy="256032"/>
+          </a:xfrm>
+          <a:prstGeom prst="rect">
+            <a:avLst/>
+          </a:prstGeom>
+          <a:solidFill>
+            <a:srgbClr val="D73200"/>
+          </a:solidFill>
+          <a:ln/>
+        </p:spPr>
+      </p:sp>
+      <p:sp>
+        <p:nvSpPr>
+          <p:cNvPr id="5" name="Shape 3"/>
+          <p:cNvSpPr/>
+          <p:nvPr/>
+        </p:nvSpPr>
+        <p:spPr>
+          <a:xfrm>
+            <a:off x="1517904" y="6400800"/>
+            <a:ext cx="256032" cy="256032"/>
+          </a:xfrm>
+          <a:prstGeom prst="rect">
+            <a:avLst/>
+          </a:prstGeom>
+          <a:solidFill>
+            <a:srgbClr val="D73200"/>
+          </a:solidFill>
+          <a:ln/>
+        </p:spPr>
+      </p:sp>
+      <p:sp>
+        <p:nvSpPr>
+          <p:cNvPr id="6" name="Shape 4"/>
+          <p:cNvSpPr/>
+          <p:nvPr/>
+        </p:nvSpPr>
+        <p:spPr>
+          <a:xfrm>
+            <a:off x="2048256" y="6400800"/>
+            <a:ext cx="256032" cy="256032"/>
+          </a:xfrm>
+          <a:prstGeom prst="rect">
+            <a:avLst/>
+          </a:prstGeom>
+          <a:solidFill>
+            <a:srgbClr val="FF5A1F"/>
+          </a:solidFill>
+          <a:ln/>
+        </p:spPr>
+      </p:sp>
+      <p:sp>
+        <p:nvSpPr>
+          <p:cNvPr id="7" name="Shape 5"/>
+          <p:cNvSpPr/>
+          <p:nvPr/>
+        </p:nvSpPr>
+        <p:spPr>
+          <a:xfrm>
+            <a:off x="2578608" y="6400800"/>
+            <a:ext cx="256032" cy="256032"/>
+          </a:xfrm>
+          <a:prstGeom prst="rect">
+            <a:avLst/>
+          </a:prstGeom>
+          <a:solidFill>
+            <a:srgbClr val="D73200"/>
+          </a:solidFill>
+          <a:ln/>
+        </p:spPr>
+      </p:sp>
+      <p:sp>
+        <p:nvSpPr>
+          <p:cNvPr id="8" name="Shape 6"/>
+          <p:cNvSpPr/>
+          <p:nvPr/>
+        </p:nvSpPr>
+        <p:spPr>
+          <a:xfrm>
+            <a:off x="3108960" y="6400800"/>
+            <a:ext cx="256032" cy="256032"/>
+          </a:xfrm>
+          <a:prstGeom prst="rect">
+            <a:avLst/>
+          </a:prstGeom>
+          <a:solidFill>
+            <a:srgbClr val="D73200"/>
+          </a:solidFill>
+          <a:ln/>
+        </p:spPr>
+      </p:sp>
+      <p:sp>
+        <p:nvSpPr>
+          <p:cNvPr id="9" name="Shape 7"/>
+          <p:cNvSpPr/>
+          <p:nvPr/>
+        </p:nvSpPr>
+        <p:spPr>
+          <a:xfrm>
+            <a:off x="3639312" y="6400800"/>
+            <a:ext cx="256032" cy="256032"/>
+          </a:xfrm>
+          <a:prstGeom prst="rect">
+            <a:avLst/>
+          </a:prstGeom>
+          <a:solidFill>
+            <a:srgbClr val="FF5A1F"/>
+          </a:solidFill>
+          <a:ln/>
+        </p:spPr>
+      </p:sp>
+      <p:sp>
+        <p:nvSpPr>
+          <p:cNvPr id="10" name="Shape 8"/>
+          <p:cNvSpPr/>
+          <p:nvPr/>
+        </p:nvSpPr>
+        <p:spPr>
+          <a:xfrm>
+            <a:off x="4169664" y="6400800"/>
+            <a:ext cx="256032" cy="256032"/>
+          </a:xfrm>
+          <a:prstGeom prst="rect">
+            <a:avLst/>
+          </a:prstGeom>
+          <a:solidFill>
+            <a:srgbClr val="D73200"/>
+          </a:solidFill>
+          <a:ln/>
+        </p:spPr>
+      </p:sp>
+      <p:sp>
+        <p:nvSpPr>
+          <p:cNvPr id="11" name="Shape 9"/>
+          <p:cNvSpPr/>
+          <p:nvPr/>
+        </p:nvSpPr>
+        <p:spPr>
+          <a:xfrm>
+            <a:off x="4700016" y="6400800"/>
+            <a:ext cx="256032" cy="256032"/>
+          </a:xfrm>
+          <a:prstGeom prst="rect">
+            <a:avLst/>
+          </a:prstGeom>
+          <a:solidFill>
+            <a:srgbClr val="D73200"/>
+          </a:solidFill>
+          <a:ln/>
+        </p:spPr>
+      </p:sp>
+      <p:sp>
+        <p:nvSpPr>
+          <p:cNvPr id="12" name="Shape 10"/>
+          <p:cNvSpPr/>
+          <p:nvPr/>
+        </p:nvSpPr>
+        <p:spPr>
+          <a:xfrm>
+            <a:off x="5230368" y="6400800"/>
+            <a:ext cx="256032" cy="256032"/>
+          </a:xfrm>
+          <a:prstGeom prst="rect">
+            <a:avLst/>
+          </a:prstGeom>
+          <a:solidFill>
+            <a:srgbClr val="FF5A1F"/>
+          </a:solidFill>
+          <a:ln/>
+        </p:spPr>
+      </p:sp>
+      <p:sp>
+        <p:nvSpPr>
+          <p:cNvPr id="13" name="Shape 11"/>
+          <p:cNvSpPr/>
+          <p:nvPr/>
+        </p:nvSpPr>
+        <p:spPr>
+          <a:xfrm>
+            <a:off x="5760720" y="6400800"/>
+            <a:ext cx="256032" cy="256032"/>
+          </a:xfrm>
+          <a:prstGeom prst="rect">
+            <a:avLst/>
+          </a:prstGeom>
+          <a:solidFill>
+            <a:srgbClr val="D73200"/>
+          </a:solidFill>
+          <a:ln/>
+        </p:spPr>
+      </p:sp>
+      <p:sp>
+        <p:nvSpPr>
+          <p:cNvPr id="14" name="Shape 12"/>
+          <p:cNvSpPr/>
+          <p:nvPr/>
+        </p:nvSpPr>
+        <p:spPr>
+          <a:xfrm>
+            <a:off x="6291072" y="6400800"/>
+            <a:ext cx="256032" cy="256032"/>
+          </a:xfrm>
+          <a:prstGeom prst="rect">
+            <a:avLst/>
+          </a:prstGeom>
+          <a:solidFill>
+            <a:srgbClr val="D73200"/>
+          </a:solidFill>
+          <a:ln/>
+        </p:spPr>
+      </p:sp>
+      <p:sp>
+        <p:nvSpPr>
+          <p:cNvPr id="15" name="Shape 13"/>
+          <p:cNvSpPr/>
+          <p:nvPr/>
+        </p:nvSpPr>
+        <p:spPr>
+          <a:xfrm>
+            <a:off x="6821424" y="6400800"/>
+            <a:ext cx="256032" cy="256032"/>
+          </a:xfrm>
+          <a:prstGeom prst="rect">
+            <a:avLst/>
+          </a:prstGeom>
+          <a:solidFill>
+            <a:srgbClr val="FF5A1F"/>
+          </a:solidFill>
+          <a:ln/>
+        </p:spPr>
+      </p:sp>
+      <p:sp>
+        <p:nvSpPr>
+          <p:cNvPr id="16" name="Shape 14"/>
+          <p:cNvSpPr/>
+          <p:nvPr/>
+        </p:nvSpPr>
+        <p:spPr>
+          <a:xfrm>
+            <a:off x="7351776" y="6400800"/>
+            <a:ext cx="256032" cy="256032"/>
+          </a:xfrm>
+          <a:prstGeom prst="rect">
+            <a:avLst/>
+          </a:prstGeom>
+          <a:solidFill>
+            <a:srgbClr val="D73200"/>
+          </a:solidFill>
+          <a:ln/>
+        </p:spPr>
+      </p:sp>
+      <p:sp>
+        <p:nvSpPr>
+          <p:cNvPr id="17" name="Shape 15"/>
+          <p:cNvSpPr/>
+          <p:nvPr/>
+        </p:nvSpPr>
+        <p:spPr>
+          <a:xfrm>
+            <a:off x="7882128" y="6400800"/>
+            <a:ext cx="256032" cy="256032"/>
+          </a:xfrm>
+          <a:prstGeom prst="rect">
+            <a:avLst/>
+          </a:prstGeom>
+          <a:solidFill>
+            <a:srgbClr val="D73200"/>
+          </a:solidFill>
+          <a:ln/>
+        </p:spPr>
+      </p:sp>
+      <p:sp>
+        <p:nvSpPr>
+          <p:cNvPr id="18" name="Shape 16"/>
+          <p:cNvSpPr/>
+          <p:nvPr/>
+        </p:nvSpPr>
+        <p:spPr>
+          <a:xfrm>
+            <a:off x="8412480" y="6400800"/>
+            <a:ext cx="256032" cy="256032"/>
+          </a:xfrm>
+          <a:prstGeom prst="rect">
+            <a:avLst/>
+          </a:prstGeom>
+          <a:solidFill>
+            <a:srgbClr val="FF5A1F"/>
+          </a:solidFill>
+          <a:ln/>
+        </p:spPr>
+      </p:sp>
+      <p:sp>
+        <p:nvSpPr>
+          <p:cNvPr id="19" name="Shape 17"/>
+          <p:cNvSpPr/>
+          <p:nvPr/>
+        </p:nvSpPr>
+        <p:spPr>
+          <a:xfrm>
+            <a:off x="8942832" y="6400800"/>
+            <a:ext cx="256032" cy="256032"/>
+          </a:xfrm>
+          <a:prstGeom prst="rect">
+            <a:avLst/>
+          </a:prstGeom>
+          <a:solidFill>
+            <a:srgbClr val="D73200"/>
+          </a:solidFill>
+          <a:ln/>
+        </p:spPr>
+      </p:sp>
+      <p:sp>
+        <p:nvSpPr>
+          <p:cNvPr id="20" name="Shape 18"/>
+          <p:cNvSpPr/>
+          <p:nvPr/>
+        </p:nvSpPr>
+        <p:spPr>
+          <a:xfrm>
+            <a:off x="9473184" y="6400800"/>
+            <a:ext cx="256032" cy="256032"/>
+          </a:xfrm>
+          <a:prstGeom prst="rect">
+            <a:avLst/>
+          </a:prstGeom>
+          <a:solidFill>
+            <a:srgbClr val="D73200"/>
+          </a:solidFill>
+          <a:ln/>
+        </p:spPr>
+      </p:sp>
+      <p:sp>
+        <p:nvSpPr>
+          <p:cNvPr id="21" name="Shape 19"/>
+          <p:cNvSpPr/>
+          <p:nvPr/>
+        </p:nvSpPr>
+        <p:spPr>
+          <a:xfrm>
+            <a:off x="10003536" y="6400800"/>
+            <a:ext cx="256032" cy="256032"/>
+          </a:xfrm>
+          <a:prstGeom prst="rect">
+            <a:avLst/>
+          </a:prstGeom>
+          <a:solidFill>
+            <a:srgbClr val="FF5A1F"/>
+          </a:solidFill>
+          <a:ln/>
+        </p:spPr>
+      </p:sp>
+      <p:sp>
+        <p:nvSpPr>
+          <p:cNvPr id="22" name="Shape 20"/>
+          <p:cNvSpPr/>
+          <p:nvPr/>
+        </p:nvSpPr>
+        <p:spPr>
+          <a:xfrm>
+            <a:off x="10533888" y="6400800"/>
+            <a:ext cx="256032" cy="256032"/>
+          </a:xfrm>
+          <a:prstGeom prst="rect">
+            <a:avLst/>
+          </a:prstGeom>
+          <a:solidFill>
+            <a:srgbClr val="D73200"/>
+          </a:solidFill>
+          <a:ln/>
+        </p:spPr>
+      </p:sp>
+      <p:sp>
+        <p:nvSpPr>
+          <p:cNvPr id="23" name="Shape 21"/>
+          <p:cNvSpPr/>
+          <p:nvPr/>
+        </p:nvSpPr>
+        <p:spPr>
+          <a:xfrm>
+            <a:off x="11064240" y="6400800"/>
+            <a:ext cx="256032" cy="256032"/>
+          </a:xfrm>
+          <a:prstGeom prst="rect">
+            <a:avLst/>
+          </a:prstGeom>
+          <a:solidFill>
+            <a:srgbClr val="D73200"/>
+          </a:solidFill>
+          <a:ln/>
+        </p:spPr>
+      </p:sp>
+      <p:sp>
+        <p:nvSpPr>
+          <p:cNvPr id="24" name="Shape 22"/>
+          <p:cNvSpPr/>
+          <p:nvPr/>
+        </p:nvSpPr>
+        <p:spPr>
+          <a:xfrm>
+            <a:off x="11594592" y="6400800"/>
+            <a:ext cx="256032" cy="256032"/>
+          </a:xfrm>
+          <a:prstGeom prst="rect">
+            <a:avLst/>
+          </a:prstGeom>
+          <a:solidFill>
+            <a:srgbClr val="FF5A1F"/>
+          </a:solidFill>
+          <a:ln/>
+        </p:spPr>
+      </p:sp>
+      <p:sp>
+        <p:nvSpPr>
+          <p:cNvPr id="25" name="Text 23"/>
+          <p:cNvSpPr/>
+          <p:nvPr/>
+        </p:nvSpPr>
+        <p:spPr>
+          <a:xfrm>
+            <a:off x="758952" y="1645920"/>
+            <a:ext cx="10637215" cy="1645920"/>
           </a:xfrm>
           <a:prstGeom prst="rect">
             <a:avLst/>
@@ -1170,30 +1630,30 @@
               <a:buNone/>
             </a:pPr>
             <a:r>
-              <a:rPr lang="en-US" sz="5200" b="1" dirty="0">
+              <a:rPr lang="en-US" sz="3800" b="1" dirty="0">
                 <a:solidFill>
-                  <a:srgbClr val="152238"/>
+                  <a:srgbClr val="EEF3FA"/>
                 </a:solidFill>
-                <a:latin typeface="Cambria" pitchFamily="34" charset="0"/>
-                <a:ea typeface="Cambria" pitchFamily="34" charset="-122"/>
-                <a:cs typeface="Cambria" pitchFamily="34" charset="-120"/>
+                <a:latin typeface="Century Gothic" pitchFamily="34" charset="0"/>
+                <a:ea typeface="Century Gothic" pitchFamily="34" charset="-122"/>
+                <a:cs typeface="Century Gothic" pitchFamily="34" charset="-120"/>
               </a:rPr>
               <a:t>Public Transit Fleet Monitoring</a:t>
             </a:r>
-            <a:endParaRPr lang="en-US" sz="5200" dirty="0"/>
-          </a:p>
-        </p:txBody>
-      </p:sp>
-      <p:sp>
-        <p:nvSpPr>
-          <p:cNvPr id="3" name="Text 1"/>
-          <p:cNvSpPr/>
-          <p:nvPr/>
-        </p:nvSpPr>
-        <p:spPr>
-          <a:xfrm>
-            <a:off x="658368" y="2971800"/>
-            <a:ext cx="10972800" cy="365760"/>
+            <a:endParaRPr lang="en-US" sz="3800" dirty="0"/>
+          </a:p>
+        </p:txBody>
+      </p:sp>
+      <p:sp>
+        <p:nvSpPr>
+          <p:cNvPr id="26" name="Text 24"/>
+          <p:cNvSpPr/>
+          <p:nvPr/>
+        </p:nvSpPr>
+        <p:spPr>
+          <a:xfrm>
+            <a:off x="777240" y="3337560"/>
+            <a:ext cx="10637215" cy="365760"/>
           </a:xfrm>
           <a:prstGeom prst="rect">
             <a:avLst/>
@@ -1209,9 +1669,9 @@
               <a:buNone/>
             </a:pPr>
             <a:r>
-              <a:rPr lang="en-US" sz="1600" dirty="0">
+              <a:rPr lang="en-US" sz="1450" dirty="0">
                 <a:solidFill>
-                  <a:srgbClr val="2E5AA0"/>
+                  <a:srgbClr val="8B98A6"/>
                 </a:solidFill>
                 <a:latin typeface="Calibri" pitchFamily="34" charset="0"/>
                 <a:ea typeface="Calibri" pitchFamily="34" charset="-122"/>
@@ -1219,20 +1679,20 @@
               </a:rPr>
               <a:t>Sumalatha Kambhampati   ·   X25156420</a:t>
             </a:r>
-            <a:endParaRPr lang="en-US" sz="1600" dirty="0"/>
-          </a:p>
-        </p:txBody>
-      </p:sp>
-      <p:sp>
-        <p:nvSpPr>
-          <p:cNvPr id="4" name="Text 2"/>
-          <p:cNvSpPr/>
-          <p:nvPr/>
-        </p:nvSpPr>
-        <p:spPr>
-          <a:xfrm>
-            <a:off x="658368" y="3611880"/>
-            <a:ext cx="10424160" cy="1280160"/>
+            <a:endParaRPr lang="en-US" sz="1450" dirty="0"/>
+          </a:p>
+        </p:txBody>
+      </p:sp>
+      <p:sp>
+        <p:nvSpPr>
+          <p:cNvPr id="27" name="Text 25"/>
+          <p:cNvSpPr/>
+          <p:nvPr/>
+        </p:nvSpPr>
+        <p:spPr>
+          <a:xfrm>
+            <a:off x="777240" y="3931920"/>
+            <a:ext cx="8138160" cy="1325880"/>
           </a:xfrm>
           <a:prstGeom prst="rect">
             <a:avLst/>
@@ -1241,19 +1701,19 @@
           <a:ln/>
         </p:spPr>
         <p:txBody>
-          <a:bodyPr wrap="square" rtlCol="0" anchor="ctr"/>
+          <a:bodyPr wrap="square" rtlCol="0" anchor="t"/>
           <a:lstStyle/>
           <a:p>
             <a:pPr indent="0" marL="0">
               <a:lnSpc>
-                <a:spcPct val="108000"/>
+                <a:spcPct val="130000"/>
               </a:lnSpc>
               <a:buNone/>
             </a:pPr>
             <a:r>
-              <a:rPr lang="en-US" sz="1900" dirty="0">
+              <a:rPr lang="en-US" sz="1400" dirty="0">
                 <a:solidFill>
-                  <a:srgbClr val="152238"/>
+                  <a:srgbClr val="EEF3FA"/>
                 </a:solidFill>
                 <a:latin typeface="Calibri" pitchFamily="34" charset="0"/>
                 <a:ea typeface="Calibri" pitchFamily="34" charset="-122"/>
@@ -1261,233 +1721,7 @@
               </a:rPr>
               <a:t>A bus's condition changes minute by minute on the road, but a depot inspection only sees it once it is parked — an overheating engine is hours old by the evening walk-around.</a:t>
             </a:r>
-            <a:endParaRPr lang="en-US" sz="1900" dirty="0"/>
-          </a:p>
-        </p:txBody>
-      </p:sp>
-      <p:sp>
-        <p:nvSpPr>
-          <p:cNvPr id="5" name="Shape 3"/>
-          <p:cNvSpPr/>
-          <p:nvPr/>
-        </p:nvSpPr>
-        <p:spPr>
-          <a:xfrm>
-            <a:off x="658368" y="5074920"/>
-            <a:ext cx="2651760" cy="566928"/>
-          </a:xfrm>
-          <a:prstGeom prst="roundRect">
-            <a:avLst>
-              <a:gd name="adj" fmla="val 50000"/>
-            </a:avLst>
-          </a:prstGeom>
-          <a:solidFill>
-            <a:srgbClr val="EEF2F8"/>
-          </a:solidFill>
-          <a:ln w="12700">
-            <a:solidFill>
-              <a:srgbClr val="5E80B8"/>
-            </a:solidFill>
-            <a:prstDash val="solid"/>
-          </a:ln>
-        </p:spPr>
-      </p:sp>
-      <p:sp>
-        <p:nvSpPr>
-          <p:cNvPr id="6" name="Text 4"/>
-          <p:cNvSpPr/>
-          <p:nvPr/>
-        </p:nvSpPr>
-        <p:spPr>
-          <a:xfrm>
-            <a:off x="658368" y="5074920"/>
-            <a:ext cx="2651760" cy="566928"/>
-          </a:xfrm>
-          <a:prstGeom prst="rect">
-            <a:avLst/>
-          </a:prstGeom>
-          <a:noFill/>
-          <a:ln/>
-        </p:spPr>
-        <p:txBody>
-          <a:bodyPr wrap="square" lIns="0" tIns="0" rIns="0" bIns="0" rtlCol="0" anchor="ctr"/>
-          <a:lstStyle/>
-          <a:p>
-            <a:pPr algn="ctr" indent="0" marL="0">
-              <a:buNone/>
-            </a:pPr>
-            <a:r>
-              <a:rPr lang="en-US" sz="1350" b="1" dirty="0">
-                <a:solidFill>
-                  <a:srgbClr val="1E3A6E"/>
-                </a:solidFill>
-                <a:latin typeface="Calibri" pitchFamily="34" charset="0"/>
-                <a:ea typeface="Calibri" pitchFamily="34" charset="-122"/>
-                <a:cs typeface="Calibri" pitchFamily="34" charset="-120"/>
-              </a:rPr>
-              <a:t>Engine &gt; 105 °C</a:t>
-            </a:r>
-            <a:endParaRPr lang="en-US" sz="1350" dirty="0"/>
-          </a:p>
-        </p:txBody>
-      </p:sp>
-      <p:sp>
-        <p:nvSpPr>
-          <p:cNvPr id="7" name="Shape 5"/>
-          <p:cNvSpPr/>
-          <p:nvPr/>
-        </p:nvSpPr>
-        <p:spPr>
-          <a:xfrm>
-            <a:off x="3538728" y="5074920"/>
-            <a:ext cx="2651760" cy="566928"/>
-          </a:xfrm>
-          <a:prstGeom prst="roundRect">
-            <a:avLst>
-              <a:gd name="adj" fmla="val 50000"/>
-            </a:avLst>
-          </a:prstGeom>
-          <a:solidFill>
-            <a:srgbClr val="EEF2F8"/>
-          </a:solidFill>
-          <a:ln w="12700">
-            <a:solidFill>
-              <a:srgbClr val="5E80B8"/>
-            </a:solidFill>
-            <a:prstDash val="solid"/>
-          </a:ln>
-        </p:spPr>
-      </p:sp>
-      <p:sp>
-        <p:nvSpPr>
-          <p:cNvPr id="8" name="Text 6"/>
-          <p:cNvSpPr/>
-          <p:nvPr/>
-        </p:nvSpPr>
-        <p:spPr>
-          <a:xfrm>
-            <a:off x="3538728" y="5074920"/>
-            <a:ext cx="2651760" cy="566928"/>
-          </a:xfrm>
-          <a:prstGeom prst="rect">
-            <a:avLst/>
-          </a:prstGeom>
-          <a:noFill/>
-          <a:ln/>
-        </p:spPr>
-        <p:txBody>
-          <a:bodyPr wrap="square" lIns="0" tIns="0" rIns="0" bIns="0" rtlCol="0" anchor="ctr"/>
-          <a:lstStyle/>
-          <a:p>
-            <a:pPr algn="ctr" indent="0" marL="0">
-              <a:buNone/>
-            </a:pPr>
-            <a:r>
-              <a:rPr lang="en-US" sz="1350" b="1" dirty="0">
-                <a:solidFill>
-                  <a:srgbClr val="1E3A6E"/>
-                </a:solidFill>
-                <a:latin typeface="Calibri" pitchFamily="34" charset="0"/>
-                <a:ea typeface="Calibri" pitchFamily="34" charset="-122"/>
-                <a:cs typeface="Calibri" pitchFamily="34" charset="-120"/>
-              </a:rPr>
-              <a:t>Brake wear &gt; 80%</a:t>
-            </a:r>
-            <a:endParaRPr lang="en-US" sz="1350" dirty="0"/>
-          </a:p>
-        </p:txBody>
-      </p:sp>
-      <p:sp>
-        <p:nvSpPr>
-          <p:cNvPr id="9" name="Shape 7"/>
-          <p:cNvSpPr/>
-          <p:nvPr/>
-        </p:nvSpPr>
-        <p:spPr>
-          <a:xfrm>
-            <a:off x="6419088" y="5074920"/>
-            <a:ext cx="2651760" cy="566928"/>
-          </a:xfrm>
-          <a:prstGeom prst="roundRect">
-            <a:avLst>
-              <a:gd name="adj" fmla="val 50000"/>
-            </a:avLst>
-          </a:prstGeom>
-          <a:solidFill>
-            <a:srgbClr val="EEF2F8"/>
-          </a:solidFill>
-          <a:ln w="12700">
-            <a:solidFill>
-              <a:srgbClr val="5E80B8"/>
-            </a:solidFill>
-            <a:prstDash val="solid"/>
-          </a:ln>
-        </p:spPr>
-      </p:sp>
-      <p:sp>
-        <p:nvSpPr>
-          <p:cNvPr id="10" name="Text 8"/>
-          <p:cNvSpPr/>
-          <p:nvPr/>
-        </p:nvSpPr>
-        <p:spPr>
-          <a:xfrm>
-            <a:off x="6419088" y="5074920"/>
-            <a:ext cx="2651760" cy="566928"/>
-          </a:xfrm>
-          <a:prstGeom prst="rect">
-            <a:avLst/>
-          </a:prstGeom>
-          <a:noFill/>
-          <a:ln/>
-        </p:spPr>
-        <p:txBody>
-          <a:bodyPr wrap="square" lIns="0" tIns="0" rIns="0" bIns="0" rtlCol="0" anchor="ctr"/>
-          <a:lstStyle/>
-          <a:p>
-            <a:pPr algn="ctr" indent="0" marL="0">
-              <a:buNone/>
-            </a:pPr>
-            <a:r>
-              <a:rPr lang="en-US" sz="1350" b="1" dirty="0">
-                <a:solidFill>
-                  <a:srgbClr val="1E3A6E"/>
-                </a:solidFill>
-                <a:latin typeface="Calibri" pitchFamily="34" charset="0"/>
-                <a:ea typeface="Calibri" pitchFamily="34" charset="-122"/>
-                <a:cs typeface="Calibri" pitchFamily="34" charset="-120"/>
-              </a:rPr>
-              <a:t>Overcrowd peak &gt; 75</a:t>
-            </a:r>
-            <a:endParaRPr lang="en-US" sz="1350" dirty="0"/>
-          </a:p>
-        </p:txBody>
-      </p:sp>
-      <p:sp>
-        <p:nvSpPr>
-          <p:cNvPr id="11" name="Text 9"/>
-          <p:cNvSpPr/>
-          <p:nvPr/>
-        </p:nvSpPr>
-        <p:spPr>
-          <a:xfrm>
-            <a:off x="658368" y="6355080"/>
-            <a:ext cx="10972800" cy="320040"/>
-          </a:xfrm>
-          <a:prstGeom prst="rect">
-            <a:avLst/>
-          </a:prstGeom>
-          <a:noFill/>
-          <a:ln/>
-        </p:spPr>
-        <p:txBody>
-          <a:bodyPr wrap="square" rtlCol="0" anchor="ctr"/>
-          <a:lstStyle/>
-          <a:p>
-            <a:pPr indent="0" marL="0">
-              <a:buNone/>
-            </a:pPr>
-            <a:endParaRPr lang="en-US" sz="1250" dirty="0"/>
+            <a:endParaRPr lang="en-US" sz="1400" dirty="0"/>
           </a:p>
         </p:txBody>
       </p:sp>
@@ -1505,7 +1739,7 @@
     <p:bg>
       <p:bgPr>
         <a:solidFill>
-          <a:srgbClr val="FFFFFF"/>
+          <a:srgbClr val="0A1930"/>
         </a:solidFill>
       </p:bgPr>
     </p:bg>
@@ -1525,14 +1759,474 @@
       </p:grpSpPr>
       <p:sp>
         <p:nvSpPr>
-          <p:cNvPr id="2" name="Text 0"/>
-          <p:cNvSpPr/>
-          <p:nvPr/>
-        </p:nvSpPr>
-        <p:spPr>
-          <a:xfrm>
-            <a:off x="640080" y="457200"/>
-            <a:ext cx="10972800" cy="640080"/>
+          <p:cNvPr id="2" name="Shape 0"/>
+          <p:cNvSpPr/>
+          <p:nvPr/>
+        </p:nvSpPr>
+        <p:spPr>
+          <a:xfrm>
+            <a:off x="0" y="6199632"/>
+            <a:ext cx="12191695" cy="658368"/>
+          </a:xfrm>
+          <a:prstGeom prst="rect">
+            <a:avLst/>
+          </a:prstGeom>
+          <a:solidFill>
+            <a:srgbClr val="18273E"/>
+          </a:solidFill>
+          <a:ln/>
+        </p:spPr>
+      </p:sp>
+      <p:sp>
+        <p:nvSpPr>
+          <p:cNvPr id="3" name="Shape 1"/>
+          <p:cNvSpPr/>
+          <p:nvPr/>
+        </p:nvSpPr>
+        <p:spPr>
+          <a:xfrm>
+            <a:off x="457200" y="6400800"/>
+            <a:ext cx="256032" cy="256032"/>
+          </a:xfrm>
+          <a:prstGeom prst="rect">
+            <a:avLst/>
+          </a:prstGeom>
+          <a:solidFill>
+            <a:srgbClr val="FF5A1F"/>
+          </a:solidFill>
+          <a:ln/>
+        </p:spPr>
+      </p:sp>
+      <p:sp>
+        <p:nvSpPr>
+          <p:cNvPr id="4" name="Shape 2"/>
+          <p:cNvSpPr/>
+          <p:nvPr/>
+        </p:nvSpPr>
+        <p:spPr>
+          <a:xfrm>
+            <a:off x="987552" y="6400800"/>
+            <a:ext cx="256032" cy="256032"/>
+          </a:xfrm>
+          <a:prstGeom prst="rect">
+            <a:avLst/>
+          </a:prstGeom>
+          <a:solidFill>
+            <a:srgbClr val="D73200"/>
+          </a:solidFill>
+          <a:ln/>
+        </p:spPr>
+      </p:sp>
+      <p:sp>
+        <p:nvSpPr>
+          <p:cNvPr id="5" name="Shape 3"/>
+          <p:cNvSpPr/>
+          <p:nvPr/>
+        </p:nvSpPr>
+        <p:spPr>
+          <a:xfrm>
+            <a:off x="1517904" y="6400800"/>
+            <a:ext cx="256032" cy="256032"/>
+          </a:xfrm>
+          <a:prstGeom prst="rect">
+            <a:avLst/>
+          </a:prstGeom>
+          <a:solidFill>
+            <a:srgbClr val="D73200"/>
+          </a:solidFill>
+          <a:ln/>
+        </p:spPr>
+      </p:sp>
+      <p:sp>
+        <p:nvSpPr>
+          <p:cNvPr id="6" name="Shape 4"/>
+          <p:cNvSpPr/>
+          <p:nvPr/>
+        </p:nvSpPr>
+        <p:spPr>
+          <a:xfrm>
+            <a:off x="2048256" y="6400800"/>
+            <a:ext cx="256032" cy="256032"/>
+          </a:xfrm>
+          <a:prstGeom prst="rect">
+            <a:avLst/>
+          </a:prstGeom>
+          <a:solidFill>
+            <a:srgbClr val="FF5A1F"/>
+          </a:solidFill>
+          <a:ln/>
+        </p:spPr>
+      </p:sp>
+      <p:sp>
+        <p:nvSpPr>
+          <p:cNvPr id="7" name="Shape 5"/>
+          <p:cNvSpPr/>
+          <p:nvPr/>
+        </p:nvSpPr>
+        <p:spPr>
+          <a:xfrm>
+            <a:off x="2578608" y="6400800"/>
+            <a:ext cx="256032" cy="256032"/>
+          </a:xfrm>
+          <a:prstGeom prst="rect">
+            <a:avLst/>
+          </a:prstGeom>
+          <a:solidFill>
+            <a:srgbClr val="D73200"/>
+          </a:solidFill>
+          <a:ln/>
+        </p:spPr>
+      </p:sp>
+      <p:sp>
+        <p:nvSpPr>
+          <p:cNvPr id="8" name="Shape 6"/>
+          <p:cNvSpPr/>
+          <p:nvPr/>
+        </p:nvSpPr>
+        <p:spPr>
+          <a:xfrm>
+            <a:off x="3108960" y="6400800"/>
+            <a:ext cx="256032" cy="256032"/>
+          </a:xfrm>
+          <a:prstGeom prst="rect">
+            <a:avLst/>
+          </a:prstGeom>
+          <a:solidFill>
+            <a:srgbClr val="D73200"/>
+          </a:solidFill>
+          <a:ln/>
+        </p:spPr>
+      </p:sp>
+      <p:sp>
+        <p:nvSpPr>
+          <p:cNvPr id="9" name="Shape 7"/>
+          <p:cNvSpPr/>
+          <p:nvPr/>
+        </p:nvSpPr>
+        <p:spPr>
+          <a:xfrm>
+            <a:off x="3639312" y="6400800"/>
+            <a:ext cx="256032" cy="256032"/>
+          </a:xfrm>
+          <a:prstGeom prst="rect">
+            <a:avLst/>
+          </a:prstGeom>
+          <a:solidFill>
+            <a:srgbClr val="FF5A1F"/>
+          </a:solidFill>
+          <a:ln/>
+        </p:spPr>
+      </p:sp>
+      <p:sp>
+        <p:nvSpPr>
+          <p:cNvPr id="10" name="Shape 8"/>
+          <p:cNvSpPr/>
+          <p:nvPr/>
+        </p:nvSpPr>
+        <p:spPr>
+          <a:xfrm>
+            <a:off x="4169664" y="6400800"/>
+            <a:ext cx="256032" cy="256032"/>
+          </a:xfrm>
+          <a:prstGeom prst="rect">
+            <a:avLst/>
+          </a:prstGeom>
+          <a:solidFill>
+            <a:srgbClr val="D73200"/>
+          </a:solidFill>
+          <a:ln/>
+        </p:spPr>
+      </p:sp>
+      <p:sp>
+        <p:nvSpPr>
+          <p:cNvPr id="11" name="Shape 9"/>
+          <p:cNvSpPr/>
+          <p:nvPr/>
+        </p:nvSpPr>
+        <p:spPr>
+          <a:xfrm>
+            <a:off x="4700016" y="6400800"/>
+            <a:ext cx="256032" cy="256032"/>
+          </a:xfrm>
+          <a:prstGeom prst="rect">
+            <a:avLst/>
+          </a:prstGeom>
+          <a:solidFill>
+            <a:srgbClr val="D73200"/>
+          </a:solidFill>
+          <a:ln/>
+        </p:spPr>
+      </p:sp>
+      <p:sp>
+        <p:nvSpPr>
+          <p:cNvPr id="12" name="Shape 10"/>
+          <p:cNvSpPr/>
+          <p:nvPr/>
+        </p:nvSpPr>
+        <p:spPr>
+          <a:xfrm>
+            <a:off x="5230368" y="6400800"/>
+            <a:ext cx="256032" cy="256032"/>
+          </a:xfrm>
+          <a:prstGeom prst="rect">
+            <a:avLst/>
+          </a:prstGeom>
+          <a:solidFill>
+            <a:srgbClr val="FF5A1F"/>
+          </a:solidFill>
+          <a:ln/>
+        </p:spPr>
+      </p:sp>
+      <p:sp>
+        <p:nvSpPr>
+          <p:cNvPr id="13" name="Shape 11"/>
+          <p:cNvSpPr/>
+          <p:nvPr/>
+        </p:nvSpPr>
+        <p:spPr>
+          <a:xfrm>
+            <a:off x="5760720" y="6400800"/>
+            <a:ext cx="256032" cy="256032"/>
+          </a:xfrm>
+          <a:prstGeom prst="rect">
+            <a:avLst/>
+          </a:prstGeom>
+          <a:solidFill>
+            <a:srgbClr val="D73200"/>
+          </a:solidFill>
+          <a:ln/>
+        </p:spPr>
+      </p:sp>
+      <p:sp>
+        <p:nvSpPr>
+          <p:cNvPr id="14" name="Shape 12"/>
+          <p:cNvSpPr/>
+          <p:nvPr/>
+        </p:nvSpPr>
+        <p:spPr>
+          <a:xfrm>
+            <a:off x="6291072" y="6400800"/>
+            <a:ext cx="256032" cy="256032"/>
+          </a:xfrm>
+          <a:prstGeom prst="rect">
+            <a:avLst/>
+          </a:prstGeom>
+          <a:solidFill>
+            <a:srgbClr val="D73200"/>
+          </a:solidFill>
+          <a:ln/>
+        </p:spPr>
+      </p:sp>
+      <p:sp>
+        <p:nvSpPr>
+          <p:cNvPr id="15" name="Shape 13"/>
+          <p:cNvSpPr/>
+          <p:nvPr/>
+        </p:nvSpPr>
+        <p:spPr>
+          <a:xfrm>
+            <a:off x="6821424" y="6400800"/>
+            <a:ext cx="256032" cy="256032"/>
+          </a:xfrm>
+          <a:prstGeom prst="rect">
+            <a:avLst/>
+          </a:prstGeom>
+          <a:solidFill>
+            <a:srgbClr val="FF5A1F"/>
+          </a:solidFill>
+          <a:ln/>
+        </p:spPr>
+      </p:sp>
+      <p:sp>
+        <p:nvSpPr>
+          <p:cNvPr id="16" name="Shape 14"/>
+          <p:cNvSpPr/>
+          <p:nvPr/>
+        </p:nvSpPr>
+        <p:spPr>
+          <a:xfrm>
+            <a:off x="7351776" y="6400800"/>
+            <a:ext cx="256032" cy="256032"/>
+          </a:xfrm>
+          <a:prstGeom prst="rect">
+            <a:avLst/>
+          </a:prstGeom>
+          <a:solidFill>
+            <a:srgbClr val="D73200"/>
+          </a:solidFill>
+          <a:ln/>
+        </p:spPr>
+      </p:sp>
+      <p:sp>
+        <p:nvSpPr>
+          <p:cNvPr id="17" name="Shape 15"/>
+          <p:cNvSpPr/>
+          <p:nvPr/>
+        </p:nvSpPr>
+        <p:spPr>
+          <a:xfrm>
+            <a:off x="7882128" y="6400800"/>
+            <a:ext cx="256032" cy="256032"/>
+          </a:xfrm>
+          <a:prstGeom prst="rect">
+            <a:avLst/>
+          </a:prstGeom>
+          <a:solidFill>
+            <a:srgbClr val="D73200"/>
+          </a:solidFill>
+          <a:ln/>
+        </p:spPr>
+      </p:sp>
+      <p:sp>
+        <p:nvSpPr>
+          <p:cNvPr id="18" name="Shape 16"/>
+          <p:cNvSpPr/>
+          <p:nvPr/>
+        </p:nvSpPr>
+        <p:spPr>
+          <a:xfrm>
+            <a:off x="8412480" y="6400800"/>
+            <a:ext cx="256032" cy="256032"/>
+          </a:xfrm>
+          <a:prstGeom prst="rect">
+            <a:avLst/>
+          </a:prstGeom>
+          <a:solidFill>
+            <a:srgbClr val="FF5A1F"/>
+          </a:solidFill>
+          <a:ln/>
+        </p:spPr>
+      </p:sp>
+      <p:sp>
+        <p:nvSpPr>
+          <p:cNvPr id="19" name="Shape 17"/>
+          <p:cNvSpPr/>
+          <p:nvPr/>
+        </p:nvSpPr>
+        <p:spPr>
+          <a:xfrm>
+            <a:off x="8942832" y="6400800"/>
+            <a:ext cx="256032" cy="256032"/>
+          </a:xfrm>
+          <a:prstGeom prst="rect">
+            <a:avLst/>
+          </a:prstGeom>
+          <a:solidFill>
+            <a:srgbClr val="D73200"/>
+          </a:solidFill>
+          <a:ln/>
+        </p:spPr>
+      </p:sp>
+      <p:sp>
+        <p:nvSpPr>
+          <p:cNvPr id="20" name="Shape 18"/>
+          <p:cNvSpPr/>
+          <p:nvPr/>
+        </p:nvSpPr>
+        <p:spPr>
+          <a:xfrm>
+            <a:off x="9473184" y="6400800"/>
+            <a:ext cx="256032" cy="256032"/>
+          </a:xfrm>
+          <a:prstGeom prst="rect">
+            <a:avLst/>
+          </a:prstGeom>
+          <a:solidFill>
+            <a:srgbClr val="D73200"/>
+          </a:solidFill>
+          <a:ln/>
+        </p:spPr>
+      </p:sp>
+      <p:sp>
+        <p:nvSpPr>
+          <p:cNvPr id="21" name="Shape 19"/>
+          <p:cNvSpPr/>
+          <p:nvPr/>
+        </p:nvSpPr>
+        <p:spPr>
+          <a:xfrm>
+            <a:off x="10003536" y="6400800"/>
+            <a:ext cx="256032" cy="256032"/>
+          </a:xfrm>
+          <a:prstGeom prst="rect">
+            <a:avLst/>
+          </a:prstGeom>
+          <a:solidFill>
+            <a:srgbClr val="FF5A1F"/>
+          </a:solidFill>
+          <a:ln/>
+        </p:spPr>
+      </p:sp>
+      <p:sp>
+        <p:nvSpPr>
+          <p:cNvPr id="22" name="Shape 20"/>
+          <p:cNvSpPr/>
+          <p:nvPr/>
+        </p:nvSpPr>
+        <p:spPr>
+          <a:xfrm>
+            <a:off x="10533888" y="6400800"/>
+            <a:ext cx="256032" cy="256032"/>
+          </a:xfrm>
+          <a:prstGeom prst="rect">
+            <a:avLst/>
+          </a:prstGeom>
+          <a:solidFill>
+            <a:srgbClr val="D73200"/>
+          </a:solidFill>
+          <a:ln/>
+        </p:spPr>
+      </p:sp>
+      <p:sp>
+        <p:nvSpPr>
+          <p:cNvPr id="23" name="Shape 21"/>
+          <p:cNvSpPr/>
+          <p:nvPr/>
+        </p:nvSpPr>
+        <p:spPr>
+          <a:xfrm>
+            <a:off x="11064240" y="6400800"/>
+            <a:ext cx="256032" cy="256032"/>
+          </a:xfrm>
+          <a:prstGeom prst="rect">
+            <a:avLst/>
+          </a:prstGeom>
+          <a:solidFill>
+            <a:srgbClr val="D73200"/>
+          </a:solidFill>
+          <a:ln/>
+        </p:spPr>
+      </p:sp>
+      <p:sp>
+        <p:nvSpPr>
+          <p:cNvPr id="24" name="Shape 22"/>
+          <p:cNvSpPr/>
+          <p:nvPr/>
+        </p:nvSpPr>
+        <p:spPr>
+          <a:xfrm>
+            <a:off x="11594592" y="6400800"/>
+            <a:ext cx="256032" cy="256032"/>
+          </a:xfrm>
+          <a:prstGeom prst="rect">
+            <a:avLst/>
+          </a:prstGeom>
+          <a:solidFill>
+            <a:srgbClr val="FF5A1F"/>
+          </a:solidFill>
+          <a:ln/>
+        </p:spPr>
+      </p:sp>
+      <p:sp>
+        <p:nvSpPr>
+          <p:cNvPr id="25" name="Text 23"/>
+          <p:cNvSpPr/>
+          <p:nvPr/>
+        </p:nvSpPr>
+        <p:spPr>
+          <a:xfrm>
+            <a:off x="777240" y="685800"/>
+            <a:ext cx="914400" cy="640080"/>
           </a:xfrm>
           <a:prstGeom prst="rect">
             <a:avLst/>
@@ -1541,7 +2235,7 @@
           <a:ln/>
         </p:spPr>
         <p:txBody>
-          <a:bodyPr wrap="square" rtlCol="0" anchor="ctr"/>
+          <a:bodyPr wrap="square" lIns="0" tIns="0" rIns="0" bIns="0" rtlCol="0" anchor="ctr"/>
           <a:lstStyle/>
           <a:p>
             <a:pPr indent="0" marL="0">
@@ -1550,13 +2244,13 @@
             <a:r>
               <a:rPr lang="en-US" sz="3000" b="1" dirty="0">
                 <a:solidFill>
-                  <a:srgbClr val="152238"/>
+                  <a:srgbClr val="FF5A1F"/>
                 </a:solidFill>
-                <a:latin typeface="Cambria" pitchFamily="34" charset="0"/>
-                <a:ea typeface="Cambria" pitchFamily="34" charset="-122"/>
-                <a:cs typeface="Cambria" pitchFamily="34" charset="-120"/>
+                <a:latin typeface="Century Gothic" pitchFamily="34" charset="0"/>
+                <a:ea typeface="Century Gothic" pitchFamily="34" charset="-122"/>
+                <a:cs typeface="Century Gothic" pitchFamily="34" charset="-120"/>
               </a:rPr>
-              <a:t>What I Built — Sensor to Serverless Cloud</a:t>
+              <a:t>01</a:t>
             </a:r>
             <a:endParaRPr lang="en-US" sz="3000" dirty="0"/>
           </a:p>
@@ -1564,41 +2258,14 @@
       </p:sp>
       <p:sp>
         <p:nvSpPr>
-          <p:cNvPr id="3" name="Shape 1"/>
-          <p:cNvSpPr/>
-          <p:nvPr/>
-        </p:nvSpPr>
-        <p:spPr>
-          <a:xfrm>
-            <a:off x="640080" y="1554480"/>
-            <a:ext cx="3200400" cy="3383280"/>
-          </a:xfrm>
-          <a:prstGeom prst="roundRect">
-            <a:avLst>
-              <a:gd name="adj" fmla="val 2857"/>
-            </a:avLst>
-          </a:prstGeom>
-          <a:solidFill>
-            <a:srgbClr val="EEF2F8"/>
-          </a:solidFill>
-          <a:ln w="19050">
-            <a:solidFill>
-              <a:srgbClr val="5E80B8"/>
-            </a:solidFill>
-            <a:prstDash val="solid"/>
-          </a:ln>
-        </p:spPr>
-      </p:sp>
-      <p:sp>
-        <p:nvSpPr>
-          <p:cNvPr id="4" name="Text 2"/>
-          <p:cNvSpPr/>
-          <p:nvPr/>
-        </p:nvSpPr>
-        <p:spPr>
-          <a:xfrm>
-            <a:off x="640080" y="1691640"/>
-            <a:ext cx="3200400" cy="365760"/>
+          <p:cNvPr id="26" name="Text 24"/>
+          <p:cNvSpPr/>
+          <p:nvPr/>
+        </p:nvSpPr>
+        <p:spPr>
+          <a:xfrm>
+            <a:off x="1645920" y="859536"/>
+            <a:ext cx="9768535" cy="274320"/>
           </a:xfrm>
           <a:prstGeom prst="rect">
             <a:avLst/>
@@ -1607,49 +2274,88 @@
           <a:ln/>
         </p:spPr>
         <p:txBody>
-          <a:bodyPr wrap="square" rtlCol="0" anchor="ctr"/>
+          <a:bodyPr wrap="square" lIns="0" tIns="0" rIns="0" bIns="0" rtlCol="0" anchor="ctr"/>
           <a:lstStyle/>
           <a:p>
-            <a:pPr algn="ctr" indent="0" marL="0">
+            <a:pPr indent="0" marL="0">
               <a:buNone/>
             </a:pPr>
             <a:r>
-              <a:rPr lang="en-US" sz="1200" b="1" spc="300" kern="0" dirty="0">
+              <a:rPr lang="en-US" sz="1100" b="1" spc="200" kern="0" dirty="0">
                 <a:solidFill>
-                  <a:srgbClr val="5E80B8"/>
+                  <a:srgbClr val="8B98A6"/>
                 </a:solidFill>
                 <a:latin typeface="Calibri" pitchFamily="34" charset="0"/>
                 <a:ea typeface="Calibri" pitchFamily="34" charset="-122"/>
                 <a:cs typeface="Calibri" pitchFamily="34" charset="-120"/>
               </a:rPr>
-              <a:t>EDGE</a:t>
+              <a:t>ARCHITECTURE</a:t>
             </a:r>
-            <a:endParaRPr lang="en-US" sz="1200" dirty="0"/>
-          </a:p>
-        </p:txBody>
-      </p:sp>
-      <p:sp>
-        <p:nvSpPr>
-          <p:cNvPr id="5" name="Shape 3"/>
-          <p:cNvSpPr/>
-          <p:nvPr/>
-        </p:nvSpPr>
-        <p:spPr>
-          <a:xfrm>
-            <a:off x="914400" y="2286000"/>
-            <a:ext cx="2651760" cy="1005840"/>
+            <a:endParaRPr lang="en-US" sz="1100" dirty="0"/>
+          </a:p>
+        </p:txBody>
+      </p:sp>
+      <p:sp>
+        <p:nvSpPr>
+          <p:cNvPr id="27" name="Text 25"/>
+          <p:cNvSpPr/>
+          <p:nvPr/>
+        </p:nvSpPr>
+        <p:spPr>
+          <a:xfrm>
+            <a:off x="777240" y="1335024"/>
+            <a:ext cx="10637215" cy="640080"/>
+          </a:xfrm>
+          <a:prstGeom prst="rect">
+            <a:avLst/>
+          </a:prstGeom>
+          <a:noFill/>
+          <a:ln/>
+        </p:spPr>
+        <p:txBody>
+          <a:bodyPr wrap="square" lIns="0" tIns="0" rIns="0" bIns="0" rtlCol="0" anchor="ctr"/>
+          <a:lstStyle/>
+          <a:p>
+            <a:pPr indent="0" marL="0">
+              <a:buNone/>
+            </a:pPr>
+            <a:r>
+              <a:rPr lang="en-US" sz="2300" b="1" dirty="0">
+                <a:solidFill>
+                  <a:srgbClr val="EEF3FA"/>
+                </a:solidFill>
+                <a:latin typeface="Century Gothic" pitchFamily="34" charset="0"/>
+                <a:ea typeface="Century Gothic" pitchFamily="34" charset="-122"/>
+                <a:cs typeface="Century Gothic" pitchFamily="34" charset="-120"/>
+              </a:rPr>
+              <a:t>What I Built — Sensor to Serverless Cloud</a:t>
+            </a:r>
+            <a:endParaRPr lang="en-US" sz="2300" dirty="0"/>
+          </a:p>
+        </p:txBody>
+      </p:sp>
+      <p:sp>
+        <p:nvSpPr>
+          <p:cNvPr id="28" name="Shape 26"/>
+          <p:cNvSpPr/>
+          <p:nvPr/>
+        </p:nvSpPr>
+        <p:spPr>
+          <a:xfrm>
+            <a:off x="777240" y="2926080"/>
+            <a:ext cx="1391869" cy="1965960"/>
           </a:xfrm>
           <a:prstGeom prst="roundRect">
             <a:avLst>
-              <a:gd name="adj" fmla="val 7273"/>
+              <a:gd name="adj" fmla="val 2628"/>
             </a:avLst>
           </a:prstGeom>
           <a:solidFill>
-            <a:srgbClr val="FFFFFF"/>
-          </a:solidFill>
-          <a:ln w="15240">
+            <a:srgbClr val="FF5A1F"/>
+          </a:solidFill>
+          <a:ln w="12700">
             <a:solidFill>
-              <a:srgbClr val="5E80B8"/>
+              <a:srgbClr val="FF5A1F"/>
             </a:solidFill>
             <a:prstDash val="solid"/>
           </a:ln>
@@ -1657,14 +2363,14 @@
       </p:sp>
       <p:sp>
         <p:nvSpPr>
-          <p:cNvPr id="6" name="Text 4"/>
-          <p:cNvSpPr/>
-          <p:nvPr/>
-        </p:nvSpPr>
-        <p:spPr>
-          <a:xfrm>
-            <a:off x="914400" y="2432304"/>
-            <a:ext cx="2651760" cy="365760"/>
+          <p:cNvPr id="29" name="Text 27"/>
+          <p:cNvSpPr/>
+          <p:nvPr/>
+        </p:nvSpPr>
+        <p:spPr>
+          <a:xfrm>
+            <a:off x="923544" y="3108960"/>
+            <a:ext cx="1099261" cy="320040"/>
           </a:xfrm>
           <a:prstGeom prst="rect">
             <a:avLst/>
@@ -1676,34 +2382,76 @@
           <a:bodyPr wrap="square" lIns="0" tIns="0" rIns="0" bIns="0" rtlCol="0" anchor="ctr"/>
           <a:lstStyle/>
           <a:p>
-            <a:pPr algn="ctr" indent="0" marL="0">
+            <a:pPr indent="0" marL="0">
               <a:buNone/>
             </a:pPr>
             <a:r>
-              <a:rPr lang="en-US" sz="1400" b="1" dirty="0">
+              <a:rPr lang="en-US" sz="1100" dirty="0">
                 <a:solidFill>
-                  <a:srgbClr val="152238"/>
+                  <a:srgbClr val="FFFFFF"/>
                 </a:solidFill>
-                <a:latin typeface="Calibri" pitchFamily="34" charset="0"/>
-                <a:ea typeface="Calibri" pitchFamily="34" charset="-122"/>
-                <a:cs typeface="Calibri" pitchFamily="34" charset="-120"/>
+                <a:latin typeface="Consolas" pitchFamily="34" charset="0"/>
+                <a:ea typeface="Consolas" pitchFamily="34" charset="-122"/>
+                <a:cs typeface="Consolas" pitchFamily="34" charset="-120"/>
+              </a:rPr>
+              <a:t>01</a:t>
+            </a:r>
+            <a:endParaRPr lang="en-US" sz="1100" dirty="0"/>
+          </a:p>
+        </p:txBody>
+      </p:sp>
+      <p:sp>
+        <p:nvSpPr>
+          <p:cNvPr id="30" name="Text 28"/>
+          <p:cNvSpPr/>
+          <p:nvPr/>
+        </p:nvSpPr>
+        <p:spPr>
+          <a:xfrm>
+            <a:off x="923544" y="3547872"/>
+            <a:ext cx="1099261" cy="868680"/>
+          </a:xfrm>
+          <a:prstGeom prst="rect">
+            <a:avLst/>
+          </a:prstGeom>
+          <a:noFill/>
+          <a:ln/>
+        </p:spPr>
+        <p:txBody>
+          <a:bodyPr wrap="square" lIns="0" tIns="0" rIns="0" bIns="0" rtlCol="0" anchor="t"/>
+          <a:lstStyle/>
+          <a:p>
+            <a:pPr indent="0" marL="0">
+              <a:lnSpc>
+                <a:spcPct val="96000"/>
+              </a:lnSpc>
+              <a:buNone/>
+            </a:pPr>
+            <a:r>
+              <a:rPr lang="en-US" sz="1300" b="1" dirty="0">
+                <a:solidFill>
+                  <a:srgbClr val="FFFFFF"/>
+                </a:solidFill>
+                <a:latin typeface="Century Gothic" pitchFamily="34" charset="0"/>
+                <a:ea typeface="Century Gothic" pitchFamily="34" charset="-122"/>
+                <a:cs typeface="Century Gothic" pitchFamily="34" charset="-120"/>
               </a:rPr>
               <a:t>Bus sensors</a:t>
             </a:r>
-            <a:endParaRPr lang="en-US" sz="1400" dirty="0"/>
-          </a:p>
-        </p:txBody>
-      </p:sp>
-      <p:sp>
-        <p:nvSpPr>
-          <p:cNvPr id="7" name="Text 5"/>
-          <p:cNvSpPr/>
-          <p:nvPr/>
-        </p:nvSpPr>
-        <p:spPr>
-          <a:xfrm>
-            <a:off x="914400" y="2816352"/>
-            <a:ext cx="2651760" cy="365760"/>
+            <a:endParaRPr lang="en-US" sz="1300" dirty="0"/>
+          </a:p>
+        </p:txBody>
+      </p:sp>
+      <p:sp>
+        <p:nvSpPr>
+          <p:cNvPr id="31" name="Text 29"/>
+          <p:cNvSpPr/>
+          <p:nvPr/>
+        </p:nvSpPr>
+        <p:spPr>
+          <a:xfrm>
+            <a:off x="923544" y="4407408"/>
+            <a:ext cx="1099261" cy="365760"/>
           </a:xfrm>
           <a:prstGeom prst="rect">
             <a:avLst/>
@@ -1715,13 +2463,13 @@
           <a:bodyPr wrap="square" lIns="0" tIns="0" rIns="0" bIns="0" rtlCol="0" anchor="ctr"/>
           <a:lstStyle/>
           <a:p>
-            <a:pPr algn="ctr" indent="0" marL="0">
+            <a:pPr indent="0" marL="0">
               <a:buNone/>
             </a:pPr>
             <a:r>
-              <a:rPr lang="en-US" sz="1000" dirty="0">
+              <a:rPr lang="en-US" sz="900" dirty="0">
                 <a:solidFill>
-                  <a:srgbClr val="5C6A80"/>
+                  <a:srgbClr val="FFFFFF"/>
                 </a:solidFill>
                 <a:latin typeface="Calibri" pitchFamily="34" charset="0"/>
                 <a:ea typeface="Calibri" pitchFamily="34" charset="-122"/>
@@ -1729,32 +2477,52 @@
               </a:rPr>
               <a:t>10 · 2 depots</a:t>
             </a:r>
-            <a:endParaRPr lang="en-US" sz="1000" dirty="0"/>
-          </a:p>
-        </p:txBody>
-      </p:sp>
-      <p:sp>
-        <p:nvSpPr>
-          <p:cNvPr id="8" name="Shape 6"/>
-          <p:cNvSpPr/>
-          <p:nvPr/>
-        </p:nvSpPr>
-        <p:spPr>
-          <a:xfrm>
-            <a:off x="914400" y="3520440"/>
-            <a:ext cx="2651760" cy="1005840"/>
+            <a:endParaRPr lang="en-US" sz="900" dirty="0"/>
+          </a:p>
+        </p:txBody>
+      </p:sp>
+      <p:sp>
+        <p:nvSpPr>
+          <p:cNvPr id="32" name="Shape 30"/>
+          <p:cNvSpPr/>
+          <p:nvPr/>
+        </p:nvSpPr>
+        <p:spPr>
+          <a:xfrm>
+            <a:off x="2242261" y="3799332"/>
+            <a:ext cx="310896" cy="219456"/>
+          </a:xfrm>
+          <a:prstGeom prst="rightArrow">
+            <a:avLst/>
+          </a:prstGeom>
+          <a:solidFill>
+            <a:srgbClr val="8B98A6"/>
+          </a:solidFill>
+          <a:ln/>
+        </p:spPr>
+      </p:sp>
+      <p:sp>
+        <p:nvSpPr>
+          <p:cNvPr id="33" name="Shape 31"/>
+          <p:cNvSpPr/>
+          <p:nvPr/>
+        </p:nvSpPr>
+        <p:spPr>
+          <a:xfrm>
+            <a:off x="2626309" y="2926080"/>
+            <a:ext cx="1391869" cy="1965960"/>
           </a:xfrm>
           <a:prstGeom prst="roundRect">
             <a:avLst>
-              <a:gd name="adj" fmla="val 7273"/>
+              <a:gd name="adj" fmla="val 2628"/>
             </a:avLst>
           </a:prstGeom>
           <a:solidFill>
-            <a:srgbClr val="FFFFFF"/>
-          </a:solidFill>
-          <a:ln w="15240">
+            <a:srgbClr val="FF5A1F"/>
+          </a:solidFill>
+          <a:ln w="12700">
             <a:solidFill>
-              <a:srgbClr val="5E80B8"/>
+              <a:srgbClr val="FF5A1F"/>
             </a:solidFill>
             <a:prstDash val="solid"/>
           </a:ln>
@@ -1762,14 +2530,14 @@
       </p:sp>
       <p:sp>
         <p:nvSpPr>
-          <p:cNvPr id="9" name="Text 7"/>
-          <p:cNvSpPr/>
-          <p:nvPr/>
-        </p:nvSpPr>
-        <p:spPr>
-          <a:xfrm>
-            <a:off x="914400" y="3666744"/>
-            <a:ext cx="2651760" cy="365760"/>
+          <p:cNvPr id="34" name="Text 32"/>
+          <p:cNvSpPr/>
+          <p:nvPr/>
+        </p:nvSpPr>
+        <p:spPr>
+          <a:xfrm>
+            <a:off x="2772613" y="3108960"/>
+            <a:ext cx="1099261" cy="320040"/>
           </a:xfrm>
           <a:prstGeom prst="rect">
             <a:avLst/>
@@ -1781,34 +2549,76 @@
           <a:bodyPr wrap="square" lIns="0" tIns="0" rIns="0" bIns="0" rtlCol="0" anchor="ctr"/>
           <a:lstStyle/>
           <a:p>
-            <a:pPr algn="ctr" indent="0" marL="0">
+            <a:pPr indent="0" marL="0">
               <a:buNone/>
             </a:pPr>
             <a:r>
-              <a:rPr lang="en-US" sz="1400" b="1" dirty="0">
+              <a:rPr lang="en-US" sz="1100" dirty="0">
                 <a:solidFill>
-                  <a:srgbClr val="152238"/>
+                  <a:srgbClr val="FFFFFF"/>
                 </a:solidFill>
-                <a:latin typeface="Calibri" pitchFamily="34" charset="0"/>
-                <a:ea typeface="Calibri" pitchFamily="34" charset="-122"/>
-                <a:cs typeface="Calibri" pitchFamily="34" charset="-120"/>
+                <a:latin typeface="Consolas" pitchFamily="34" charset="0"/>
+                <a:ea typeface="Consolas" pitchFamily="34" charset="-122"/>
+                <a:cs typeface="Consolas" pitchFamily="34" charset="-120"/>
+              </a:rPr>
+              <a:t>02</a:t>
+            </a:r>
+            <a:endParaRPr lang="en-US" sz="1100" dirty="0"/>
+          </a:p>
+        </p:txBody>
+      </p:sp>
+      <p:sp>
+        <p:nvSpPr>
+          <p:cNvPr id="35" name="Text 33"/>
+          <p:cNvSpPr/>
+          <p:nvPr/>
+        </p:nvSpPr>
+        <p:spPr>
+          <a:xfrm>
+            <a:off x="2772613" y="3547872"/>
+            <a:ext cx="1099261" cy="868680"/>
+          </a:xfrm>
+          <a:prstGeom prst="rect">
+            <a:avLst/>
+          </a:prstGeom>
+          <a:noFill/>
+          <a:ln/>
+        </p:spPr>
+        <p:txBody>
+          <a:bodyPr wrap="square" lIns="0" tIns="0" rIns="0" bIns="0" rtlCol="0" anchor="t"/>
+          <a:lstStyle/>
+          <a:p>
+            <a:pPr indent="0" marL="0">
+              <a:lnSpc>
+                <a:spcPct val="96000"/>
+              </a:lnSpc>
+              <a:buNone/>
+            </a:pPr>
+            <a:r>
+              <a:rPr lang="en-US" sz="1300" b="1" dirty="0">
+                <a:solidFill>
+                  <a:srgbClr val="FFFFFF"/>
+                </a:solidFill>
+                <a:latin typeface="Century Gothic" pitchFamily="34" charset="0"/>
+                <a:ea typeface="Century Gothic" pitchFamily="34" charset="-122"/>
+                <a:cs typeface="Century Gothic" pitchFamily="34" charset="-120"/>
               </a:rPr>
               <a:t>Fog node</a:t>
             </a:r>
-            <a:endParaRPr lang="en-US" sz="1400" dirty="0"/>
-          </a:p>
-        </p:txBody>
-      </p:sp>
-      <p:sp>
-        <p:nvSpPr>
-          <p:cNvPr id="10" name="Text 8"/>
-          <p:cNvSpPr/>
-          <p:nvPr/>
-        </p:nvSpPr>
-        <p:spPr>
-          <a:xfrm>
-            <a:off x="914400" y="4050792"/>
-            <a:ext cx="2651760" cy="365760"/>
+            <a:endParaRPr lang="en-US" sz="1300" dirty="0"/>
+          </a:p>
+        </p:txBody>
+      </p:sp>
+      <p:sp>
+        <p:nvSpPr>
+          <p:cNvPr id="36" name="Text 34"/>
+          <p:cNvSpPr/>
+          <p:nvPr/>
+        </p:nvSpPr>
+        <p:spPr>
+          <a:xfrm>
+            <a:off x="2772613" y="4407408"/>
+            <a:ext cx="1099261" cy="365760"/>
           </a:xfrm>
           <a:prstGeom prst="rect">
             <a:avLst/>
@@ -1820,13 +2630,13 @@
           <a:bodyPr wrap="square" lIns="0" tIns="0" rIns="0" bIns="0" rtlCol="0" anchor="ctr"/>
           <a:lstStyle/>
           <a:p>
-            <a:pPr algn="ctr" indent="0" marL="0">
+            <a:pPr indent="0" marL="0">
               <a:buNone/>
             </a:pPr>
             <a:r>
-              <a:rPr lang="en-US" sz="1000" dirty="0">
+              <a:rPr lang="en-US" sz="900" dirty="0">
                 <a:solidFill>
-                  <a:srgbClr val="5C6A80"/>
+                  <a:srgbClr val="FFFFFF"/>
                 </a:solidFill>
                 <a:latin typeface="Calibri" pitchFamily="34" charset="0"/>
                 <a:ea typeface="Calibri" pitchFamily="34" charset="-122"/>
@@ -1834,56 +2644,52 @@
               </a:rPr>
               <a:t>buffer · drain · alarm</a:t>
             </a:r>
-            <a:endParaRPr lang="en-US" sz="1000" dirty="0"/>
-          </a:p>
-        </p:txBody>
-      </p:sp>
-      <p:sp>
-        <p:nvSpPr>
-          <p:cNvPr id="11" name="Shape 9"/>
-          <p:cNvSpPr/>
-          <p:nvPr/>
-        </p:nvSpPr>
-        <p:spPr>
-          <a:xfrm>
-            <a:off x="3886200" y="3246120"/>
-            <a:ext cx="502920" cy="0"/>
-          </a:xfrm>
-          <a:prstGeom prst="line">
-            <a:avLst/>
-          </a:prstGeom>
-          <a:noFill/>
-          <a:ln w="31750">
-            <a:solidFill>
-              <a:srgbClr val="1E3A6E"/>
-            </a:solidFill>
-            <a:prstDash val="solid"/>
-            <a:tailEnd type="triangle"/>
-          </a:ln>
-        </p:spPr>
-      </p:sp>
-      <p:sp>
-        <p:nvSpPr>
-          <p:cNvPr id="12" name="Shape 10"/>
-          <p:cNvSpPr/>
-          <p:nvPr/>
-        </p:nvSpPr>
-        <p:spPr>
-          <a:xfrm>
-            <a:off x="4572000" y="1554480"/>
-            <a:ext cx="6949440" cy="3383280"/>
+            <a:endParaRPr lang="en-US" sz="900" dirty="0"/>
+          </a:p>
+        </p:txBody>
+      </p:sp>
+      <p:sp>
+        <p:nvSpPr>
+          <p:cNvPr id="37" name="Shape 35"/>
+          <p:cNvSpPr/>
+          <p:nvPr/>
+        </p:nvSpPr>
+        <p:spPr>
+          <a:xfrm>
+            <a:off x="4091330" y="3799332"/>
+            <a:ext cx="310896" cy="219456"/>
+          </a:xfrm>
+          <a:prstGeom prst="rightArrow">
+            <a:avLst/>
+          </a:prstGeom>
+          <a:solidFill>
+            <a:srgbClr val="8B98A6"/>
+          </a:solidFill>
+          <a:ln/>
+        </p:spPr>
+      </p:sp>
+      <p:sp>
+        <p:nvSpPr>
+          <p:cNvPr id="38" name="Shape 36"/>
+          <p:cNvSpPr/>
+          <p:nvPr/>
+        </p:nvSpPr>
+        <p:spPr>
+          <a:xfrm>
+            <a:off x="4475378" y="2926080"/>
+            <a:ext cx="1391869" cy="1965960"/>
           </a:xfrm>
           <a:prstGeom prst="roundRect">
             <a:avLst>
-              <a:gd name="adj" fmla="val 2703"/>
+              <a:gd name="adj" fmla="val 2628"/>
             </a:avLst>
           </a:prstGeom>
           <a:solidFill>
-            <a:srgbClr val="EEF2F8"/>
-          </a:solidFill>
-          <a:ln w="19050">
+            <a:srgbClr val="13294A"/>
+          </a:solidFill>
+          <a:ln w="12700">
             <a:solidFill>
-              <a:srgbClr val="1E3A6E"/>
+              <a:srgbClr val="273D5E"/>
             </a:solidFill>
             <a:prstDash val="solid"/>
           </a:ln>
@@ -1891,14 +2697,14 @@
       </p:sp>
       <p:sp>
         <p:nvSpPr>
-          <p:cNvPr id="13" name="Text 11"/>
-          <p:cNvSpPr/>
-          <p:nvPr/>
-        </p:nvSpPr>
-        <p:spPr>
-          <a:xfrm>
-            <a:off x="4572000" y="1691640"/>
-            <a:ext cx="6949440" cy="365760"/>
+          <p:cNvPr id="39" name="Text 37"/>
+          <p:cNvSpPr/>
+          <p:nvPr/>
+        </p:nvSpPr>
+        <p:spPr>
+          <a:xfrm>
+            <a:off x="4621682" y="3108960"/>
+            <a:ext cx="1099261" cy="320040"/>
           </a:xfrm>
           <a:prstGeom prst="rect">
             <a:avLst/>
@@ -1907,64 +2713,37 @@
           <a:ln/>
         </p:spPr>
         <p:txBody>
-          <a:bodyPr wrap="square" rtlCol="0" anchor="ctr"/>
+          <a:bodyPr wrap="square" lIns="0" tIns="0" rIns="0" bIns="0" rtlCol="0" anchor="ctr"/>
           <a:lstStyle/>
           <a:p>
-            <a:pPr algn="ctr" indent="0" marL="0">
+            <a:pPr indent="0" marL="0">
               <a:buNone/>
             </a:pPr>
             <a:r>
-              <a:rPr lang="en-US" sz="1200" b="1" spc="200" kern="0" dirty="0">
+              <a:rPr lang="en-US" sz="1100" dirty="0">
                 <a:solidFill>
-                  <a:srgbClr val="1E3A6E"/>
+                  <a:srgbClr val="FF5A1F"/>
                 </a:solidFill>
-                <a:latin typeface="Calibri" pitchFamily="34" charset="0"/>
-                <a:ea typeface="Calibri" pitchFamily="34" charset="-122"/>
-                <a:cs typeface="Calibri" pitchFamily="34" charset="-120"/>
+                <a:latin typeface="Consolas" pitchFamily="34" charset="0"/>
+                <a:ea typeface="Consolas" pitchFamily="34" charset="-122"/>
+                <a:cs typeface="Consolas" pitchFamily="34" charset="-120"/>
               </a:rPr>
-              <a:t>CLOUD (serverless)</a:t>
+              <a:t>03</a:t>
             </a:r>
-            <a:endParaRPr lang="en-US" sz="1200" dirty="0"/>
-          </a:p>
-        </p:txBody>
-      </p:sp>
-      <p:sp>
-        <p:nvSpPr>
-          <p:cNvPr id="14" name="Shape 12"/>
-          <p:cNvSpPr/>
-          <p:nvPr/>
-        </p:nvSpPr>
-        <p:spPr>
-          <a:xfrm>
-            <a:off x="4846320" y="2651760"/>
-            <a:ext cx="1463040" cy="1371600"/>
-          </a:xfrm>
-          <a:prstGeom prst="roundRect">
-            <a:avLst>
-              <a:gd name="adj" fmla="val 5333"/>
-            </a:avLst>
-          </a:prstGeom>
-          <a:solidFill>
-            <a:srgbClr val="FFFFFF"/>
-          </a:solidFill>
-          <a:ln w="15240">
-            <a:solidFill>
-              <a:srgbClr val="1E3A6E"/>
-            </a:solidFill>
-            <a:prstDash val="solid"/>
-          </a:ln>
-        </p:spPr>
-      </p:sp>
-      <p:sp>
-        <p:nvSpPr>
-          <p:cNvPr id="15" name="Text 13"/>
-          <p:cNvSpPr/>
-          <p:nvPr/>
-        </p:nvSpPr>
-        <p:spPr>
-          <a:xfrm>
-            <a:off x="4800600" y="2907792"/>
-            <a:ext cx="1554480" cy="457200"/>
+            <a:endParaRPr lang="en-US" sz="1100" dirty="0"/>
+          </a:p>
+        </p:txBody>
+      </p:sp>
+      <p:sp>
+        <p:nvSpPr>
+          <p:cNvPr id="40" name="Text 38"/>
+          <p:cNvSpPr/>
+          <p:nvPr/>
+        </p:nvSpPr>
+        <p:spPr>
+          <a:xfrm>
+            <a:off x="4621682" y="3547872"/>
+            <a:ext cx="1099261" cy="868680"/>
           </a:xfrm>
           <a:prstGeom prst="rect">
             <a:avLst/>
@@ -1973,37 +2752,40 @@
           <a:ln/>
         </p:spPr>
         <p:txBody>
-          <a:bodyPr wrap="square" lIns="0" tIns="0" rIns="0" bIns="0" rtlCol="0" anchor="ctr"/>
+          <a:bodyPr wrap="square" lIns="0" tIns="0" rIns="0" bIns="0" rtlCol="0" anchor="t"/>
           <a:lstStyle/>
           <a:p>
-            <a:pPr algn="ctr" indent="0" marL="0">
+            <a:pPr indent="0" marL="0">
+              <a:lnSpc>
+                <a:spcPct val="96000"/>
+              </a:lnSpc>
               <a:buNone/>
             </a:pPr>
             <a:r>
-              <a:rPr lang="en-US" sz="1250" b="1" dirty="0">
+              <a:rPr lang="en-US" sz="1300" b="1" dirty="0">
                 <a:solidFill>
-                  <a:srgbClr val="152238"/>
+                  <a:srgbClr val="EEF3FA"/>
                 </a:solidFill>
-                <a:latin typeface="Calibri" pitchFamily="34" charset="0"/>
-                <a:ea typeface="Calibri" pitchFamily="34" charset="-122"/>
-                <a:cs typeface="Calibri" pitchFamily="34" charset="-120"/>
+                <a:latin typeface="Century Gothic" pitchFamily="34" charset="0"/>
+                <a:ea typeface="Century Gothic" pitchFamily="34" charset="-122"/>
+                <a:cs typeface="Century Gothic" pitchFamily="34" charset="-120"/>
               </a:rPr>
               <a:t>Amazon SQS</a:t>
             </a:r>
-            <a:endParaRPr lang="en-US" sz="1250" dirty="0"/>
-          </a:p>
-        </p:txBody>
-      </p:sp>
-      <p:sp>
-        <p:nvSpPr>
-          <p:cNvPr id="16" name="Text 14"/>
-          <p:cNvSpPr/>
-          <p:nvPr/>
-        </p:nvSpPr>
-        <p:spPr>
-          <a:xfrm>
-            <a:off x="4828032" y="3401568"/>
-            <a:ext cx="1499616" cy="457200"/>
+            <a:endParaRPr lang="en-US" sz="1300" dirty="0"/>
+          </a:p>
+        </p:txBody>
+      </p:sp>
+      <p:sp>
+        <p:nvSpPr>
+          <p:cNvPr id="41" name="Text 39"/>
+          <p:cNvSpPr/>
+          <p:nvPr/>
+        </p:nvSpPr>
+        <p:spPr>
+          <a:xfrm>
+            <a:off x="4621682" y="4407408"/>
+            <a:ext cx="1099261" cy="365760"/>
           </a:xfrm>
           <a:prstGeom prst="rect">
             <a:avLst/>
@@ -2015,13 +2797,13 @@
           <a:bodyPr wrap="square" lIns="0" tIns="0" rIns="0" bIns="0" rtlCol="0" anchor="ctr"/>
           <a:lstStyle/>
           <a:p>
-            <a:pPr algn="ctr" indent="0" marL="0">
+            <a:pPr indent="0" marL="0">
               <a:buNone/>
             </a:pPr>
             <a:r>
               <a:rPr lang="en-US" sz="900" dirty="0">
                 <a:solidFill>
-                  <a:srgbClr val="5C6A80"/>
+                  <a:srgbClr val="8B98A6"/>
                 </a:solidFill>
                 <a:latin typeface="Calibri" pitchFamily="34" charset="0"/>
                 <a:ea typeface="Calibri" pitchFamily="34" charset="-122"/>
@@ -2035,50 +2817,46 @@
       </p:sp>
       <p:sp>
         <p:nvSpPr>
-          <p:cNvPr id="17" name="Shape 15"/>
-          <p:cNvSpPr/>
-          <p:nvPr/>
-        </p:nvSpPr>
-        <p:spPr>
-          <a:xfrm>
-            <a:off x="6318504" y="3337560"/>
-            <a:ext cx="164592" cy="0"/>
-          </a:xfrm>
-          <a:prstGeom prst="line">
-            <a:avLst/>
-          </a:prstGeom>
-          <a:noFill/>
-          <a:ln w="20320">
-            <a:solidFill>
-              <a:srgbClr val="5E80B8"/>
-            </a:solidFill>
-            <a:prstDash val="solid"/>
-            <a:tailEnd type="triangle"/>
-          </a:ln>
-        </p:spPr>
-      </p:sp>
-      <p:sp>
-        <p:nvSpPr>
-          <p:cNvPr id="18" name="Shape 16"/>
-          <p:cNvSpPr/>
-          <p:nvPr/>
-        </p:nvSpPr>
-        <p:spPr>
-          <a:xfrm>
-            <a:off x="6492240" y="2651760"/>
-            <a:ext cx="1463040" cy="1371600"/>
+          <p:cNvPr id="42" name="Shape 40"/>
+          <p:cNvSpPr/>
+          <p:nvPr/>
+        </p:nvSpPr>
+        <p:spPr>
+          <a:xfrm>
+            <a:off x="5940400" y="3799332"/>
+            <a:ext cx="310896" cy="219456"/>
+          </a:xfrm>
+          <a:prstGeom prst="rightArrow">
+            <a:avLst/>
+          </a:prstGeom>
+          <a:solidFill>
+            <a:srgbClr val="8B98A6"/>
+          </a:solidFill>
+          <a:ln/>
+        </p:spPr>
+      </p:sp>
+      <p:sp>
+        <p:nvSpPr>
+          <p:cNvPr id="43" name="Shape 41"/>
+          <p:cNvSpPr/>
+          <p:nvPr/>
+        </p:nvSpPr>
+        <p:spPr>
+          <a:xfrm>
+            <a:off x="6324448" y="2926080"/>
+            <a:ext cx="1391869" cy="1965960"/>
           </a:xfrm>
           <a:prstGeom prst="roundRect">
             <a:avLst>
-              <a:gd name="adj" fmla="val 5333"/>
+              <a:gd name="adj" fmla="val 2628"/>
             </a:avLst>
           </a:prstGeom>
           <a:solidFill>
-            <a:srgbClr val="FFFFFF"/>
-          </a:solidFill>
-          <a:ln w="15240">
+            <a:srgbClr val="13294A"/>
+          </a:solidFill>
+          <a:ln w="12700">
             <a:solidFill>
-              <a:srgbClr val="1E3A6E"/>
+              <a:srgbClr val="273D5E"/>
             </a:solidFill>
             <a:prstDash val="solid"/>
           </a:ln>
@@ -2086,14 +2864,14 @@
       </p:sp>
       <p:sp>
         <p:nvSpPr>
-          <p:cNvPr id="19" name="Text 17"/>
-          <p:cNvSpPr/>
-          <p:nvPr/>
-        </p:nvSpPr>
-        <p:spPr>
-          <a:xfrm>
-            <a:off x="6446520" y="2907792"/>
-            <a:ext cx="1554480" cy="457200"/>
+          <p:cNvPr id="44" name="Text 42"/>
+          <p:cNvSpPr/>
+          <p:nvPr/>
+        </p:nvSpPr>
+        <p:spPr>
+          <a:xfrm>
+            <a:off x="6470752" y="3108960"/>
+            <a:ext cx="1099261" cy="320040"/>
           </a:xfrm>
           <a:prstGeom prst="rect">
             <a:avLst/>
@@ -2105,34 +2883,76 @@
           <a:bodyPr wrap="square" lIns="0" tIns="0" rIns="0" bIns="0" rtlCol="0" anchor="ctr"/>
           <a:lstStyle/>
           <a:p>
-            <a:pPr algn="ctr" indent="0" marL="0">
+            <a:pPr indent="0" marL="0">
               <a:buNone/>
             </a:pPr>
             <a:r>
-              <a:rPr lang="en-US" sz="1250" b="1" dirty="0">
+              <a:rPr lang="en-US" sz="1100" dirty="0">
                 <a:solidFill>
-                  <a:srgbClr val="152238"/>
+                  <a:srgbClr val="FF5A1F"/>
                 </a:solidFill>
-                <a:latin typeface="Calibri" pitchFamily="34" charset="0"/>
-                <a:ea typeface="Calibri" pitchFamily="34" charset="-122"/>
-                <a:cs typeface="Calibri" pitchFamily="34" charset="-120"/>
+                <a:latin typeface="Consolas" pitchFamily="34" charset="0"/>
+                <a:ea typeface="Consolas" pitchFamily="34" charset="-122"/>
+                <a:cs typeface="Consolas" pitchFamily="34" charset="-120"/>
+              </a:rPr>
+              <a:t>04</a:t>
+            </a:r>
+            <a:endParaRPr lang="en-US" sz="1100" dirty="0"/>
+          </a:p>
+        </p:txBody>
+      </p:sp>
+      <p:sp>
+        <p:nvSpPr>
+          <p:cNvPr id="45" name="Text 43"/>
+          <p:cNvSpPr/>
+          <p:nvPr/>
+        </p:nvSpPr>
+        <p:spPr>
+          <a:xfrm>
+            <a:off x="6470752" y="3547872"/>
+            <a:ext cx="1099261" cy="868680"/>
+          </a:xfrm>
+          <a:prstGeom prst="rect">
+            <a:avLst/>
+          </a:prstGeom>
+          <a:noFill/>
+          <a:ln/>
+        </p:spPr>
+        <p:txBody>
+          <a:bodyPr wrap="square" lIns="0" tIns="0" rIns="0" bIns="0" rtlCol="0" anchor="t"/>
+          <a:lstStyle/>
+          <a:p>
+            <a:pPr indent="0" marL="0">
+              <a:lnSpc>
+                <a:spcPct val="96000"/>
+              </a:lnSpc>
+              <a:buNone/>
+            </a:pPr>
+            <a:r>
+              <a:rPr lang="en-US" sz="1300" b="1" dirty="0">
+                <a:solidFill>
+                  <a:srgbClr val="EEF3FA"/>
+                </a:solidFill>
+                <a:latin typeface="Century Gothic" pitchFamily="34" charset="0"/>
+                <a:ea typeface="Century Gothic" pitchFamily="34" charset="-122"/>
+                <a:cs typeface="Century Gothic" pitchFamily="34" charset="-120"/>
               </a:rPr>
               <a:t>AWS Lambda</a:t>
             </a:r>
-            <a:endParaRPr lang="en-US" sz="1250" dirty="0"/>
-          </a:p>
-        </p:txBody>
-      </p:sp>
-      <p:sp>
-        <p:nvSpPr>
-          <p:cNvPr id="20" name="Text 18"/>
-          <p:cNvSpPr/>
-          <p:nvPr/>
-        </p:nvSpPr>
-        <p:spPr>
-          <a:xfrm>
-            <a:off x="6473952" y="3401568"/>
-            <a:ext cx="1499616" cy="457200"/>
+            <a:endParaRPr lang="en-US" sz="1300" dirty="0"/>
+          </a:p>
+        </p:txBody>
+      </p:sp>
+      <p:sp>
+        <p:nvSpPr>
+          <p:cNvPr id="46" name="Text 44"/>
+          <p:cNvSpPr/>
+          <p:nvPr/>
+        </p:nvSpPr>
+        <p:spPr>
+          <a:xfrm>
+            <a:off x="6470752" y="4407408"/>
+            <a:ext cx="1099261" cy="365760"/>
           </a:xfrm>
           <a:prstGeom prst="rect">
             <a:avLst/>
@@ -2144,13 +2964,13 @@
           <a:bodyPr wrap="square" lIns="0" tIns="0" rIns="0" bIns="0" rtlCol="0" anchor="ctr"/>
           <a:lstStyle/>
           <a:p>
-            <a:pPr algn="ctr" indent="0" marL="0">
+            <a:pPr indent="0" marL="0">
               <a:buNone/>
             </a:pPr>
             <a:r>
               <a:rPr lang="en-US" sz="900" dirty="0">
                 <a:solidFill>
-                  <a:srgbClr val="5C6A80"/>
+                  <a:srgbClr val="8B98A6"/>
                 </a:solidFill>
                 <a:latin typeface="Calibri" pitchFamily="34" charset="0"/>
                 <a:ea typeface="Calibri" pitchFamily="34" charset="-122"/>
@@ -2164,50 +2984,46 @@
       </p:sp>
       <p:sp>
         <p:nvSpPr>
-          <p:cNvPr id="21" name="Shape 19"/>
-          <p:cNvSpPr/>
-          <p:nvPr/>
-        </p:nvSpPr>
-        <p:spPr>
-          <a:xfrm>
-            <a:off x="7964424" y="3337560"/>
-            <a:ext cx="164592" cy="0"/>
-          </a:xfrm>
-          <a:prstGeom prst="line">
-            <a:avLst/>
-          </a:prstGeom>
-          <a:noFill/>
-          <a:ln w="20320">
-            <a:solidFill>
-              <a:srgbClr val="5E80B8"/>
-            </a:solidFill>
-            <a:prstDash val="solid"/>
-            <a:tailEnd type="triangle"/>
-          </a:ln>
-        </p:spPr>
-      </p:sp>
-      <p:sp>
-        <p:nvSpPr>
-          <p:cNvPr id="22" name="Shape 20"/>
-          <p:cNvSpPr/>
-          <p:nvPr/>
-        </p:nvSpPr>
-        <p:spPr>
-          <a:xfrm>
-            <a:off x="8138160" y="2651760"/>
-            <a:ext cx="1463040" cy="1371600"/>
+          <p:cNvPr id="47" name="Shape 45"/>
+          <p:cNvSpPr/>
+          <p:nvPr/>
+        </p:nvSpPr>
+        <p:spPr>
+          <a:xfrm>
+            <a:off x="7789469" y="3799332"/>
+            <a:ext cx="310896" cy="219456"/>
+          </a:xfrm>
+          <a:prstGeom prst="rightArrow">
+            <a:avLst/>
+          </a:prstGeom>
+          <a:solidFill>
+            <a:srgbClr val="8B98A6"/>
+          </a:solidFill>
+          <a:ln/>
+        </p:spPr>
+      </p:sp>
+      <p:sp>
+        <p:nvSpPr>
+          <p:cNvPr id="48" name="Shape 46"/>
+          <p:cNvSpPr/>
+          <p:nvPr/>
+        </p:nvSpPr>
+        <p:spPr>
+          <a:xfrm>
+            <a:off x="8173517" y="2926080"/>
+            <a:ext cx="1391869" cy="1965960"/>
           </a:xfrm>
           <a:prstGeom prst="roundRect">
             <a:avLst>
-              <a:gd name="adj" fmla="val 5333"/>
+              <a:gd name="adj" fmla="val 2628"/>
             </a:avLst>
           </a:prstGeom>
           <a:solidFill>
-            <a:srgbClr val="FFFFFF"/>
-          </a:solidFill>
-          <a:ln w="15240">
+            <a:srgbClr val="13294A"/>
+          </a:solidFill>
+          <a:ln w="12700">
             <a:solidFill>
-              <a:srgbClr val="1E3A6E"/>
+              <a:srgbClr val="273D5E"/>
             </a:solidFill>
             <a:prstDash val="solid"/>
           </a:ln>
@@ -2215,14 +3031,14 @@
       </p:sp>
       <p:sp>
         <p:nvSpPr>
-          <p:cNvPr id="23" name="Text 21"/>
-          <p:cNvSpPr/>
-          <p:nvPr/>
-        </p:nvSpPr>
-        <p:spPr>
-          <a:xfrm>
-            <a:off x="8092440" y="2907792"/>
-            <a:ext cx="1554480" cy="457200"/>
+          <p:cNvPr id="49" name="Text 47"/>
+          <p:cNvSpPr/>
+          <p:nvPr/>
+        </p:nvSpPr>
+        <p:spPr>
+          <a:xfrm>
+            <a:off x="8319821" y="3108960"/>
+            <a:ext cx="1099261" cy="320040"/>
           </a:xfrm>
           <a:prstGeom prst="rect">
             <a:avLst/>
@@ -2234,34 +3050,76 @@
           <a:bodyPr wrap="square" lIns="0" tIns="0" rIns="0" bIns="0" rtlCol="0" anchor="ctr"/>
           <a:lstStyle/>
           <a:p>
-            <a:pPr algn="ctr" indent="0" marL="0">
+            <a:pPr indent="0" marL="0">
               <a:buNone/>
             </a:pPr>
             <a:r>
-              <a:rPr lang="en-US" sz="1250" b="1" dirty="0">
+              <a:rPr lang="en-US" sz="1100" dirty="0">
                 <a:solidFill>
-                  <a:srgbClr val="152238"/>
+                  <a:srgbClr val="FF5A1F"/>
                 </a:solidFill>
-                <a:latin typeface="Calibri" pitchFamily="34" charset="0"/>
-                <a:ea typeface="Calibri" pitchFamily="34" charset="-122"/>
-                <a:cs typeface="Calibri" pitchFamily="34" charset="-120"/>
+                <a:latin typeface="Consolas" pitchFamily="34" charset="0"/>
+                <a:ea typeface="Consolas" pitchFamily="34" charset="-122"/>
+                <a:cs typeface="Consolas" pitchFamily="34" charset="-120"/>
+              </a:rPr>
+              <a:t>05</a:t>
+            </a:r>
+            <a:endParaRPr lang="en-US" sz="1100" dirty="0"/>
+          </a:p>
+        </p:txBody>
+      </p:sp>
+      <p:sp>
+        <p:nvSpPr>
+          <p:cNvPr id="50" name="Text 48"/>
+          <p:cNvSpPr/>
+          <p:nvPr/>
+        </p:nvSpPr>
+        <p:spPr>
+          <a:xfrm>
+            <a:off x="8319821" y="3547872"/>
+            <a:ext cx="1099261" cy="868680"/>
+          </a:xfrm>
+          <a:prstGeom prst="rect">
+            <a:avLst/>
+          </a:prstGeom>
+          <a:noFill/>
+          <a:ln/>
+        </p:spPr>
+        <p:txBody>
+          <a:bodyPr wrap="square" lIns="0" tIns="0" rIns="0" bIns="0" rtlCol="0" anchor="t"/>
+          <a:lstStyle/>
+          <a:p>
+            <a:pPr indent="0" marL="0">
+              <a:lnSpc>
+                <a:spcPct val="96000"/>
+              </a:lnSpc>
+              <a:buNone/>
+            </a:pPr>
+            <a:r>
+              <a:rPr lang="en-US" sz="1300" b="1" dirty="0">
+                <a:solidFill>
+                  <a:srgbClr val="EEF3FA"/>
+                </a:solidFill>
+                <a:latin typeface="Century Gothic" pitchFamily="34" charset="0"/>
+                <a:ea typeface="Century Gothic" pitchFamily="34" charset="-122"/>
+                <a:cs typeface="Century Gothic" pitchFamily="34" charset="-120"/>
               </a:rPr>
               <a:t>DynamoDB</a:t>
             </a:r>
-            <a:endParaRPr lang="en-US" sz="1250" dirty="0"/>
-          </a:p>
-        </p:txBody>
-      </p:sp>
-      <p:sp>
-        <p:nvSpPr>
-          <p:cNvPr id="24" name="Text 22"/>
-          <p:cNvSpPr/>
-          <p:nvPr/>
-        </p:nvSpPr>
-        <p:spPr>
-          <a:xfrm>
-            <a:off x="8119872" y="3401568"/>
-            <a:ext cx="1499616" cy="457200"/>
+            <a:endParaRPr lang="en-US" sz="1300" dirty="0"/>
+          </a:p>
+        </p:txBody>
+      </p:sp>
+      <p:sp>
+        <p:nvSpPr>
+          <p:cNvPr id="51" name="Text 49"/>
+          <p:cNvSpPr/>
+          <p:nvPr/>
+        </p:nvSpPr>
+        <p:spPr>
+          <a:xfrm>
+            <a:off x="8319821" y="4407408"/>
+            <a:ext cx="1099261" cy="365760"/>
           </a:xfrm>
           <a:prstGeom prst="rect">
             <a:avLst/>
@@ -2273,13 +3131,13 @@
           <a:bodyPr wrap="square" lIns="0" tIns="0" rIns="0" bIns="0" rtlCol="0" anchor="ctr"/>
           <a:lstStyle/>
           <a:p>
-            <a:pPr algn="ctr" indent="0" marL="0">
+            <a:pPr indent="0" marL="0">
               <a:buNone/>
             </a:pPr>
             <a:r>
               <a:rPr lang="en-US" sz="900" dirty="0">
                 <a:solidFill>
-                  <a:srgbClr val="5C6A80"/>
+                  <a:srgbClr val="8B98A6"/>
                 </a:solidFill>
                 <a:latin typeface="Calibri" pitchFamily="34" charset="0"/>
                 <a:ea typeface="Calibri" pitchFamily="34" charset="-122"/>
@@ -2293,50 +3151,46 @@
       </p:sp>
       <p:sp>
         <p:nvSpPr>
-          <p:cNvPr id="25" name="Shape 23"/>
-          <p:cNvSpPr/>
-          <p:nvPr/>
-        </p:nvSpPr>
-        <p:spPr>
-          <a:xfrm>
-            <a:off x="9610344" y="3337560"/>
-            <a:ext cx="164592" cy="0"/>
-          </a:xfrm>
-          <a:prstGeom prst="line">
-            <a:avLst/>
-          </a:prstGeom>
-          <a:noFill/>
-          <a:ln w="20320">
-            <a:solidFill>
-              <a:srgbClr val="5E80B8"/>
-            </a:solidFill>
-            <a:prstDash val="solid"/>
-            <a:tailEnd type="triangle"/>
-          </a:ln>
-        </p:spPr>
-      </p:sp>
-      <p:sp>
-        <p:nvSpPr>
-          <p:cNvPr id="26" name="Shape 24"/>
-          <p:cNvSpPr/>
-          <p:nvPr/>
-        </p:nvSpPr>
-        <p:spPr>
-          <a:xfrm>
-            <a:off x="9784080" y="2651760"/>
-            <a:ext cx="1463040" cy="1371600"/>
+          <p:cNvPr id="52" name="Shape 50"/>
+          <p:cNvSpPr/>
+          <p:nvPr/>
+        </p:nvSpPr>
+        <p:spPr>
+          <a:xfrm>
+            <a:off x="9638538" y="3799332"/>
+            <a:ext cx="310896" cy="219456"/>
+          </a:xfrm>
+          <a:prstGeom prst="rightArrow">
+            <a:avLst/>
+          </a:prstGeom>
+          <a:solidFill>
+            <a:srgbClr val="8B98A6"/>
+          </a:solidFill>
+          <a:ln/>
+        </p:spPr>
+      </p:sp>
+      <p:sp>
+        <p:nvSpPr>
+          <p:cNvPr id="53" name="Shape 51"/>
+          <p:cNvSpPr/>
+          <p:nvPr/>
+        </p:nvSpPr>
+        <p:spPr>
+          <a:xfrm>
+            <a:off x="10022586" y="2926080"/>
+            <a:ext cx="1391869" cy="1965960"/>
           </a:xfrm>
           <a:prstGeom prst="roundRect">
             <a:avLst>
-              <a:gd name="adj" fmla="val 5333"/>
+              <a:gd name="adj" fmla="val 2628"/>
             </a:avLst>
           </a:prstGeom>
           <a:solidFill>
-            <a:srgbClr val="FFFFFF"/>
-          </a:solidFill>
-          <a:ln w="15240">
+            <a:srgbClr val="13294A"/>
+          </a:solidFill>
+          <a:ln w="12700">
             <a:solidFill>
-              <a:srgbClr val="2E5AA0"/>
+              <a:srgbClr val="273D5E"/>
             </a:solidFill>
             <a:prstDash val="solid"/>
           </a:ln>
@@ -2344,14 +3198,14 @@
       </p:sp>
       <p:sp>
         <p:nvSpPr>
-          <p:cNvPr id="27" name="Text 25"/>
-          <p:cNvSpPr/>
-          <p:nvPr/>
-        </p:nvSpPr>
-        <p:spPr>
-          <a:xfrm>
-            <a:off x="9738360" y="2907792"/>
-            <a:ext cx="1554480" cy="457200"/>
+          <p:cNvPr id="54" name="Text 52"/>
+          <p:cNvSpPr/>
+          <p:nvPr/>
+        </p:nvSpPr>
+        <p:spPr>
+          <a:xfrm>
+            <a:off x="10168890" y="3108960"/>
+            <a:ext cx="1099261" cy="320040"/>
           </a:xfrm>
           <a:prstGeom prst="rect">
             <a:avLst/>
@@ -2363,34 +3217,76 @@
           <a:bodyPr wrap="square" lIns="0" tIns="0" rIns="0" bIns="0" rtlCol="0" anchor="ctr"/>
           <a:lstStyle/>
           <a:p>
-            <a:pPr algn="ctr" indent="0" marL="0">
+            <a:pPr indent="0" marL="0">
               <a:buNone/>
             </a:pPr>
             <a:r>
-              <a:rPr lang="en-US" sz="1250" b="1" dirty="0">
+              <a:rPr lang="en-US" sz="1100" dirty="0">
                 <a:solidFill>
-                  <a:srgbClr val="152238"/>
+                  <a:srgbClr val="FF5A1F"/>
                 </a:solidFill>
-                <a:latin typeface="Calibri" pitchFamily="34" charset="0"/>
-                <a:ea typeface="Calibri" pitchFamily="34" charset="-122"/>
-                <a:cs typeface="Calibri" pitchFamily="34" charset="-120"/>
+                <a:latin typeface="Consolas" pitchFamily="34" charset="0"/>
+                <a:ea typeface="Consolas" pitchFamily="34" charset="-122"/>
+                <a:cs typeface="Consolas" pitchFamily="34" charset="-120"/>
+              </a:rPr>
+              <a:t>06</a:t>
+            </a:r>
+            <a:endParaRPr lang="en-US" sz="1100" dirty="0"/>
+          </a:p>
+        </p:txBody>
+      </p:sp>
+      <p:sp>
+        <p:nvSpPr>
+          <p:cNvPr id="55" name="Text 53"/>
+          <p:cNvSpPr/>
+          <p:nvPr/>
+        </p:nvSpPr>
+        <p:spPr>
+          <a:xfrm>
+            <a:off x="10168890" y="3547872"/>
+            <a:ext cx="1099261" cy="868680"/>
+          </a:xfrm>
+          <a:prstGeom prst="rect">
+            <a:avLst/>
+          </a:prstGeom>
+          <a:noFill/>
+          <a:ln/>
+        </p:spPr>
+        <p:txBody>
+          <a:bodyPr wrap="square" lIns="0" tIns="0" rIns="0" bIns="0" rtlCol="0" anchor="t"/>
+          <a:lstStyle/>
+          <a:p>
+            <a:pPr indent="0" marL="0">
+              <a:lnSpc>
+                <a:spcPct val="96000"/>
+              </a:lnSpc>
+              <a:buNone/>
+            </a:pPr>
+            <a:r>
+              <a:rPr lang="en-US" sz="1300" b="1" dirty="0">
+                <a:solidFill>
+                  <a:srgbClr val="EEF3FA"/>
+                </a:solidFill>
+                <a:latin typeface="Century Gothic" pitchFamily="34" charset="0"/>
+                <a:ea typeface="Century Gothic" pitchFamily="34" charset="-122"/>
+                <a:cs typeface="Century Gothic" pitchFamily="34" charset="-120"/>
               </a:rPr>
               <a:t>API GW + S3</a:t>
             </a:r>
-            <a:endParaRPr lang="en-US" sz="1250" dirty="0"/>
-          </a:p>
-        </p:txBody>
-      </p:sp>
-      <p:sp>
-        <p:nvSpPr>
-          <p:cNvPr id="28" name="Text 26"/>
-          <p:cNvSpPr/>
-          <p:nvPr/>
-        </p:nvSpPr>
-        <p:spPr>
-          <a:xfrm>
-            <a:off x="9765792" y="3401568"/>
-            <a:ext cx="1499616" cy="457200"/>
+            <a:endParaRPr lang="en-US" sz="1300" dirty="0"/>
+          </a:p>
+        </p:txBody>
+      </p:sp>
+      <p:sp>
+        <p:nvSpPr>
+          <p:cNvPr id="56" name="Text 54"/>
+          <p:cNvSpPr/>
+          <p:nvPr/>
+        </p:nvSpPr>
+        <p:spPr>
+          <a:xfrm>
+            <a:off x="10168890" y="4407408"/>
+            <a:ext cx="1099261" cy="365760"/>
           </a:xfrm>
           <a:prstGeom prst="rect">
             <a:avLst/>
@@ -2402,13 +3298,13 @@
           <a:bodyPr wrap="square" lIns="0" tIns="0" rIns="0" bIns="0" rtlCol="0" anchor="ctr"/>
           <a:lstStyle/>
           <a:p>
-            <a:pPr algn="ctr" indent="0" marL="0">
+            <a:pPr indent="0" marL="0">
               <a:buNone/>
             </a:pPr>
             <a:r>
               <a:rPr lang="en-US" sz="900" dirty="0">
                 <a:solidFill>
-                  <a:srgbClr val="5C6A80"/>
+                  <a:srgbClr val="8B98A6"/>
                 </a:solidFill>
                 <a:latin typeface="Calibri" pitchFamily="34" charset="0"/>
                 <a:ea typeface="Calibri" pitchFamily="34" charset="-122"/>
@@ -2417,45 +3313,6 @@
               <a:t>fleet dashboard</a:t>
             </a:r>
             <a:endParaRPr lang="en-US" sz="900" dirty="0"/>
-          </a:p>
-        </p:txBody>
-      </p:sp>
-      <p:sp>
-        <p:nvSpPr>
-          <p:cNvPr id="29" name="Text 27"/>
-          <p:cNvSpPr/>
-          <p:nvPr/>
-        </p:nvSpPr>
-        <p:spPr>
-          <a:xfrm>
-            <a:off x="640080" y="5257800"/>
-            <a:ext cx="10972800" cy="731520"/>
-          </a:xfrm>
-          <a:prstGeom prst="rect">
-            <a:avLst/>
-          </a:prstGeom>
-          <a:noFill/>
-          <a:ln/>
-        </p:spPr>
-        <p:txBody>
-          <a:bodyPr wrap="square" rtlCol="0" anchor="ctr"/>
-          <a:lstStyle/>
-          <a:p>
-            <a:pPr algn="ctr" indent="0" marL="0">
-              <a:buNone/>
-            </a:pPr>
-            <a:r>
-              <a:rPr lang="en-US" sz="1500" i="1" dirty="0">
-                <a:solidFill>
-                  <a:srgbClr val="1E3A6E"/>
-                </a:solidFill>
-                <a:latin typeface="Calibri" pitchFamily="34" charset="0"/>
-                <a:ea typeface="Calibri" pitchFamily="34" charset="-122"/>
-                <a:cs typeface="Calibri" pitchFamily="34" charset="-120"/>
-              </a:rPr>
-              <a:t>Each arriving reading is a single lock-free enqueue; all grouping is deferred to one thread that drains the whole queue once per window.</a:t>
-            </a:r>
-            <a:endParaRPr lang="en-US" sz="1500" dirty="0"/>
           </a:p>
         </p:txBody>
       </p:sp>
@@ -2473,7 +3330,7 @@
     <p:bg>
       <p:bgPr>
         <a:solidFill>
-          <a:srgbClr val="FFFFFF"/>
+          <a:srgbClr val="0A1930"/>
         </a:solidFill>
       </p:bgPr>
     </p:bg>
@@ -2493,14 +3350,474 @@
       </p:grpSpPr>
       <p:sp>
         <p:nvSpPr>
-          <p:cNvPr id="2" name="Text 0"/>
-          <p:cNvSpPr/>
-          <p:nvPr/>
-        </p:nvSpPr>
-        <p:spPr>
-          <a:xfrm>
-            <a:off x="640080" y="457200"/>
-            <a:ext cx="7315200" cy="640080"/>
+          <p:cNvPr id="2" name="Shape 0"/>
+          <p:cNvSpPr/>
+          <p:nvPr/>
+        </p:nvSpPr>
+        <p:spPr>
+          <a:xfrm>
+            <a:off x="0" y="6199632"/>
+            <a:ext cx="12191695" cy="658368"/>
+          </a:xfrm>
+          <a:prstGeom prst="rect">
+            <a:avLst/>
+          </a:prstGeom>
+          <a:solidFill>
+            <a:srgbClr val="18273E"/>
+          </a:solidFill>
+          <a:ln/>
+        </p:spPr>
+      </p:sp>
+      <p:sp>
+        <p:nvSpPr>
+          <p:cNvPr id="3" name="Shape 1"/>
+          <p:cNvSpPr/>
+          <p:nvPr/>
+        </p:nvSpPr>
+        <p:spPr>
+          <a:xfrm>
+            <a:off x="457200" y="6400800"/>
+            <a:ext cx="256032" cy="256032"/>
+          </a:xfrm>
+          <a:prstGeom prst="rect">
+            <a:avLst/>
+          </a:prstGeom>
+          <a:solidFill>
+            <a:srgbClr val="FF5A1F"/>
+          </a:solidFill>
+          <a:ln/>
+        </p:spPr>
+      </p:sp>
+      <p:sp>
+        <p:nvSpPr>
+          <p:cNvPr id="4" name="Shape 2"/>
+          <p:cNvSpPr/>
+          <p:nvPr/>
+        </p:nvSpPr>
+        <p:spPr>
+          <a:xfrm>
+            <a:off x="987552" y="6400800"/>
+            <a:ext cx="256032" cy="256032"/>
+          </a:xfrm>
+          <a:prstGeom prst="rect">
+            <a:avLst/>
+          </a:prstGeom>
+          <a:solidFill>
+            <a:srgbClr val="D73200"/>
+          </a:solidFill>
+          <a:ln/>
+        </p:spPr>
+      </p:sp>
+      <p:sp>
+        <p:nvSpPr>
+          <p:cNvPr id="5" name="Shape 3"/>
+          <p:cNvSpPr/>
+          <p:nvPr/>
+        </p:nvSpPr>
+        <p:spPr>
+          <a:xfrm>
+            <a:off x="1517904" y="6400800"/>
+            <a:ext cx="256032" cy="256032"/>
+          </a:xfrm>
+          <a:prstGeom prst="rect">
+            <a:avLst/>
+          </a:prstGeom>
+          <a:solidFill>
+            <a:srgbClr val="D73200"/>
+          </a:solidFill>
+          <a:ln/>
+        </p:spPr>
+      </p:sp>
+      <p:sp>
+        <p:nvSpPr>
+          <p:cNvPr id="6" name="Shape 4"/>
+          <p:cNvSpPr/>
+          <p:nvPr/>
+        </p:nvSpPr>
+        <p:spPr>
+          <a:xfrm>
+            <a:off x="2048256" y="6400800"/>
+            <a:ext cx="256032" cy="256032"/>
+          </a:xfrm>
+          <a:prstGeom prst="rect">
+            <a:avLst/>
+          </a:prstGeom>
+          <a:solidFill>
+            <a:srgbClr val="FF5A1F"/>
+          </a:solidFill>
+          <a:ln/>
+        </p:spPr>
+      </p:sp>
+      <p:sp>
+        <p:nvSpPr>
+          <p:cNvPr id="7" name="Shape 5"/>
+          <p:cNvSpPr/>
+          <p:nvPr/>
+        </p:nvSpPr>
+        <p:spPr>
+          <a:xfrm>
+            <a:off x="2578608" y="6400800"/>
+            <a:ext cx="256032" cy="256032"/>
+          </a:xfrm>
+          <a:prstGeom prst="rect">
+            <a:avLst/>
+          </a:prstGeom>
+          <a:solidFill>
+            <a:srgbClr val="D73200"/>
+          </a:solidFill>
+          <a:ln/>
+        </p:spPr>
+      </p:sp>
+      <p:sp>
+        <p:nvSpPr>
+          <p:cNvPr id="8" name="Shape 6"/>
+          <p:cNvSpPr/>
+          <p:nvPr/>
+        </p:nvSpPr>
+        <p:spPr>
+          <a:xfrm>
+            <a:off x="3108960" y="6400800"/>
+            <a:ext cx="256032" cy="256032"/>
+          </a:xfrm>
+          <a:prstGeom prst="rect">
+            <a:avLst/>
+          </a:prstGeom>
+          <a:solidFill>
+            <a:srgbClr val="D73200"/>
+          </a:solidFill>
+          <a:ln/>
+        </p:spPr>
+      </p:sp>
+      <p:sp>
+        <p:nvSpPr>
+          <p:cNvPr id="9" name="Shape 7"/>
+          <p:cNvSpPr/>
+          <p:nvPr/>
+        </p:nvSpPr>
+        <p:spPr>
+          <a:xfrm>
+            <a:off x="3639312" y="6400800"/>
+            <a:ext cx="256032" cy="256032"/>
+          </a:xfrm>
+          <a:prstGeom prst="rect">
+            <a:avLst/>
+          </a:prstGeom>
+          <a:solidFill>
+            <a:srgbClr val="FF5A1F"/>
+          </a:solidFill>
+          <a:ln/>
+        </p:spPr>
+      </p:sp>
+      <p:sp>
+        <p:nvSpPr>
+          <p:cNvPr id="10" name="Shape 8"/>
+          <p:cNvSpPr/>
+          <p:nvPr/>
+        </p:nvSpPr>
+        <p:spPr>
+          <a:xfrm>
+            <a:off x="4169664" y="6400800"/>
+            <a:ext cx="256032" cy="256032"/>
+          </a:xfrm>
+          <a:prstGeom prst="rect">
+            <a:avLst/>
+          </a:prstGeom>
+          <a:solidFill>
+            <a:srgbClr val="D73200"/>
+          </a:solidFill>
+          <a:ln/>
+        </p:spPr>
+      </p:sp>
+      <p:sp>
+        <p:nvSpPr>
+          <p:cNvPr id="11" name="Shape 9"/>
+          <p:cNvSpPr/>
+          <p:nvPr/>
+        </p:nvSpPr>
+        <p:spPr>
+          <a:xfrm>
+            <a:off x="4700016" y="6400800"/>
+            <a:ext cx="256032" cy="256032"/>
+          </a:xfrm>
+          <a:prstGeom prst="rect">
+            <a:avLst/>
+          </a:prstGeom>
+          <a:solidFill>
+            <a:srgbClr val="D73200"/>
+          </a:solidFill>
+          <a:ln/>
+        </p:spPr>
+      </p:sp>
+      <p:sp>
+        <p:nvSpPr>
+          <p:cNvPr id="12" name="Shape 10"/>
+          <p:cNvSpPr/>
+          <p:nvPr/>
+        </p:nvSpPr>
+        <p:spPr>
+          <a:xfrm>
+            <a:off x="5230368" y="6400800"/>
+            <a:ext cx="256032" cy="256032"/>
+          </a:xfrm>
+          <a:prstGeom prst="rect">
+            <a:avLst/>
+          </a:prstGeom>
+          <a:solidFill>
+            <a:srgbClr val="FF5A1F"/>
+          </a:solidFill>
+          <a:ln/>
+        </p:spPr>
+      </p:sp>
+      <p:sp>
+        <p:nvSpPr>
+          <p:cNvPr id="13" name="Shape 11"/>
+          <p:cNvSpPr/>
+          <p:nvPr/>
+        </p:nvSpPr>
+        <p:spPr>
+          <a:xfrm>
+            <a:off x="5760720" y="6400800"/>
+            <a:ext cx="256032" cy="256032"/>
+          </a:xfrm>
+          <a:prstGeom prst="rect">
+            <a:avLst/>
+          </a:prstGeom>
+          <a:solidFill>
+            <a:srgbClr val="D73200"/>
+          </a:solidFill>
+          <a:ln/>
+        </p:spPr>
+      </p:sp>
+      <p:sp>
+        <p:nvSpPr>
+          <p:cNvPr id="14" name="Shape 12"/>
+          <p:cNvSpPr/>
+          <p:nvPr/>
+        </p:nvSpPr>
+        <p:spPr>
+          <a:xfrm>
+            <a:off x="6291072" y="6400800"/>
+            <a:ext cx="256032" cy="256032"/>
+          </a:xfrm>
+          <a:prstGeom prst="rect">
+            <a:avLst/>
+          </a:prstGeom>
+          <a:solidFill>
+            <a:srgbClr val="D73200"/>
+          </a:solidFill>
+          <a:ln/>
+        </p:spPr>
+      </p:sp>
+      <p:sp>
+        <p:nvSpPr>
+          <p:cNvPr id="15" name="Shape 13"/>
+          <p:cNvSpPr/>
+          <p:nvPr/>
+        </p:nvSpPr>
+        <p:spPr>
+          <a:xfrm>
+            <a:off x="6821424" y="6400800"/>
+            <a:ext cx="256032" cy="256032"/>
+          </a:xfrm>
+          <a:prstGeom prst="rect">
+            <a:avLst/>
+          </a:prstGeom>
+          <a:solidFill>
+            <a:srgbClr val="FF5A1F"/>
+          </a:solidFill>
+          <a:ln/>
+        </p:spPr>
+      </p:sp>
+      <p:sp>
+        <p:nvSpPr>
+          <p:cNvPr id="16" name="Shape 14"/>
+          <p:cNvSpPr/>
+          <p:nvPr/>
+        </p:nvSpPr>
+        <p:spPr>
+          <a:xfrm>
+            <a:off x="7351776" y="6400800"/>
+            <a:ext cx="256032" cy="256032"/>
+          </a:xfrm>
+          <a:prstGeom prst="rect">
+            <a:avLst/>
+          </a:prstGeom>
+          <a:solidFill>
+            <a:srgbClr val="D73200"/>
+          </a:solidFill>
+          <a:ln/>
+        </p:spPr>
+      </p:sp>
+      <p:sp>
+        <p:nvSpPr>
+          <p:cNvPr id="17" name="Shape 15"/>
+          <p:cNvSpPr/>
+          <p:nvPr/>
+        </p:nvSpPr>
+        <p:spPr>
+          <a:xfrm>
+            <a:off x="7882128" y="6400800"/>
+            <a:ext cx="256032" cy="256032"/>
+          </a:xfrm>
+          <a:prstGeom prst="rect">
+            <a:avLst/>
+          </a:prstGeom>
+          <a:solidFill>
+            <a:srgbClr val="D73200"/>
+          </a:solidFill>
+          <a:ln/>
+        </p:spPr>
+      </p:sp>
+      <p:sp>
+        <p:nvSpPr>
+          <p:cNvPr id="18" name="Shape 16"/>
+          <p:cNvSpPr/>
+          <p:nvPr/>
+        </p:nvSpPr>
+        <p:spPr>
+          <a:xfrm>
+            <a:off x="8412480" y="6400800"/>
+            <a:ext cx="256032" cy="256032"/>
+          </a:xfrm>
+          <a:prstGeom prst="rect">
+            <a:avLst/>
+          </a:prstGeom>
+          <a:solidFill>
+            <a:srgbClr val="FF5A1F"/>
+          </a:solidFill>
+          <a:ln/>
+        </p:spPr>
+      </p:sp>
+      <p:sp>
+        <p:nvSpPr>
+          <p:cNvPr id="19" name="Shape 17"/>
+          <p:cNvSpPr/>
+          <p:nvPr/>
+        </p:nvSpPr>
+        <p:spPr>
+          <a:xfrm>
+            <a:off x="8942832" y="6400800"/>
+            <a:ext cx="256032" cy="256032"/>
+          </a:xfrm>
+          <a:prstGeom prst="rect">
+            <a:avLst/>
+          </a:prstGeom>
+          <a:solidFill>
+            <a:srgbClr val="D73200"/>
+          </a:solidFill>
+          <a:ln/>
+        </p:spPr>
+      </p:sp>
+      <p:sp>
+        <p:nvSpPr>
+          <p:cNvPr id="20" name="Shape 18"/>
+          <p:cNvSpPr/>
+          <p:nvPr/>
+        </p:nvSpPr>
+        <p:spPr>
+          <a:xfrm>
+            <a:off x="9473184" y="6400800"/>
+            <a:ext cx="256032" cy="256032"/>
+          </a:xfrm>
+          <a:prstGeom prst="rect">
+            <a:avLst/>
+          </a:prstGeom>
+          <a:solidFill>
+            <a:srgbClr val="D73200"/>
+          </a:solidFill>
+          <a:ln/>
+        </p:spPr>
+      </p:sp>
+      <p:sp>
+        <p:nvSpPr>
+          <p:cNvPr id="21" name="Shape 19"/>
+          <p:cNvSpPr/>
+          <p:nvPr/>
+        </p:nvSpPr>
+        <p:spPr>
+          <a:xfrm>
+            <a:off x="10003536" y="6400800"/>
+            <a:ext cx="256032" cy="256032"/>
+          </a:xfrm>
+          <a:prstGeom prst="rect">
+            <a:avLst/>
+          </a:prstGeom>
+          <a:solidFill>
+            <a:srgbClr val="FF5A1F"/>
+          </a:solidFill>
+          <a:ln/>
+        </p:spPr>
+      </p:sp>
+      <p:sp>
+        <p:nvSpPr>
+          <p:cNvPr id="22" name="Shape 20"/>
+          <p:cNvSpPr/>
+          <p:nvPr/>
+        </p:nvSpPr>
+        <p:spPr>
+          <a:xfrm>
+            <a:off x="10533888" y="6400800"/>
+            <a:ext cx="256032" cy="256032"/>
+          </a:xfrm>
+          <a:prstGeom prst="rect">
+            <a:avLst/>
+          </a:prstGeom>
+          <a:solidFill>
+            <a:srgbClr val="D73200"/>
+          </a:solidFill>
+          <a:ln/>
+        </p:spPr>
+      </p:sp>
+      <p:sp>
+        <p:nvSpPr>
+          <p:cNvPr id="23" name="Shape 21"/>
+          <p:cNvSpPr/>
+          <p:nvPr/>
+        </p:nvSpPr>
+        <p:spPr>
+          <a:xfrm>
+            <a:off x="11064240" y="6400800"/>
+            <a:ext cx="256032" cy="256032"/>
+          </a:xfrm>
+          <a:prstGeom prst="rect">
+            <a:avLst/>
+          </a:prstGeom>
+          <a:solidFill>
+            <a:srgbClr val="D73200"/>
+          </a:solidFill>
+          <a:ln/>
+        </p:spPr>
+      </p:sp>
+      <p:sp>
+        <p:nvSpPr>
+          <p:cNvPr id="24" name="Shape 22"/>
+          <p:cNvSpPr/>
+          <p:nvPr/>
+        </p:nvSpPr>
+        <p:spPr>
+          <a:xfrm>
+            <a:off x="11594592" y="6400800"/>
+            <a:ext cx="256032" cy="256032"/>
+          </a:xfrm>
+          <a:prstGeom prst="rect">
+            <a:avLst/>
+          </a:prstGeom>
+          <a:solidFill>
+            <a:srgbClr val="FF5A1F"/>
+          </a:solidFill>
+          <a:ln/>
+        </p:spPr>
+      </p:sp>
+      <p:sp>
+        <p:nvSpPr>
+          <p:cNvPr id="25" name="Text 23"/>
+          <p:cNvSpPr/>
+          <p:nvPr/>
+        </p:nvSpPr>
+        <p:spPr>
+          <a:xfrm>
+            <a:off x="777240" y="685800"/>
+            <a:ext cx="914400" cy="640080"/>
           </a:xfrm>
           <a:prstGeom prst="rect">
             <a:avLst/>
@@ -2509,7 +3826,7 @@
           <a:ln/>
         </p:spPr>
         <p:txBody>
-          <a:bodyPr wrap="square" rtlCol="0" anchor="ctr"/>
+          <a:bodyPr wrap="square" lIns="0" tIns="0" rIns="0" bIns="0" rtlCol="0" anchor="ctr"/>
           <a:lstStyle/>
           <a:p>
             <a:pPr indent="0" marL="0">
@@ -2518,13 +3835,13 @@
             <a:r>
               <a:rPr lang="en-US" sz="3000" b="1" dirty="0">
                 <a:solidFill>
-                  <a:srgbClr val="152238"/>
+                  <a:srgbClr val="FF5A1F"/>
                 </a:solidFill>
-                <a:latin typeface="Cambria" pitchFamily="34" charset="0"/>
-                <a:ea typeface="Cambria" pitchFamily="34" charset="-122"/>
-                <a:cs typeface="Cambria" pitchFamily="34" charset="-120"/>
+                <a:latin typeface="Century Gothic" pitchFamily="34" charset="0"/>
+                <a:ea typeface="Century Gothic" pitchFamily="34" charset="-122"/>
+                <a:cs typeface="Century Gothic" pitchFamily="34" charset="-120"/>
               </a:rPr>
-              <a:t>Live Demo</a:t>
+              <a:t>02</a:t>
             </a:r>
             <a:endParaRPr lang="en-US" sz="3000" dirty="0"/>
           </a:p>
@@ -2532,14 +3849,14 @@
       </p:sp>
       <p:sp>
         <p:nvSpPr>
-          <p:cNvPr id="3" name="Text 1"/>
-          <p:cNvSpPr/>
-          <p:nvPr/>
-        </p:nvSpPr>
-        <p:spPr>
-          <a:xfrm>
-            <a:off x="658368" y="1143000"/>
-            <a:ext cx="10972800" cy="365760"/>
+          <p:cNvPr id="26" name="Text 24"/>
+          <p:cNvSpPr/>
+          <p:nvPr/>
+        </p:nvSpPr>
+        <p:spPr>
+          <a:xfrm>
+            <a:off x="1645920" y="859536"/>
+            <a:ext cx="9768535" cy="274320"/>
           </a:xfrm>
           <a:prstGeom prst="rect">
             <a:avLst/>
@@ -2548,16 +3865,94 @@
           <a:ln/>
         </p:spPr>
         <p:txBody>
-          <a:bodyPr wrap="square" rtlCol="0" anchor="ctr"/>
+          <a:bodyPr wrap="square" lIns="0" tIns="0" rIns="0" bIns="0" rtlCol="0" anchor="ctr"/>
           <a:lstStyle/>
           <a:p>
             <a:pPr indent="0" marL="0">
               <a:buNone/>
             </a:pPr>
             <a:r>
-              <a:rPr lang="en-US" sz="1400" dirty="0">
+              <a:rPr lang="en-US" sz="1100" b="1" spc="200" kern="0" dirty="0">
                 <a:solidFill>
-                  <a:srgbClr val="2E5AA0"/>
+                  <a:srgbClr val="8B98A6"/>
+                </a:solidFill>
+                <a:latin typeface="Calibri" pitchFamily="34" charset="0"/>
+                <a:ea typeface="Calibri" pitchFamily="34" charset="-122"/>
+                <a:cs typeface="Calibri" pitchFamily="34" charset="-120"/>
+              </a:rPr>
+              <a:t>LIVE DEMO</a:t>
+            </a:r>
+            <a:endParaRPr lang="en-US" sz="1100" dirty="0"/>
+          </a:p>
+        </p:txBody>
+      </p:sp>
+      <p:sp>
+        <p:nvSpPr>
+          <p:cNvPr id="27" name="Text 25"/>
+          <p:cNvSpPr/>
+          <p:nvPr/>
+        </p:nvSpPr>
+        <p:spPr>
+          <a:xfrm>
+            <a:off x="777240" y="1335024"/>
+            <a:ext cx="10637215" cy="640080"/>
+          </a:xfrm>
+          <a:prstGeom prst="rect">
+            <a:avLst/>
+          </a:prstGeom>
+          <a:noFill/>
+          <a:ln/>
+        </p:spPr>
+        <p:txBody>
+          <a:bodyPr wrap="square" lIns="0" tIns="0" rIns="0" bIns="0" rtlCol="0" anchor="ctr"/>
+          <a:lstStyle/>
+          <a:p>
+            <a:pPr indent="0" marL="0">
+              <a:buNone/>
+            </a:pPr>
+            <a:r>
+              <a:rPr lang="en-US" sz="2300" b="1" dirty="0">
+                <a:solidFill>
+                  <a:srgbClr val="EEF3FA"/>
+                </a:solidFill>
+                <a:latin typeface="Century Gothic" pitchFamily="34" charset="0"/>
+                <a:ea typeface="Century Gothic" pitchFamily="34" charset="-122"/>
+                <a:cs typeface="Century Gothic" pitchFamily="34" charset="-120"/>
+              </a:rPr>
+              <a:t>See it running on AWS</a:t>
+            </a:r>
+            <a:endParaRPr lang="en-US" sz="2300" dirty="0"/>
+          </a:p>
+        </p:txBody>
+      </p:sp>
+      <p:sp>
+        <p:nvSpPr>
+          <p:cNvPr id="28" name="Text 26"/>
+          <p:cNvSpPr/>
+          <p:nvPr/>
+        </p:nvSpPr>
+        <p:spPr>
+          <a:xfrm>
+            <a:off x="777240" y="1856232"/>
+            <a:ext cx="10637215" cy="274320"/>
+          </a:xfrm>
+          <a:prstGeom prst="rect">
+            <a:avLst/>
+          </a:prstGeom>
+          <a:noFill/>
+          <a:ln/>
+        </p:spPr>
+        <p:txBody>
+          <a:bodyPr wrap="square" rtlCol="0" anchor="ctr"/>
+          <a:lstStyle/>
+          <a:p>
+            <a:pPr indent="0" marL="0">
+              <a:buNone/>
+            </a:pPr>
+            <a:r>
+              <a:rPr lang="en-US" sz="1100" dirty="0">
+                <a:solidFill>
+                  <a:srgbClr val="FF5A1F"/>
                 </a:solidFill>
                 <a:latin typeface="Consolas" pitchFamily="34" charset="0"/>
                 <a:ea typeface="Consolas" pitchFamily="34" charset="-122"/>
@@ -2565,32 +3960,32 @@
               </a:rPr>
               <a:t>public-transit-fleet-monitor.s3.us-east-1.amazonaws.com</a:t>
             </a:r>
-            <a:endParaRPr lang="en-US" sz="1400" dirty="0"/>
-          </a:p>
-        </p:txBody>
-      </p:sp>
-      <p:sp>
-        <p:nvSpPr>
-          <p:cNvPr id="4" name="Shape 2"/>
-          <p:cNvSpPr/>
-          <p:nvPr/>
-        </p:nvSpPr>
-        <p:spPr>
-          <a:xfrm>
-            <a:off x="640080" y="1828800"/>
-            <a:ext cx="10881360" cy="1371600"/>
+            <a:endParaRPr lang="en-US" sz="1100" dirty="0"/>
+          </a:p>
+        </p:txBody>
+      </p:sp>
+      <p:sp>
+        <p:nvSpPr>
+          <p:cNvPr id="29" name="Shape 27"/>
+          <p:cNvSpPr/>
+          <p:nvPr/>
+        </p:nvSpPr>
+        <p:spPr>
+          <a:xfrm>
+            <a:off x="777240" y="2468880"/>
+            <a:ext cx="3301898" cy="3200400"/>
           </a:xfrm>
           <a:prstGeom prst="roundRect">
             <a:avLst>
-              <a:gd name="adj" fmla="val 6667"/>
+              <a:gd name="adj" fmla="val 1143"/>
             </a:avLst>
           </a:prstGeom>
           <a:solidFill>
-            <a:srgbClr val="EEF2F8"/>
-          </a:solidFill>
-          <a:ln w="15240">
+            <a:srgbClr val="13294A"/>
+          </a:solidFill>
+          <a:ln w="12700">
             <a:solidFill>
-              <a:srgbClr val="2E5AA0"/>
+              <a:srgbClr val="273D5E"/>
             </a:solidFill>
             <a:prstDash val="solid"/>
           </a:ln>
@@ -2598,73 +3993,14 @@
       </p:sp>
       <p:sp>
         <p:nvSpPr>
-          <p:cNvPr id="5" name="Shape 3"/>
-          <p:cNvSpPr/>
-          <p:nvPr/>
-        </p:nvSpPr>
-        <p:spPr>
-          <a:xfrm>
-            <a:off x="960120" y="2203704"/>
-            <a:ext cx="621792" cy="621792"/>
-          </a:xfrm>
-          <a:prstGeom prst="ellipse">
-            <a:avLst/>
-          </a:prstGeom>
-          <a:solidFill>
-            <a:srgbClr val="1E3A6E"/>
-          </a:solidFill>
-          <a:ln/>
-        </p:spPr>
-      </p:sp>
-      <p:sp>
-        <p:nvSpPr>
-          <p:cNvPr id="6" name="Text 4"/>
-          <p:cNvSpPr/>
-          <p:nvPr/>
-        </p:nvSpPr>
-        <p:spPr>
-          <a:xfrm>
-            <a:off x="960120" y="2203704"/>
-            <a:ext cx="621792" cy="621792"/>
-          </a:xfrm>
-          <a:prstGeom prst="rect">
-            <a:avLst/>
-          </a:prstGeom>
-          <a:noFill/>
-          <a:ln/>
-        </p:spPr>
-        <p:txBody>
-          <a:bodyPr wrap="square" lIns="0" tIns="0" rIns="0" bIns="0" rtlCol="0" anchor="ctr"/>
-          <a:lstStyle/>
-          <a:p>
-            <a:pPr algn="ctr" indent="0" marL="0">
-              <a:buNone/>
-            </a:pPr>
-            <a:r>
-              <a:rPr lang="en-US" sz="2200" b="1" dirty="0">
-                <a:solidFill>
-                  <a:srgbClr val="FFFFFF"/>
-                </a:solidFill>
-                <a:latin typeface="Cambria" pitchFamily="34" charset="0"/>
-                <a:ea typeface="Cambria" pitchFamily="34" charset="-122"/>
-                <a:cs typeface="Cambria" pitchFamily="34" charset="-120"/>
-              </a:rPr>
-              <a:t>1</a:t>
-            </a:r>
-            <a:endParaRPr lang="en-US" sz="2200" dirty="0"/>
-          </a:p>
-        </p:txBody>
-      </p:sp>
-      <p:sp>
-        <p:nvSpPr>
-          <p:cNvPr id="7" name="Text 5"/>
-          <p:cNvSpPr/>
-          <p:nvPr/>
-        </p:nvSpPr>
-        <p:spPr>
-          <a:xfrm>
-            <a:off x="1828800" y="2029968"/>
-            <a:ext cx="9418320" cy="411480"/>
+          <p:cNvPr id="30" name="Text 28"/>
+          <p:cNvSpPr/>
+          <p:nvPr/>
+        </p:nvSpPr>
+        <p:spPr>
+          <a:xfrm>
+            <a:off x="1051560" y="2706624"/>
+            <a:ext cx="1828800" cy="777240"/>
           </a:xfrm>
           <a:prstGeom prst="rect">
             <a:avLst/>
@@ -2680,30 +4016,30 @@
               <a:buNone/>
             </a:pPr>
             <a:r>
-              <a:rPr lang="en-US" sz="1700" b="1" dirty="0">
+              <a:rPr lang="en-US" sz="3800" b="1" dirty="0">
                 <a:solidFill>
-                  <a:srgbClr val="152238"/>
+                  <a:srgbClr val="FF5A1F"/>
                 </a:solidFill>
-                <a:latin typeface="Calibri" pitchFamily="34" charset="0"/>
-                <a:ea typeface="Calibri" pitchFamily="34" charset="-122"/>
-                <a:cs typeface="Calibri" pitchFamily="34" charset="-120"/>
+                <a:latin typeface="Century Gothic" pitchFamily="34" charset="0"/>
+                <a:ea typeface="Century Gothic" pitchFamily="34" charset="-122"/>
+                <a:cs typeface="Century Gothic" pitchFamily="34" charset="-120"/>
               </a:rPr>
-              <a:t>A roster of meter cards per depot</a:t>
+              <a:t>01</a:t>
             </a:r>
-            <a:endParaRPr lang="en-US" sz="1700" dirty="0"/>
-          </a:p>
-        </p:txBody>
-      </p:sp>
-      <p:sp>
-        <p:nvSpPr>
-          <p:cNvPr id="8" name="Text 6"/>
-          <p:cNvSpPr/>
-          <p:nvPr/>
-        </p:nvSpPr>
-        <p:spPr>
-          <a:xfrm>
-            <a:off x="1828800" y="2450592"/>
-            <a:ext cx="9418320" cy="594360"/>
+            <a:endParaRPr lang="en-US" sz="3800" dirty="0"/>
+          </a:p>
+        </p:txBody>
+      </p:sp>
+      <p:sp>
+        <p:nvSpPr>
+          <p:cNvPr id="31" name="Text 29"/>
+          <p:cNvSpPr/>
+          <p:nvPr/>
+        </p:nvSpPr>
+        <p:spPr>
+          <a:xfrm>
+            <a:off x="1069848" y="3520440"/>
+            <a:ext cx="2753258" cy="868680"/>
           </a:xfrm>
           <a:prstGeom prst="rect">
             <a:avLst/>
@@ -2712,19 +4048,61 @@
           <a:ln/>
         </p:spPr>
         <p:txBody>
-          <a:bodyPr wrap="square" lIns="0" tIns="0" rIns="0" bIns="0" rtlCol="0" anchor="ctr"/>
+          <a:bodyPr wrap="square" lIns="0" tIns="0" rIns="0" bIns="0" rtlCol="0" anchor="t"/>
           <a:lstStyle/>
           <a:p>
             <a:pPr indent="0" marL="0">
               <a:lnSpc>
-                <a:spcPct val="105000"/>
+                <a:spcPct val="100000"/>
               </a:lnSpc>
               <a:buNone/>
             </a:pPr>
             <a:r>
-              <a:rPr lang="en-US" sz="1300" dirty="0">
+              <a:rPr lang="en-US" sz="1550" b="1" dirty="0">
                 <a:solidFill>
-                  <a:srgbClr val="5C6A80"/>
+                  <a:srgbClr val="EEF3FA"/>
+                </a:solidFill>
+                <a:latin typeface="Century Gothic" pitchFamily="34" charset="0"/>
+                <a:ea typeface="Century Gothic" pitchFamily="34" charset="-122"/>
+                <a:cs typeface="Century Gothic" pitchFamily="34" charset="-120"/>
+              </a:rPr>
+              <a:t>A roster of meter cards per depot</a:t>
+            </a:r>
+            <a:endParaRPr lang="en-US" sz="1550" dirty="0"/>
+          </a:p>
+        </p:txBody>
+      </p:sp>
+      <p:sp>
+        <p:nvSpPr>
+          <p:cNvPr id="32" name="Text 30"/>
+          <p:cNvSpPr/>
+          <p:nvPr/>
+        </p:nvSpPr>
+        <p:spPr>
+          <a:xfrm>
+            <a:off x="1069848" y="4389120"/>
+            <a:ext cx="2753258" cy="1097280"/>
+          </a:xfrm>
+          <a:prstGeom prst="rect">
+            <a:avLst/>
+          </a:prstGeom>
+          <a:noFill/>
+          <a:ln/>
+        </p:spPr>
+        <p:txBody>
+          <a:bodyPr wrap="square" lIns="0" tIns="0" rIns="0" bIns="0" rtlCol="0" anchor="ctr"/>
+          <a:lstStyle/>
+          <a:p>
+            <a:pPr indent="0" marL="0">
+              <a:lnSpc>
+                <a:spcPct val="120000"/>
+              </a:lnSpc>
+              <a:buNone/>
+            </a:pPr>
+            <a:r>
+              <a:rPr lang="en-US" sz="1200" dirty="0">
+                <a:solidFill>
+                  <a:srgbClr val="8B98A6"/>
                 </a:solidFill>
                 <a:latin typeface="Calibri" pitchFamily="34" charset="0"/>
                 <a:ea typeface="Calibri" pitchFamily="34" charset="-122"/>
@@ -2732,32 +4110,32 @@
               </a:rPr>
               <a:t>Engine temperature, brake-pad wear, passenger count, fuel level and GPS speed live for every bus, with native meter bars.</a:t>
             </a:r>
-            <a:endParaRPr lang="en-US" sz="1300" dirty="0"/>
-          </a:p>
-        </p:txBody>
-      </p:sp>
-      <p:sp>
-        <p:nvSpPr>
-          <p:cNvPr id="9" name="Shape 7"/>
-          <p:cNvSpPr/>
-          <p:nvPr/>
-        </p:nvSpPr>
-        <p:spPr>
-          <a:xfrm>
-            <a:off x="640080" y="3401568"/>
-            <a:ext cx="5303520" cy="2606040"/>
+            <a:endParaRPr lang="en-US" sz="1200" dirty="0"/>
+          </a:p>
+        </p:txBody>
+      </p:sp>
+      <p:sp>
+        <p:nvSpPr>
+          <p:cNvPr id="33" name="Shape 31"/>
+          <p:cNvSpPr/>
+          <p:nvPr/>
+        </p:nvSpPr>
+        <p:spPr>
+          <a:xfrm>
+            <a:off x="4444898" y="2468880"/>
+            <a:ext cx="3301898" cy="3200400"/>
           </a:xfrm>
           <a:prstGeom prst="roundRect">
             <a:avLst>
-              <a:gd name="adj" fmla="val 3509"/>
+              <a:gd name="adj" fmla="val 1143"/>
             </a:avLst>
           </a:prstGeom>
           <a:solidFill>
-            <a:srgbClr val="EEF2F8"/>
-          </a:solidFill>
-          <a:ln w="15240">
+            <a:srgbClr val="13294A"/>
+          </a:solidFill>
+          <a:ln w="12700">
             <a:solidFill>
-              <a:srgbClr val="2E5AA0"/>
+              <a:srgbClr val="273D5E"/>
             </a:solidFill>
             <a:prstDash val="solid"/>
           </a:ln>
@@ -2765,73 +4143,14 @@
       </p:sp>
       <p:sp>
         <p:nvSpPr>
-          <p:cNvPr id="10" name="Shape 8"/>
-          <p:cNvSpPr/>
-          <p:nvPr/>
-        </p:nvSpPr>
-        <p:spPr>
-          <a:xfrm>
-            <a:off x="914400" y="3675888"/>
-            <a:ext cx="603504" cy="603504"/>
-          </a:xfrm>
-          <a:prstGeom prst="ellipse">
-            <a:avLst/>
-          </a:prstGeom>
-          <a:solidFill>
-            <a:srgbClr val="1E3A6E"/>
-          </a:solidFill>
-          <a:ln/>
-        </p:spPr>
-      </p:sp>
-      <p:sp>
-        <p:nvSpPr>
-          <p:cNvPr id="11" name="Text 9"/>
-          <p:cNvSpPr/>
-          <p:nvPr/>
-        </p:nvSpPr>
-        <p:spPr>
-          <a:xfrm>
-            <a:off x="914400" y="3675888"/>
-            <a:ext cx="603504" cy="603504"/>
-          </a:xfrm>
-          <a:prstGeom prst="rect">
-            <a:avLst/>
-          </a:prstGeom>
-          <a:noFill/>
-          <a:ln/>
-        </p:spPr>
-        <p:txBody>
-          <a:bodyPr wrap="square" lIns="0" tIns="0" rIns="0" bIns="0" rtlCol="0" anchor="ctr"/>
-          <a:lstStyle/>
-          <a:p>
-            <a:pPr algn="ctr" indent="0" marL="0">
-              <a:buNone/>
-            </a:pPr>
-            <a:r>
-              <a:rPr lang="en-US" sz="2200" b="1" dirty="0">
-                <a:solidFill>
-                  <a:srgbClr val="FFFFFF"/>
-                </a:solidFill>
-                <a:latin typeface="Cambria" pitchFamily="34" charset="0"/>
-                <a:ea typeface="Cambria" pitchFamily="34" charset="-122"/>
-                <a:cs typeface="Cambria" pitchFamily="34" charset="-120"/>
-              </a:rPr>
-              <a:t>2</a:t>
-            </a:r>
-            <a:endParaRPr lang="en-US" sz="2200" dirty="0"/>
-          </a:p>
-        </p:txBody>
-      </p:sp>
-      <p:sp>
-        <p:nvSpPr>
-          <p:cNvPr id="12" name="Text 10"/>
-          <p:cNvSpPr/>
-          <p:nvPr/>
-        </p:nvSpPr>
-        <p:spPr>
-          <a:xfrm>
-            <a:off x="914400" y="4425696"/>
-            <a:ext cx="4754880" cy="777240"/>
+          <p:cNvPr id="34" name="Text 32"/>
+          <p:cNvSpPr/>
+          <p:nvPr/>
+        </p:nvSpPr>
+        <p:spPr>
+          <a:xfrm>
+            <a:off x="4719218" y="2706624"/>
+            <a:ext cx="1828800" cy="777240"/>
           </a:xfrm>
           <a:prstGeom prst="rect">
             <a:avLst/>
@@ -2847,30 +4166,30 @@
               <a:buNone/>
             </a:pPr>
             <a:r>
-              <a:rPr lang="en-US" sz="1600" b="1" dirty="0">
+              <a:rPr lang="en-US" sz="3800" b="1" dirty="0">
                 <a:solidFill>
-                  <a:srgbClr val="152238"/>
+                  <a:srgbClr val="FF5A1F"/>
                 </a:solidFill>
-                <a:latin typeface="Calibri" pitchFamily="34" charset="0"/>
-                <a:ea typeface="Calibri" pitchFamily="34" charset="-122"/>
-                <a:cs typeface="Calibri" pitchFamily="34" charset="-120"/>
+                <a:latin typeface="Century Gothic" pitchFamily="34" charset="0"/>
+                <a:ea typeface="Century Gothic" pitchFamily="34" charset="-122"/>
+                <a:cs typeface="Century Gothic" pitchFamily="34" charset="-120"/>
               </a:rPr>
-              <a:t>An engine-overheat alarm on depot-a</a:t>
+              <a:t>02</a:t>
             </a:r>
-            <a:endParaRPr lang="en-US" sz="1600" dirty="0"/>
-          </a:p>
-        </p:txBody>
-      </p:sp>
-      <p:sp>
-        <p:nvSpPr>
-          <p:cNvPr id="13" name="Text 11"/>
-          <p:cNvSpPr/>
-          <p:nvPr/>
-        </p:nvSpPr>
-        <p:spPr>
-          <a:xfrm>
-            <a:off x="914400" y="5184648"/>
-            <a:ext cx="4754880" cy="640080"/>
+            <a:endParaRPr lang="en-US" sz="3800" dirty="0"/>
+          </a:p>
+        </p:txBody>
+      </p:sp>
+      <p:sp>
+        <p:nvSpPr>
+          <p:cNvPr id="35" name="Text 33"/>
+          <p:cNvSpPr/>
+          <p:nvPr/>
+        </p:nvSpPr>
+        <p:spPr>
+          <a:xfrm>
+            <a:off x="4737506" y="3520440"/>
+            <a:ext cx="2753258" cy="868680"/>
           </a:xfrm>
           <a:prstGeom prst="rect">
             <a:avLst/>
@@ -2879,19 +4198,61 @@
           <a:ln/>
         </p:spPr>
         <p:txBody>
-          <a:bodyPr wrap="square" lIns="0" tIns="0" rIns="0" bIns="0" rtlCol="0" anchor="ctr"/>
+          <a:bodyPr wrap="square" lIns="0" tIns="0" rIns="0" bIns="0" rtlCol="0" anchor="t"/>
           <a:lstStyle/>
           <a:p>
             <a:pPr indent="0" marL="0">
               <a:lnSpc>
-                <a:spcPct val="106000"/>
+                <a:spcPct val="100000"/>
               </a:lnSpc>
               <a:buNone/>
             </a:pPr>
             <a:r>
-              <a:rPr lang="en-US" sz="1250" dirty="0">
+              <a:rPr lang="en-US" sz="1550" b="1" dirty="0">
                 <a:solidFill>
-                  <a:srgbClr val="5C6A80"/>
+                  <a:srgbClr val="EEF3FA"/>
+                </a:solidFill>
+                <a:latin typeface="Century Gothic" pitchFamily="34" charset="0"/>
+                <a:ea typeface="Century Gothic" pitchFamily="34" charset="-122"/>
+                <a:cs typeface="Century Gothic" pitchFamily="34" charset="-120"/>
+              </a:rPr>
+              <a:t>An engine-overheat alarm on depot-a</a:t>
+            </a:r>
+            <a:endParaRPr lang="en-US" sz="1550" dirty="0"/>
+          </a:p>
+        </p:txBody>
+      </p:sp>
+      <p:sp>
+        <p:nvSpPr>
+          <p:cNvPr id="36" name="Text 34"/>
+          <p:cNvSpPr/>
+          <p:nvPr/>
+        </p:nvSpPr>
+        <p:spPr>
+          <a:xfrm>
+            <a:off x="4737506" y="4389120"/>
+            <a:ext cx="2753258" cy="1097280"/>
+          </a:xfrm>
+          <a:prstGeom prst="rect">
+            <a:avLst/>
+          </a:prstGeom>
+          <a:noFill/>
+          <a:ln/>
+        </p:spPr>
+        <p:txBody>
+          <a:bodyPr wrap="square" lIns="0" tIns="0" rIns="0" bIns="0" rtlCol="0" anchor="ctr"/>
+          <a:lstStyle/>
+          <a:p>
+            <a:pPr indent="0" marL="0">
+              <a:lnSpc>
+                <a:spcPct val="120000"/>
+              </a:lnSpc>
+              <a:buNone/>
+            </a:pPr>
+            <a:r>
+              <a:rPr lang="en-US" sz="1200" dirty="0">
+                <a:solidFill>
+                  <a:srgbClr val="8B98A6"/>
                 </a:solidFill>
                 <a:latin typeface="Calibri" pitchFamily="34" charset="0"/>
                 <a:ea typeface="Calibri" pitchFamily="34" charset="-122"/>
@@ -2899,32 +4260,32 @@
               </a:rPr>
               <a:t>Depot-a is firing an engine-overheat alarm right now while depot-b stays clear, each raised on its own window.</a:t>
             </a:r>
-            <a:endParaRPr lang="en-US" sz="1250" dirty="0"/>
-          </a:p>
-        </p:txBody>
-      </p:sp>
-      <p:sp>
-        <p:nvSpPr>
-          <p:cNvPr id="14" name="Shape 12"/>
-          <p:cNvSpPr/>
-          <p:nvPr/>
-        </p:nvSpPr>
-        <p:spPr>
-          <a:xfrm>
-            <a:off x="6217920" y="3401568"/>
-            <a:ext cx="5303520" cy="2606040"/>
+            <a:endParaRPr lang="en-US" sz="1200" dirty="0"/>
+          </a:p>
+        </p:txBody>
+      </p:sp>
+      <p:sp>
+        <p:nvSpPr>
+          <p:cNvPr id="37" name="Shape 35"/>
+          <p:cNvSpPr/>
+          <p:nvPr/>
+        </p:nvSpPr>
+        <p:spPr>
+          <a:xfrm>
+            <a:off x="8112557" y="2468880"/>
+            <a:ext cx="3301898" cy="3200400"/>
           </a:xfrm>
           <a:prstGeom prst="roundRect">
             <a:avLst>
-              <a:gd name="adj" fmla="val 3509"/>
+              <a:gd name="adj" fmla="val 1143"/>
             </a:avLst>
           </a:prstGeom>
           <a:solidFill>
-            <a:srgbClr val="EEF2F8"/>
-          </a:solidFill>
-          <a:ln w="15240">
+            <a:srgbClr val="13294A"/>
+          </a:solidFill>
+          <a:ln w="12700">
             <a:solidFill>
-              <a:srgbClr val="2E5AA0"/>
+              <a:srgbClr val="273D5E"/>
             </a:solidFill>
             <a:prstDash val="solid"/>
           </a:ln>
@@ -2932,73 +4293,14 @@
       </p:sp>
       <p:sp>
         <p:nvSpPr>
-          <p:cNvPr id="15" name="Shape 13"/>
-          <p:cNvSpPr/>
-          <p:nvPr/>
-        </p:nvSpPr>
-        <p:spPr>
-          <a:xfrm>
-            <a:off x="6492240" y="3675888"/>
-            <a:ext cx="603504" cy="603504"/>
-          </a:xfrm>
-          <a:prstGeom prst="ellipse">
-            <a:avLst/>
-          </a:prstGeom>
-          <a:solidFill>
-            <a:srgbClr val="1E3A6E"/>
-          </a:solidFill>
-          <a:ln/>
-        </p:spPr>
-      </p:sp>
-      <p:sp>
-        <p:nvSpPr>
-          <p:cNvPr id="16" name="Text 14"/>
-          <p:cNvSpPr/>
-          <p:nvPr/>
-        </p:nvSpPr>
-        <p:spPr>
-          <a:xfrm>
-            <a:off x="6492240" y="3675888"/>
-            <a:ext cx="603504" cy="603504"/>
-          </a:xfrm>
-          <a:prstGeom prst="rect">
-            <a:avLst/>
-          </a:prstGeom>
-          <a:noFill/>
-          <a:ln/>
-        </p:spPr>
-        <p:txBody>
-          <a:bodyPr wrap="square" lIns="0" tIns="0" rIns="0" bIns="0" rtlCol="0" anchor="ctr"/>
-          <a:lstStyle/>
-          <a:p>
-            <a:pPr algn="ctr" indent="0" marL="0">
-              <a:buNone/>
-            </a:pPr>
-            <a:r>
-              <a:rPr lang="en-US" sz="2200" b="1" dirty="0">
-                <a:solidFill>
-                  <a:srgbClr val="FFFFFF"/>
-                </a:solidFill>
-                <a:latin typeface="Cambria" pitchFamily="34" charset="0"/>
-                <a:ea typeface="Cambria" pitchFamily="34" charset="-122"/>
-                <a:cs typeface="Cambria" pitchFamily="34" charset="-120"/>
-              </a:rPr>
-              <a:t>3</a:t>
-            </a:r>
-            <a:endParaRPr lang="en-US" sz="2200" dirty="0"/>
-          </a:p>
-        </p:txBody>
-      </p:sp>
-      <p:sp>
-        <p:nvSpPr>
-          <p:cNvPr id="17" name="Text 15"/>
-          <p:cNvSpPr/>
-          <p:nvPr/>
-        </p:nvSpPr>
-        <p:spPr>
-          <a:xfrm>
-            <a:off x="6492240" y="4425696"/>
-            <a:ext cx="4754880" cy="777240"/>
+          <p:cNvPr id="38" name="Text 36"/>
+          <p:cNvSpPr/>
+          <p:nvPr/>
+        </p:nvSpPr>
+        <p:spPr>
+          <a:xfrm>
+            <a:off x="8386877" y="2706624"/>
+            <a:ext cx="1828800" cy="777240"/>
           </a:xfrm>
           <a:prstGeom prst="rect">
             <a:avLst/>
@@ -3014,30 +4316,30 @@
               <a:buNone/>
             </a:pPr>
             <a:r>
-              <a:rPr lang="en-US" sz="1600" b="1" dirty="0">
+              <a:rPr lang="en-US" sz="3800" b="1" dirty="0">
                 <a:solidFill>
-                  <a:srgbClr val="152238"/>
+                  <a:srgbClr val="FF5A1F"/>
                 </a:solidFill>
-                <a:latin typeface="Calibri" pitchFamily="34" charset="0"/>
-                <a:ea typeface="Calibri" pitchFamily="34" charset="-122"/>
-                <a:cs typeface="Calibri" pitchFamily="34" charset="-120"/>
+                <a:latin typeface="Century Gothic" pitchFamily="34" charset="0"/>
+                <a:ea typeface="Century Gothic" pitchFamily="34" charset="-122"/>
+                <a:cs typeface="Century Gothic" pitchFamily="34" charset="-120"/>
               </a:rPr>
-              <a:t>Per-depot trend charts</a:t>
+              <a:t>03</a:t>
             </a:r>
-            <a:endParaRPr lang="en-US" sz="1600" dirty="0"/>
-          </a:p>
-        </p:txBody>
-      </p:sp>
-      <p:sp>
-        <p:nvSpPr>
-          <p:cNvPr id="18" name="Text 16"/>
-          <p:cNvSpPr/>
-          <p:nvPr/>
-        </p:nvSpPr>
-        <p:spPr>
-          <a:xfrm>
-            <a:off x="6492240" y="5184648"/>
-            <a:ext cx="4754880" cy="640080"/>
+            <a:endParaRPr lang="en-US" sz="3800" dirty="0"/>
+          </a:p>
+        </p:txBody>
+      </p:sp>
+      <p:sp>
+        <p:nvSpPr>
+          <p:cNvPr id="39" name="Text 37"/>
+          <p:cNvSpPr/>
+          <p:nvPr/>
+        </p:nvSpPr>
+        <p:spPr>
+          <a:xfrm>
+            <a:off x="8405165" y="3520440"/>
+            <a:ext cx="2753258" cy="868680"/>
           </a:xfrm>
           <a:prstGeom prst="rect">
             <a:avLst/>
@@ -3046,19 +4348,61 @@
           <a:ln/>
         </p:spPr>
         <p:txBody>
-          <a:bodyPr wrap="square" lIns="0" tIns="0" rIns="0" bIns="0" rtlCol="0" anchor="ctr"/>
+          <a:bodyPr wrap="square" lIns="0" tIns="0" rIns="0" bIns="0" rtlCol="0" anchor="t"/>
           <a:lstStyle/>
           <a:p>
             <a:pPr indent="0" marL="0">
               <a:lnSpc>
-                <a:spcPct val="106000"/>
+                <a:spcPct val="100000"/>
               </a:lnSpc>
               <a:buNone/>
             </a:pPr>
             <a:r>
-              <a:rPr lang="en-US" sz="1250" dirty="0">
+              <a:rPr lang="en-US" sz="1550" b="1" dirty="0">
                 <a:solidFill>
-                  <a:srgbClr val="5C6A80"/>
+                  <a:srgbClr val="EEF3FA"/>
+                </a:solidFill>
+                <a:latin typeface="Century Gothic" pitchFamily="34" charset="0"/>
+                <a:ea typeface="Century Gothic" pitchFamily="34" charset="-122"/>
+                <a:cs typeface="Century Gothic" pitchFamily="34" charset="-120"/>
+              </a:rPr>
+              <a:t>Per-depot trend charts</a:t>
+            </a:r>
+            <a:endParaRPr lang="en-US" sz="1550" dirty="0"/>
+          </a:p>
+        </p:txBody>
+      </p:sp>
+      <p:sp>
+        <p:nvSpPr>
+          <p:cNvPr id="40" name="Text 38"/>
+          <p:cNvSpPr/>
+          <p:nvPr/>
+        </p:nvSpPr>
+        <p:spPr>
+          <a:xfrm>
+            <a:off x="8405165" y="4389120"/>
+            <a:ext cx="2753258" cy="1097280"/>
+          </a:xfrm>
+          <a:prstGeom prst="rect">
+            <a:avLst/>
+          </a:prstGeom>
+          <a:noFill/>
+          <a:ln/>
+        </p:spPr>
+        <p:txBody>
+          <a:bodyPr wrap="square" lIns="0" tIns="0" rIns="0" bIns="0" rtlCol="0" anchor="ctr"/>
+          <a:lstStyle/>
+          <a:p>
+            <a:pPr indent="0" marL="0">
+              <a:lnSpc>
+                <a:spcPct val="120000"/>
+              </a:lnSpc>
+              <a:buNone/>
+            </a:pPr>
+            <a:r>
+              <a:rPr lang="en-US" sz="1200" dirty="0">
+                <a:solidFill>
+                  <a:srgbClr val="8B98A6"/>
                 </a:solidFill>
                 <a:latin typeface="Calibri" pitchFamily="34" charset="0"/>
                 <a:ea typeface="Calibri" pitchFamily="34" charset="-122"/>
@@ -3066,7 +4410,7 @@
               </a:rPr>
               <a:t>Depot-a in orange and depot-b in green, so a climbing engine temperature is visible on the trend before it alarms.</a:t>
             </a:r>
-            <a:endParaRPr lang="en-US" sz="1250" dirty="0"/>
+            <a:endParaRPr lang="en-US" sz="1200" dirty="0"/>
           </a:p>
         </p:txBody>
       </p:sp>
@@ -3084,7 +4428,7 @@
     <p:bg>
       <p:bgPr>
         <a:solidFill>
-          <a:srgbClr val="FFFFFF"/>
+          <a:srgbClr val="0A1930"/>
         </a:solidFill>
       </p:bgPr>
     </p:bg>
@@ -3104,14 +4448,474 @@
       </p:grpSpPr>
       <p:sp>
         <p:nvSpPr>
-          <p:cNvPr id="2" name="Text 0"/>
-          <p:cNvSpPr/>
-          <p:nvPr/>
-        </p:nvSpPr>
-        <p:spPr>
-          <a:xfrm>
-            <a:off x="640080" y="502920"/>
-            <a:ext cx="10972800" cy="822960"/>
+          <p:cNvPr id="2" name="Shape 0"/>
+          <p:cNvSpPr/>
+          <p:nvPr/>
+        </p:nvSpPr>
+        <p:spPr>
+          <a:xfrm>
+            <a:off x="0" y="6199632"/>
+            <a:ext cx="12191695" cy="658368"/>
+          </a:xfrm>
+          <a:prstGeom prst="rect">
+            <a:avLst/>
+          </a:prstGeom>
+          <a:solidFill>
+            <a:srgbClr val="18273E"/>
+          </a:solidFill>
+          <a:ln/>
+        </p:spPr>
+      </p:sp>
+      <p:sp>
+        <p:nvSpPr>
+          <p:cNvPr id="3" name="Shape 1"/>
+          <p:cNvSpPr/>
+          <p:nvPr/>
+        </p:nvSpPr>
+        <p:spPr>
+          <a:xfrm>
+            <a:off x="457200" y="6400800"/>
+            <a:ext cx="256032" cy="256032"/>
+          </a:xfrm>
+          <a:prstGeom prst="rect">
+            <a:avLst/>
+          </a:prstGeom>
+          <a:solidFill>
+            <a:srgbClr val="FF5A1F"/>
+          </a:solidFill>
+          <a:ln/>
+        </p:spPr>
+      </p:sp>
+      <p:sp>
+        <p:nvSpPr>
+          <p:cNvPr id="4" name="Shape 2"/>
+          <p:cNvSpPr/>
+          <p:nvPr/>
+        </p:nvSpPr>
+        <p:spPr>
+          <a:xfrm>
+            <a:off x="987552" y="6400800"/>
+            <a:ext cx="256032" cy="256032"/>
+          </a:xfrm>
+          <a:prstGeom prst="rect">
+            <a:avLst/>
+          </a:prstGeom>
+          <a:solidFill>
+            <a:srgbClr val="D73200"/>
+          </a:solidFill>
+          <a:ln/>
+        </p:spPr>
+      </p:sp>
+      <p:sp>
+        <p:nvSpPr>
+          <p:cNvPr id="5" name="Shape 3"/>
+          <p:cNvSpPr/>
+          <p:nvPr/>
+        </p:nvSpPr>
+        <p:spPr>
+          <a:xfrm>
+            <a:off x="1517904" y="6400800"/>
+            <a:ext cx="256032" cy="256032"/>
+          </a:xfrm>
+          <a:prstGeom prst="rect">
+            <a:avLst/>
+          </a:prstGeom>
+          <a:solidFill>
+            <a:srgbClr val="D73200"/>
+          </a:solidFill>
+          <a:ln/>
+        </p:spPr>
+      </p:sp>
+      <p:sp>
+        <p:nvSpPr>
+          <p:cNvPr id="6" name="Shape 4"/>
+          <p:cNvSpPr/>
+          <p:nvPr/>
+        </p:nvSpPr>
+        <p:spPr>
+          <a:xfrm>
+            <a:off x="2048256" y="6400800"/>
+            <a:ext cx="256032" cy="256032"/>
+          </a:xfrm>
+          <a:prstGeom prst="rect">
+            <a:avLst/>
+          </a:prstGeom>
+          <a:solidFill>
+            <a:srgbClr val="FF5A1F"/>
+          </a:solidFill>
+          <a:ln/>
+        </p:spPr>
+      </p:sp>
+      <p:sp>
+        <p:nvSpPr>
+          <p:cNvPr id="7" name="Shape 5"/>
+          <p:cNvSpPr/>
+          <p:nvPr/>
+        </p:nvSpPr>
+        <p:spPr>
+          <a:xfrm>
+            <a:off x="2578608" y="6400800"/>
+            <a:ext cx="256032" cy="256032"/>
+          </a:xfrm>
+          <a:prstGeom prst="rect">
+            <a:avLst/>
+          </a:prstGeom>
+          <a:solidFill>
+            <a:srgbClr val="D73200"/>
+          </a:solidFill>
+          <a:ln/>
+        </p:spPr>
+      </p:sp>
+      <p:sp>
+        <p:nvSpPr>
+          <p:cNvPr id="8" name="Shape 6"/>
+          <p:cNvSpPr/>
+          <p:nvPr/>
+        </p:nvSpPr>
+        <p:spPr>
+          <a:xfrm>
+            <a:off x="3108960" y="6400800"/>
+            <a:ext cx="256032" cy="256032"/>
+          </a:xfrm>
+          <a:prstGeom prst="rect">
+            <a:avLst/>
+          </a:prstGeom>
+          <a:solidFill>
+            <a:srgbClr val="D73200"/>
+          </a:solidFill>
+          <a:ln/>
+        </p:spPr>
+      </p:sp>
+      <p:sp>
+        <p:nvSpPr>
+          <p:cNvPr id="9" name="Shape 7"/>
+          <p:cNvSpPr/>
+          <p:nvPr/>
+        </p:nvSpPr>
+        <p:spPr>
+          <a:xfrm>
+            <a:off x="3639312" y="6400800"/>
+            <a:ext cx="256032" cy="256032"/>
+          </a:xfrm>
+          <a:prstGeom prst="rect">
+            <a:avLst/>
+          </a:prstGeom>
+          <a:solidFill>
+            <a:srgbClr val="FF5A1F"/>
+          </a:solidFill>
+          <a:ln/>
+        </p:spPr>
+      </p:sp>
+      <p:sp>
+        <p:nvSpPr>
+          <p:cNvPr id="10" name="Shape 8"/>
+          <p:cNvSpPr/>
+          <p:nvPr/>
+        </p:nvSpPr>
+        <p:spPr>
+          <a:xfrm>
+            <a:off x="4169664" y="6400800"/>
+            <a:ext cx="256032" cy="256032"/>
+          </a:xfrm>
+          <a:prstGeom prst="rect">
+            <a:avLst/>
+          </a:prstGeom>
+          <a:solidFill>
+            <a:srgbClr val="D73200"/>
+          </a:solidFill>
+          <a:ln/>
+        </p:spPr>
+      </p:sp>
+      <p:sp>
+        <p:nvSpPr>
+          <p:cNvPr id="11" name="Shape 9"/>
+          <p:cNvSpPr/>
+          <p:nvPr/>
+        </p:nvSpPr>
+        <p:spPr>
+          <a:xfrm>
+            <a:off x="4700016" y="6400800"/>
+            <a:ext cx="256032" cy="256032"/>
+          </a:xfrm>
+          <a:prstGeom prst="rect">
+            <a:avLst/>
+          </a:prstGeom>
+          <a:solidFill>
+            <a:srgbClr val="D73200"/>
+          </a:solidFill>
+          <a:ln/>
+        </p:spPr>
+      </p:sp>
+      <p:sp>
+        <p:nvSpPr>
+          <p:cNvPr id="12" name="Shape 10"/>
+          <p:cNvSpPr/>
+          <p:nvPr/>
+        </p:nvSpPr>
+        <p:spPr>
+          <a:xfrm>
+            <a:off x="5230368" y="6400800"/>
+            <a:ext cx="256032" cy="256032"/>
+          </a:xfrm>
+          <a:prstGeom prst="rect">
+            <a:avLst/>
+          </a:prstGeom>
+          <a:solidFill>
+            <a:srgbClr val="FF5A1F"/>
+          </a:solidFill>
+          <a:ln/>
+        </p:spPr>
+      </p:sp>
+      <p:sp>
+        <p:nvSpPr>
+          <p:cNvPr id="13" name="Shape 11"/>
+          <p:cNvSpPr/>
+          <p:nvPr/>
+        </p:nvSpPr>
+        <p:spPr>
+          <a:xfrm>
+            <a:off x="5760720" y="6400800"/>
+            <a:ext cx="256032" cy="256032"/>
+          </a:xfrm>
+          <a:prstGeom prst="rect">
+            <a:avLst/>
+          </a:prstGeom>
+          <a:solidFill>
+            <a:srgbClr val="D73200"/>
+          </a:solidFill>
+          <a:ln/>
+        </p:spPr>
+      </p:sp>
+      <p:sp>
+        <p:nvSpPr>
+          <p:cNvPr id="14" name="Shape 12"/>
+          <p:cNvSpPr/>
+          <p:nvPr/>
+        </p:nvSpPr>
+        <p:spPr>
+          <a:xfrm>
+            <a:off x="6291072" y="6400800"/>
+            <a:ext cx="256032" cy="256032"/>
+          </a:xfrm>
+          <a:prstGeom prst="rect">
+            <a:avLst/>
+          </a:prstGeom>
+          <a:solidFill>
+            <a:srgbClr val="D73200"/>
+          </a:solidFill>
+          <a:ln/>
+        </p:spPr>
+      </p:sp>
+      <p:sp>
+        <p:nvSpPr>
+          <p:cNvPr id="15" name="Shape 13"/>
+          <p:cNvSpPr/>
+          <p:nvPr/>
+        </p:nvSpPr>
+        <p:spPr>
+          <a:xfrm>
+            <a:off x="6821424" y="6400800"/>
+            <a:ext cx="256032" cy="256032"/>
+          </a:xfrm>
+          <a:prstGeom prst="rect">
+            <a:avLst/>
+          </a:prstGeom>
+          <a:solidFill>
+            <a:srgbClr val="FF5A1F"/>
+          </a:solidFill>
+          <a:ln/>
+        </p:spPr>
+      </p:sp>
+      <p:sp>
+        <p:nvSpPr>
+          <p:cNvPr id="16" name="Shape 14"/>
+          <p:cNvSpPr/>
+          <p:nvPr/>
+        </p:nvSpPr>
+        <p:spPr>
+          <a:xfrm>
+            <a:off x="7351776" y="6400800"/>
+            <a:ext cx="256032" cy="256032"/>
+          </a:xfrm>
+          <a:prstGeom prst="rect">
+            <a:avLst/>
+          </a:prstGeom>
+          <a:solidFill>
+            <a:srgbClr val="D73200"/>
+          </a:solidFill>
+          <a:ln/>
+        </p:spPr>
+      </p:sp>
+      <p:sp>
+        <p:nvSpPr>
+          <p:cNvPr id="17" name="Shape 15"/>
+          <p:cNvSpPr/>
+          <p:nvPr/>
+        </p:nvSpPr>
+        <p:spPr>
+          <a:xfrm>
+            <a:off x="7882128" y="6400800"/>
+            <a:ext cx="256032" cy="256032"/>
+          </a:xfrm>
+          <a:prstGeom prst="rect">
+            <a:avLst/>
+          </a:prstGeom>
+          <a:solidFill>
+            <a:srgbClr val="D73200"/>
+          </a:solidFill>
+          <a:ln/>
+        </p:spPr>
+      </p:sp>
+      <p:sp>
+        <p:nvSpPr>
+          <p:cNvPr id="18" name="Shape 16"/>
+          <p:cNvSpPr/>
+          <p:nvPr/>
+        </p:nvSpPr>
+        <p:spPr>
+          <a:xfrm>
+            <a:off x="8412480" y="6400800"/>
+            <a:ext cx="256032" cy="256032"/>
+          </a:xfrm>
+          <a:prstGeom prst="rect">
+            <a:avLst/>
+          </a:prstGeom>
+          <a:solidFill>
+            <a:srgbClr val="FF5A1F"/>
+          </a:solidFill>
+          <a:ln/>
+        </p:spPr>
+      </p:sp>
+      <p:sp>
+        <p:nvSpPr>
+          <p:cNvPr id="19" name="Shape 17"/>
+          <p:cNvSpPr/>
+          <p:nvPr/>
+        </p:nvSpPr>
+        <p:spPr>
+          <a:xfrm>
+            <a:off x="8942832" y="6400800"/>
+            <a:ext cx="256032" cy="256032"/>
+          </a:xfrm>
+          <a:prstGeom prst="rect">
+            <a:avLst/>
+          </a:prstGeom>
+          <a:solidFill>
+            <a:srgbClr val="D73200"/>
+          </a:solidFill>
+          <a:ln/>
+        </p:spPr>
+      </p:sp>
+      <p:sp>
+        <p:nvSpPr>
+          <p:cNvPr id="20" name="Shape 18"/>
+          <p:cNvSpPr/>
+          <p:nvPr/>
+        </p:nvSpPr>
+        <p:spPr>
+          <a:xfrm>
+            <a:off x="9473184" y="6400800"/>
+            <a:ext cx="256032" cy="256032"/>
+          </a:xfrm>
+          <a:prstGeom prst="rect">
+            <a:avLst/>
+          </a:prstGeom>
+          <a:solidFill>
+            <a:srgbClr val="D73200"/>
+          </a:solidFill>
+          <a:ln/>
+        </p:spPr>
+      </p:sp>
+      <p:sp>
+        <p:nvSpPr>
+          <p:cNvPr id="21" name="Shape 19"/>
+          <p:cNvSpPr/>
+          <p:nvPr/>
+        </p:nvSpPr>
+        <p:spPr>
+          <a:xfrm>
+            <a:off x="10003536" y="6400800"/>
+            <a:ext cx="256032" cy="256032"/>
+          </a:xfrm>
+          <a:prstGeom prst="rect">
+            <a:avLst/>
+          </a:prstGeom>
+          <a:solidFill>
+            <a:srgbClr val="FF5A1F"/>
+          </a:solidFill>
+          <a:ln/>
+        </p:spPr>
+      </p:sp>
+      <p:sp>
+        <p:nvSpPr>
+          <p:cNvPr id="22" name="Shape 20"/>
+          <p:cNvSpPr/>
+          <p:nvPr/>
+        </p:nvSpPr>
+        <p:spPr>
+          <a:xfrm>
+            <a:off x="10533888" y="6400800"/>
+            <a:ext cx="256032" cy="256032"/>
+          </a:xfrm>
+          <a:prstGeom prst="rect">
+            <a:avLst/>
+          </a:prstGeom>
+          <a:solidFill>
+            <a:srgbClr val="D73200"/>
+          </a:solidFill>
+          <a:ln/>
+        </p:spPr>
+      </p:sp>
+      <p:sp>
+        <p:nvSpPr>
+          <p:cNvPr id="23" name="Shape 21"/>
+          <p:cNvSpPr/>
+          <p:nvPr/>
+        </p:nvSpPr>
+        <p:spPr>
+          <a:xfrm>
+            <a:off x="11064240" y="6400800"/>
+            <a:ext cx="256032" cy="256032"/>
+          </a:xfrm>
+          <a:prstGeom prst="rect">
+            <a:avLst/>
+          </a:prstGeom>
+          <a:solidFill>
+            <a:srgbClr val="D73200"/>
+          </a:solidFill>
+          <a:ln/>
+        </p:spPr>
+      </p:sp>
+      <p:sp>
+        <p:nvSpPr>
+          <p:cNvPr id="24" name="Shape 22"/>
+          <p:cNvSpPr/>
+          <p:nvPr/>
+        </p:nvSpPr>
+        <p:spPr>
+          <a:xfrm>
+            <a:off x="11594592" y="6400800"/>
+            <a:ext cx="256032" cy="256032"/>
+          </a:xfrm>
+          <a:prstGeom prst="rect">
+            <a:avLst/>
+          </a:prstGeom>
+          <a:solidFill>
+            <a:srgbClr val="FF5A1F"/>
+          </a:solidFill>
+          <a:ln/>
+        </p:spPr>
+      </p:sp>
+      <p:sp>
+        <p:nvSpPr>
+          <p:cNvPr id="25" name="Text 23"/>
+          <p:cNvSpPr/>
+          <p:nvPr/>
+        </p:nvSpPr>
+        <p:spPr>
+          <a:xfrm>
+            <a:off x="777240" y="685800"/>
+            <a:ext cx="914400" cy="640080"/>
           </a:xfrm>
           <a:prstGeom prst="rect">
             <a:avLst/>
@@ -3120,64 +4924,37 @@
           <a:ln/>
         </p:spPr>
         <p:txBody>
-          <a:bodyPr wrap="square" rtlCol="0" anchor="t"/>
+          <a:bodyPr wrap="square" lIns="0" tIns="0" rIns="0" bIns="0" rtlCol="0" anchor="ctr"/>
           <a:lstStyle/>
           <a:p>
             <a:pPr indent="0" marL="0">
               <a:buNone/>
             </a:pPr>
             <a:r>
-              <a:rPr lang="en-US" sz="2800" b="1" dirty="0">
+              <a:rPr lang="en-US" sz="3000" b="1" dirty="0">
                 <a:solidFill>
-                  <a:srgbClr val="152238"/>
+                  <a:srgbClr val="FF5A1F"/>
                 </a:solidFill>
-                <a:latin typeface="Cambria" pitchFamily="34" charset="0"/>
-                <a:ea typeface="Cambria" pitchFamily="34" charset="-122"/>
-                <a:cs typeface="Cambria" pitchFamily="34" charset="-120"/>
+                <a:latin typeface="Century Gothic" pitchFamily="34" charset="0"/>
+                <a:ea typeface="Century Gothic" pitchFamily="34" charset="-122"/>
+                <a:cs typeface="Century Gothic" pitchFamily="34" charset="-120"/>
               </a:rPr>
-              <a:t>Hardest Part — buffer first, group later</a:t>
+              <a:t>03</a:t>
             </a:r>
-            <a:endParaRPr lang="en-US" sz="2800" dirty="0"/>
-          </a:p>
-        </p:txBody>
-      </p:sp>
-      <p:sp>
-        <p:nvSpPr>
-          <p:cNvPr id="3" name="Shape 1"/>
-          <p:cNvSpPr/>
-          <p:nvPr/>
-        </p:nvSpPr>
-        <p:spPr>
-          <a:xfrm>
-            <a:off x="731520" y="1920240"/>
-            <a:ext cx="10698480" cy="1965960"/>
-          </a:xfrm>
-          <a:prstGeom prst="roundRect">
-            <a:avLst>
-              <a:gd name="adj" fmla="val 4651"/>
-            </a:avLst>
-          </a:prstGeom>
-          <a:solidFill>
-            <a:srgbClr val="EEF2F8"/>
-          </a:solidFill>
-          <a:ln w="19050">
-            <a:solidFill>
-              <a:srgbClr val="FF6A1F"/>
-            </a:solidFill>
-            <a:prstDash val="solid"/>
-          </a:ln>
-        </p:spPr>
-      </p:sp>
-      <p:sp>
-        <p:nvSpPr>
-          <p:cNvPr id="4" name="Text 2"/>
-          <p:cNvSpPr/>
-          <p:nvPr/>
-        </p:nvSpPr>
-        <p:spPr>
-          <a:xfrm>
-            <a:off x="1005840" y="2103120"/>
-            <a:ext cx="3657600" cy="457200"/>
+            <a:endParaRPr lang="en-US" sz="3000" dirty="0"/>
+          </a:p>
+        </p:txBody>
+      </p:sp>
+      <p:sp>
+        <p:nvSpPr>
+          <p:cNvPr id="26" name="Text 24"/>
+          <p:cNvSpPr/>
+          <p:nvPr/>
+        </p:nvSpPr>
+        <p:spPr>
+          <a:xfrm>
+            <a:off x="1645920" y="859536"/>
+            <a:ext cx="9768535" cy="274320"/>
           </a:xfrm>
           <a:prstGeom prst="rect">
             <a:avLst/>
@@ -3193,30 +4970,30 @@
               <a:buNone/>
             </a:pPr>
             <a:r>
-              <a:rPr lang="en-US" sz="1900" b="1" dirty="0">
+              <a:rPr lang="en-US" sz="1100" b="1" spc="200" kern="0" dirty="0">
                 <a:solidFill>
-                  <a:srgbClr val="FF6A1F"/>
+                  <a:srgbClr val="8B98A6"/>
                 </a:solidFill>
-                <a:latin typeface="Cambria" pitchFamily="34" charset="0"/>
-                <a:ea typeface="Cambria" pitchFamily="34" charset="-122"/>
-                <a:cs typeface="Cambria" pitchFamily="34" charset="-120"/>
+                <a:latin typeface="Calibri" pitchFamily="34" charset="0"/>
+                <a:ea typeface="Calibri" pitchFamily="34" charset="-122"/>
+                <a:cs typeface="Calibri" pitchFamily="34" charset="-120"/>
               </a:rPr>
-              <a:t>Problem</a:t>
+              <a:t>CHALLENGE</a:t>
             </a:r>
-            <a:endParaRPr lang="en-US" sz="1900" dirty="0"/>
-          </a:p>
-        </p:txBody>
-      </p:sp>
-      <p:sp>
-        <p:nvSpPr>
-          <p:cNvPr id="5" name="Text 3"/>
-          <p:cNvSpPr/>
-          <p:nvPr/>
-        </p:nvSpPr>
-        <p:spPr>
-          <a:xfrm>
-            <a:off x="1005840" y="2578608"/>
-            <a:ext cx="9966960" cy="1188720"/>
+            <a:endParaRPr lang="en-US" sz="1100" dirty="0"/>
+          </a:p>
+        </p:txBody>
+      </p:sp>
+      <p:sp>
+        <p:nvSpPr>
+          <p:cNvPr id="27" name="Text 25"/>
+          <p:cNvSpPr/>
+          <p:nvPr/>
+        </p:nvSpPr>
+        <p:spPr>
+          <a:xfrm>
+            <a:off x="777240" y="1335024"/>
+            <a:ext cx="10637215" cy="640080"/>
           </a:xfrm>
           <a:prstGeom prst="rect">
             <a:avLst/>
@@ -3229,15 +5006,143 @@
           <a:lstStyle/>
           <a:p>
             <a:pPr indent="0" marL="0">
+              <a:buNone/>
+            </a:pPr>
+            <a:r>
+              <a:rPr lang="en-US" sz="2300" b="1" dirty="0">
+                <a:solidFill>
+                  <a:srgbClr val="EEF3FA"/>
+                </a:solidFill>
+                <a:latin typeface="Century Gothic" pitchFamily="34" charset="0"/>
+                <a:ea typeface="Century Gothic" pitchFamily="34" charset="-122"/>
+                <a:cs typeface="Century Gothic" pitchFamily="34" charset="-120"/>
+              </a:rPr>
+              <a:t>buffer first, group later</a:t>
+            </a:r>
+            <a:endParaRPr lang="en-US" sz="2300" dirty="0"/>
+          </a:p>
+        </p:txBody>
+      </p:sp>
+      <p:sp>
+        <p:nvSpPr>
+          <p:cNvPr id="28" name="Shape 26"/>
+          <p:cNvSpPr/>
+          <p:nvPr/>
+        </p:nvSpPr>
+        <p:spPr>
+          <a:xfrm>
+            <a:off x="777240" y="2377440"/>
+            <a:ext cx="5090008" cy="3291840"/>
+          </a:xfrm>
+          <a:prstGeom prst="roundRect">
+            <a:avLst>
+              <a:gd name="adj" fmla="val 1111"/>
+            </a:avLst>
+          </a:prstGeom>
+          <a:solidFill>
+            <a:srgbClr val="13294A"/>
+          </a:solidFill>
+          <a:ln w="12700">
+            <a:solidFill>
+              <a:srgbClr val="273D5E"/>
+            </a:solidFill>
+            <a:prstDash val="solid"/>
+          </a:ln>
+        </p:spPr>
+      </p:sp>
+      <p:sp>
+        <p:nvSpPr>
+          <p:cNvPr id="29" name="Text 27"/>
+          <p:cNvSpPr/>
+          <p:nvPr/>
+        </p:nvSpPr>
+        <p:spPr>
+          <a:xfrm>
+            <a:off x="1097280" y="2651760"/>
+            <a:ext cx="4449928" cy="320040"/>
+          </a:xfrm>
+          <a:prstGeom prst="rect">
+            <a:avLst/>
+          </a:prstGeom>
+          <a:noFill/>
+          <a:ln/>
+        </p:spPr>
+        <p:txBody>
+          <a:bodyPr wrap="square" lIns="0" tIns="0" rIns="0" bIns="0" rtlCol="0" anchor="ctr"/>
+          <a:lstStyle/>
+          <a:p>
+            <a:pPr indent="0" marL="0">
+              <a:buNone/>
+            </a:pPr>
+            <a:r>
+              <a:rPr lang="en-US" sz="1200" b="1" spc="200" kern="0" dirty="0">
+                <a:solidFill>
+                  <a:srgbClr val="D1584E"/>
+                </a:solidFill>
+                <a:latin typeface="Calibri" pitchFamily="34" charset="0"/>
+                <a:ea typeface="Calibri" pitchFamily="34" charset="-122"/>
+                <a:cs typeface="Calibri" pitchFamily="34" charset="-120"/>
+              </a:rPr>
+              <a:t>PROBLEM</a:t>
+            </a:r>
+            <a:endParaRPr lang="en-US" sz="1200" dirty="0"/>
+          </a:p>
+        </p:txBody>
+      </p:sp>
+      <p:sp>
+        <p:nvSpPr>
+          <p:cNvPr id="30" name="Shape 28"/>
+          <p:cNvSpPr/>
+          <p:nvPr/>
+        </p:nvSpPr>
+        <p:spPr>
+          <a:xfrm>
+            <a:off x="1097280" y="3035808"/>
+            <a:ext cx="4449928" cy="0"/>
+          </a:xfrm>
+          <a:prstGeom prst="line">
+            <a:avLst/>
+          </a:prstGeom>
+          <a:noFill/>
+          <a:ln w="19050">
+            <a:solidFill>
+              <a:srgbClr val="D1584E"/>
+            </a:solidFill>
+            <a:prstDash val="solid"/>
+          </a:ln>
+        </p:spPr>
+      </p:sp>
+      <p:sp>
+        <p:nvSpPr>
+          <p:cNvPr id="31" name="Text 29"/>
+          <p:cNvSpPr/>
+          <p:nvPr/>
+        </p:nvSpPr>
+        <p:spPr>
+          <a:xfrm>
+            <a:off x="1097280" y="3200400"/>
+            <a:ext cx="4449928" cy="2286000"/>
+          </a:xfrm>
+          <a:prstGeom prst="rect">
+            <a:avLst/>
+          </a:prstGeom>
+          <a:noFill/>
+          <a:ln/>
+        </p:spPr>
+        <p:txBody>
+          <a:bodyPr wrap="square" lIns="0" tIns="0" rIns="0" bIns="0" rtlCol="0" anchor="t"/>
+          <a:lstStyle/>
+          <a:p>
+            <a:pPr indent="0" marL="0">
               <a:lnSpc>
-                <a:spcPct val="105000"/>
+                <a:spcPct val="128000"/>
               </a:lnSpc>
               <a:buNone/>
             </a:pPr>
             <a:r>
-              <a:rPr lang="en-US" sz="1300" dirty="0">
+              <a:rPr lang="en-US" sz="1350" dirty="0">
                 <a:solidFill>
-                  <a:srgbClr val="152238"/>
+                  <a:srgbClr val="EEF3FA"/>
                 </a:solidFill>
                 <a:latin typeface="Calibri" pitchFamily="34" charset="0"/>
                 <a:ea typeface="Calibri" pitchFamily="34" charset="-122"/>
@@ -3245,32 +5150,32 @@
               </a:rPr>
               <a:t>Ten sensor streams post to one fog gateway on many worker threads at once, and every reading must survive being held until the window drain. A reading lost to a race does not crash anything — it just makes the fleet averages silently wrong. And locking every insert fixes the race only by making the senders queue behind each other.</a:t>
             </a:r>
-            <a:endParaRPr lang="en-US" sz="1300" dirty="0"/>
-          </a:p>
-        </p:txBody>
-      </p:sp>
-      <p:sp>
-        <p:nvSpPr>
-          <p:cNvPr id="6" name="Shape 4"/>
-          <p:cNvSpPr/>
-          <p:nvPr/>
-        </p:nvSpPr>
-        <p:spPr>
-          <a:xfrm>
-            <a:off x="731520" y="4041648"/>
-            <a:ext cx="10698480" cy="1965960"/>
+            <a:endParaRPr lang="en-US" sz="1350" dirty="0"/>
+          </a:p>
+        </p:txBody>
+      </p:sp>
+      <p:sp>
+        <p:nvSpPr>
+          <p:cNvPr id="32" name="Shape 30"/>
+          <p:cNvSpPr/>
+          <p:nvPr/>
+        </p:nvSpPr>
+        <p:spPr>
+          <a:xfrm>
+            <a:off x="6324448" y="2377440"/>
+            <a:ext cx="5090008" cy="3291840"/>
           </a:xfrm>
           <a:prstGeom prst="roundRect">
             <a:avLst>
-              <a:gd name="adj" fmla="val 4651"/>
+              <a:gd name="adj" fmla="val 1111"/>
             </a:avLst>
           </a:prstGeom>
           <a:solidFill>
-            <a:srgbClr val="EEF2F8"/>
-          </a:solidFill>
-          <a:ln w="19050">
+            <a:srgbClr val="13294A"/>
+          </a:solidFill>
+          <a:ln w="12700">
             <a:solidFill>
-              <a:srgbClr val="2E5AA0"/>
+              <a:srgbClr val="273D5E"/>
             </a:solidFill>
             <a:prstDash val="solid"/>
           </a:ln>
@@ -3278,14 +5183,14 @@
       </p:sp>
       <p:sp>
         <p:nvSpPr>
-          <p:cNvPr id="7" name="Text 5"/>
-          <p:cNvSpPr/>
-          <p:nvPr/>
-        </p:nvSpPr>
-        <p:spPr>
-          <a:xfrm>
-            <a:off x="1005840" y="4224528"/>
-            <a:ext cx="3657600" cy="457200"/>
+          <p:cNvPr id="33" name="Text 31"/>
+          <p:cNvSpPr/>
+          <p:nvPr/>
+        </p:nvSpPr>
+        <p:spPr>
+          <a:xfrm>
+            <a:off x="6644488" y="2651760"/>
+            <a:ext cx="4449928" cy="320040"/>
           </a:xfrm>
           <a:prstGeom prst="rect">
             <a:avLst/>
@@ -3301,51 +5206,74 @@
               <a:buNone/>
             </a:pPr>
             <a:r>
-              <a:rPr lang="en-US" sz="1900" b="1" dirty="0">
+              <a:rPr lang="en-US" sz="1200" b="1" spc="200" kern="0" dirty="0">
                 <a:solidFill>
-                  <a:srgbClr val="2E5AA0"/>
+                  <a:srgbClr val="3ECF8E"/>
                 </a:solidFill>
-                <a:latin typeface="Cambria" pitchFamily="34" charset="0"/>
-                <a:ea typeface="Cambria" pitchFamily="34" charset="-122"/>
-                <a:cs typeface="Cambria" pitchFamily="34" charset="-120"/>
+                <a:latin typeface="Calibri" pitchFamily="34" charset="0"/>
+                <a:ea typeface="Calibri" pitchFamily="34" charset="-122"/>
+                <a:cs typeface="Calibri" pitchFamily="34" charset="-120"/>
               </a:rPr>
-              <a:t>Solution</a:t>
+              <a:t>SOLUTION</a:t>
             </a:r>
-            <a:endParaRPr lang="en-US" sz="1900" dirty="0"/>
-          </a:p>
-        </p:txBody>
-      </p:sp>
-      <p:sp>
-        <p:nvSpPr>
-          <p:cNvPr id="8" name="Text 6"/>
-          <p:cNvSpPr/>
-          <p:nvPr/>
-        </p:nvSpPr>
-        <p:spPr>
-          <a:xfrm>
-            <a:off x="1005840" y="4700016"/>
-            <a:ext cx="9966960" cy="1188720"/>
-          </a:xfrm>
-          <a:prstGeom prst="rect">
+            <a:endParaRPr lang="en-US" sz="1200" dirty="0"/>
+          </a:p>
+        </p:txBody>
+      </p:sp>
+      <p:sp>
+        <p:nvSpPr>
+          <p:cNvPr id="34" name="Shape 32"/>
+          <p:cNvSpPr/>
+          <p:nvPr/>
+        </p:nvSpPr>
+        <p:spPr>
+          <a:xfrm>
+            <a:off x="6644488" y="3035808"/>
+            <a:ext cx="4449928" cy="0"/>
+          </a:xfrm>
+          <a:prstGeom prst="line">
             <a:avLst/>
           </a:prstGeom>
           <a:noFill/>
-          <a:ln/>
-        </p:spPr>
-        <p:txBody>
-          <a:bodyPr wrap="square" lIns="0" tIns="0" rIns="0" bIns="0" rtlCol="0" anchor="ctr"/>
+          <a:ln w="19050">
+            <a:solidFill>
+              <a:srgbClr val="3ECF8E"/>
+            </a:solidFill>
+            <a:prstDash val="solid"/>
+          </a:ln>
+        </p:spPr>
+      </p:sp>
+      <p:sp>
+        <p:nvSpPr>
+          <p:cNvPr id="35" name="Text 33"/>
+          <p:cNvSpPr/>
+          <p:nvPr/>
+        </p:nvSpPr>
+        <p:spPr>
+          <a:xfrm>
+            <a:off x="6644488" y="3200400"/>
+            <a:ext cx="4449928" cy="2286000"/>
+          </a:xfrm>
+          <a:prstGeom prst="rect">
+            <a:avLst/>
+          </a:prstGeom>
+          <a:noFill/>
+          <a:ln/>
+        </p:spPr>
+        <p:txBody>
+          <a:bodyPr wrap="square" lIns="0" tIns="0" rIns="0" bIns="0" rtlCol="0" anchor="t"/>
           <a:lstStyle/>
           <a:p>
             <a:pPr indent="0" marL="0">
               <a:lnSpc>
-                <a:spcPct val="105000"/>
+                <a:spcPct val="128000"/>
               </a:lnSpc>
               <a:buNone/>
             </a:pPr>
             <a:r>
-              <a:rPr lang="en-US" sz="1300" dirty="0">
+              <a:rPr lang="en-US" sz="1350" dirty="0">
                 <a:solidFill>
-                  <a:srgbClr val="152238"/>
+                  <a:srgbClr val="EEF3FA"/>
                 </a:solidFill>
                 <a:latin typeface="Calibri" pitchFamily="34" charset="0"/>
                 <a:ea typeface="Calibri" pitchFamily="34" charset="-122"/>
@@ -3353,7 +5281,7 @@
               </a:rPr>
               <a:t>Buffer first, group later: each arriving reading is a single lock-free enqueue onto a concurrent queue, nothing more, and all grouping by depot and signal is deferred to one thread that drains the whole queue once per window. Ingest stays contention-free. A stress test fires 32 threads writing 200 readings each, and after the drain all 6,400 are accounted for, zero lost.</a:t>
             </a:r>
-            <a:endParaRPr lang="en-US" sz="1300" dirty="0"/>
+            <a:endParaRPr lang="en-US" sz="1350" dirty="0"/>
           </a:p>
         </p:txBody>
       </p:sp>
